--- a/preview_v7/cn/l-cn-bs-u1-4.pptx
+++ b/preview_v7/cn/l-cn-bs-u1-4.pptx
@@ -3142,14 +3142,293 @@
       </p:sp>
       <p:sp>
         <p:nvSpPr>
-          <p:cNvPr id="3" name="TextBox 2"/>
+          <p:cNvPr id="3" name="Rectangle 2"/>
+          <p:cNvSpPr/>
+          <p:nvPr/>
+        </p:nvSpPr>
+        <p:spPr>
+          <a:xfrm>
+            <a:off x="0" y="0"/>
+            <a:ext cx="4572000" cy="6858000"/>
+          </a:xfrm>
+          <a:prstGeom prst="rect">
+            <a:avLst/>
+          </a:prstGeom>
+          <a:solidFill>
+            <a:srgbClr val="1C2A33"/>
+          </a:solidFill>
+          <a:ln>
+            <a:noFill/>
+          </a:ln>
+          <a:effectLst/>
+        </p:spPr>
+        <p:style>
+          <a:lnRef idx="1">
+            <a:schemeClr val="accent1"/>
+          </a:lnRef>
+          <a:fillRef idx="3">
+            <a:schemeClr val="accent1"/>
+          </a:fillRef>
+          <a:effectRef idx="2">
+            <a:schemeClr val="accent1"/>
+          </a:effectRef>
+          <a:fontRef idx="minor">
+            <a:schemeClr val="lt1"/>
+          </a:fontRef>
+        </p:style>
+        <p:txBody>
+          <a:bodyPr rtlCol="0" anchor="ctr"/>
+          <a:lstStyle/>
+          <a:p>
+            <a:pPr algn="ctr"/>
+          </a:p>
+        </p:txBody>
+      </p:sp>
+      <p:sp>
+        <p:nvSpPr>
+          <p:cNvPr id="4" name="Rectangle 3"/>
+          <p:cNvSpPr/>
+          <p:nvPr/>
+        </p:nvSpPr>
+        <p:spPr>
+          <a:xfrm>
+            <a:off x="548640" y="1234440"/>
+            <a:ext cx="822960" cy="38100"/>
+          </a:xfrm>
+          <a:prstGeom prst="rect">
+            <a:avLst/>
+          </a:prstGeom>
+          <a:solidFill>
+            <a:srgbClr val="C8A86B"/>
+          </a:solidFill>
+          <a:ln>
+            <a:noFill/>
+          </a:ln>
+          <a:effectLst/>
+        </p:spPr>
+        <p:style>
+          <a:lnRef idx="1">
+            <a:schemeClr val="accent1"/>
+          </a:lnRef>
+          <a:fillRef idx="3">
+            <a:schemeClr val="accent1"/>
+          </a:fillRef>
+          <a:effectRef idx="2">
+            <a:schemeClr val="accent1"/>
+          </a:effectRef>
+          <a:fontRef idx="minor">
+            <a:schemeClr val="lt1"/>
+          </a:fontRef>
+        </p:style>
+        <p:txBody>
+          <a:bodyPr rtlCol="0" anchor="ctr"/>
+          <a:lstStyle/>
+          <a:p>
+            <a:pPr algn="ctr"/>
+          </a:p>
+        </p:txBody>
+      </p:sp>
+      <p:sp>
+        <p:nvSpPr>
+          <p:cNvPr id="5" name="TextBox 4"/>
           <p:cNvSpPr txBox="1"/>
           <p:nvPr/>
         </p:nvSpPr>
         <p:spPr>
           <a:xfrm>
-            <a:off x="640080" y="640080"/>
-            <a:ext cx="10911535" cy="502920"/>
+            <a:off x="548640" y="1417320"/>
+            <a:ext cx="3840480" cy="457200"/>
+          </a:xfrm>
+          <a:prstGeom prst="rect">
+            <a:avLst/>
+          </a:prstGeom>
+          <a:noFill/>
+        </p:spPr>
+        <p:txBody>
+          <a:bodyPr wrap="square" anchor="t" lIns="0" rIns="0" tIns="0" bIns="0">
+            <a:spAutoFit/>
+          </a:bodyPr>
+          <a:lstStyle/>
+          <a:p>
+            <a:pPr algn="l"/>
+            <a:r>
+              <a:rPr sz="1500" b="1">
+                <a:solidFill>
+                  <a:srgbClr val="C8A86B"/>
+                </a:solidFill>
+                <a:latin typeface="微软雅黑"/>
+                <a:ea typeface="微软雅黑"/>
+                <a:cs typeface="微软雅黑"/>
+              </a:rPr>
+              <a:t>必修上 · 第一单元</a:t>
+            </a:r>
+          </a:p>
+        </p:txBody>
+      </p:sp>
+      <p:sp>
+        <p:nvSpPr>
+          <p:cNvPr id="6" name="TextBox 5"/>
+          <p:cNvSpPr txBox="1"/>
+          <p:nvPr/>
+        </p:nvSpPr>
+        <p:spPr>
+          <a:xfrm>
+            <a:off x="502920" y="1965960"/>
+            <a:ext cx="3931920" cy="1463040"/>
+          </a:xfrm>
+          <a:prstGeom prst="rect">
+            <a:avLst/>
+          </a:prstGeom>
+          <a:noFill/>
+        </p:spPr>
+        <p:txBody>
+          <a:bodyPr wrap="square" anchor="t" lIns="0" rIns="0" tIns="0" bIns="0">
+            <a:spAutoFit/>
+          </a:bodyPr>
+          <a:lstStyle/>
+          <a:p>
+            <a:pPr algn="l"/>
+            <a:r>
+              <a:rPr sz="6600" b="1">
+                <a:solidFill>
+                  <a:srgbClr val="FFFFFF"/>
+                </a:solidFill>
+                <a:latin typeface="楷体"/>
+                <a:ea typeface="楷体"/>
+                <a:cs typeface="楷体"/>
+              </a:rPr>
+              <a:t>百合花</a:t>
+            </a:r>
+          </a:p>
+        </p:txBody>
+      </p:sp>
+      <p:sp>
+        <p:nvSpPr>
+          <p:cNvPr id="7" name="TextBox 6"/>
+          <p:cNvSpPr txBox="1"/>
+          <p:nvPr/>
+        </p:nvSpPr>
+        <p:spPr>
+          <a:xfrm>
+            <a:off x="548640" y="3520440"/>
+            <a:ext cx="3840480" cy="548640"/>
+          </a:xfrm>
+          <a:prstGeom prst="rect">
+            <a:avLst/>
+          </a:prstGeom>
+          <a:noFill/>
+        </p:spPr>
+        <p:txBody>
+          <a:bodyPr wrap="square" anchor="t" lIns="0" rIns="0" tIns="0" bIns="0">
+            <a:spAutoFit/>
+          </a:bodyPr>
+          <a:lstStyle/>
+          <a:p>
+            <a:pPr algn="l"/>
+            <a:r>
+              <a:rPr sz="2200" b="1">
+                <a:solidFill>
+                  <a:srgbClr val="C8A86B"/>
+                </a:solidFill>
+                <a:latin typeface="楷体"/>
+                <a:ea typeface="楷体"/>
+                <a:cs typeface="楷体"/>
+              </a:rPr>
+              <a:t>精读 · 小说</a:t>
+            </a:r>
+          </a:p>
+        </p:txBody>
+      </p:sp>
+      <p:sp>
+        <p:nvSpPr>
+          <p:cNvPr id="8" name="TextBox 7"/>
+          <p:cNvSpPr txBox="1"/>
+          <p:nvPr/>
+        </p:nvSpPr>
+        <p:spPr>
+          <a:xfrm>
+            <a:off x="548640" y="4160520"/>
+            <a:ext cx="3840480" cy="1828800"/>
+          </a:xfrm>
+          <a:prstGeom prst="rect">
+            <a:avLst/>
+          </a:prstGeom>
+          <a:noFill/>
+        </p:spPr>
+        <p:txBody>
+          <a:bodyPr wrap="square" anchor="t" lIns="0" rIns="0" tIns="0" bIns="0">
+            <a:spAutoFit/>
+          </a:bodyPr>
+          <a:lstStyle/>
+          <a:p>
+            <a:pPr algn="l">
+              <a:lnSpc>
+                <a:spcPct val="150000"/>
+              </a:lnSpc>
+              <a:spcAft>
+                <a:spcPts val="600"/>
+              </a:spcAft>
+            </a:pPr>
+            <a:r>
+              <a:rPr sz="1400" b="0">
+                <a:solidFill>
+                  <a:srgbClr val="E7DFD2"/>
+                </a:solidFill>
+                <a:latin typeface="楷体"/>
+                <a:ea typeface="楷体"/>
+                <a:cs typeface="楷体"/>
+              </a:rPr>
+              <a:t>茹志鹃 · 1958 年</a:t>
+            </a:r>
+          </a:p>
+          <a:p>
+            <a:pPr algn="l">
+              <a:lnSpc>
+                <a:spcPct val="150000"/>
+              </a:lnSpc>
+            </a:pPr>
+            <a:r>
+              <a:rPr sz="1400" b="0">
+                <a:solidFill>
+                  <a:srgbClr val="FFFFFF"/>
+                </a:solidFill>
+                <a:latin typeface="楷体"/>
+                <a:ea typeface="楷体"/>
+                <a:cs typeface="楷体"/>
+              </a:rPr>
+              <a:t>一篇没有战场硝烟的</a:t>
+            </a:r>
+          </a:p>
+          <a:p>
+            <a:pPr algn="l">
+              <a:lnSpc>
+                <a:spcPct val="150000"/>
+              </a:lnSpc>
+            </a:pPr>
+            <a:r>
+              <a:rPr sz="1400" b="0">
+                <a:solidFill>
+                  <a:srgbClr val="FFFFFF"/>
+                </a:solidFill>
+                <a:latin typeface="楷体"/>
+                <a:ea typeface="楷体"/>
+                <a:cs typeface="楷体"/>
+              </a:rPr>
+              <a:t>战争小说。</a:t>
+            </a:r>
+          </a:p>
+        </p:txBody>
+      </p:sp>
+      <p:sp>
+        <p:nvSpPr>
+          <p:cNvPr id="9" name="TextBox 8"/>
+          <p:cNvSpPr txBox="1"/>
+          <p:nvPr/>
+        </p:nvSpPr>
+        <p:spPr>
+          <a:xfrm>
+            <a:off x="4937760" y="640080"/>
+            <a:ext cx="6400800" cy="365760"/>
           </a:xfrm>
           <a:prstGeom prst="rect">
             <a:avLst/>
@@ -3168,7 +3447,7 @@
               </a:spcAft>
             </a:pPr>
             <a:r>
-              <a:rPr sz="1200" b="1">
+              <a:rPr sz="1300" b="1">
                 <a:solidFill>
                   <a:srgbClr val="B23A2A"/>
                 </a:solidFill>
@@ -3176,20 +3455,20 @@
                 <a:ea typeface="微软雅黑"/>
                 <a:cs typeface="微软雅黑"/>
               </a:rPr>
-              <a:t>语文 · 必修上册 · 第1单元 青春的价值</a:t>
-            </a:r>
-          </a:p>
-        </p:txBody>
-      </p:sp>
-      <p:sp>
-        <p:nvSpPr>
-          <p:cNvPr id="4" name="Rectangle 3"/>
+              <a:t>青春的价值 · 第四课时</a:t>
+            </a:r>
+          </a:p>
+        </p:txBody>
+      </p:sp>
+      <p:sp>
+        <p:nvSpPr>
+          <p:cNvPr id="10" name="Rectangle 9"/>
           <p:cNvSpPr/>
           <p:nvPr/>
         </p:nvSpPr>
         <p:spPr>
           <a:xfrm>
-            <a:off x="640080" y="1207008"/>
+            <a:off x="4937760" y="1097280"/>
             <a:ext cx="822960" cy="30480"/>
           </a:xfrm>
           <a:prstGeom prst="rect">
@@ -3227,14 +3506,14 @@
       </p:sp>
       <p:sp>
         <p:nvSpPr>
-          <p:cNvPr id="5" name="TextBox 4"/>
+          <p:cNvPr id="11" name="TextBox 10"/>
           <p:cNvSpPr txBox="1"/>
           <p:nvPr/>
         </p:nvSpPr>
         <p:spPr>
           <a:xfrm>
-            <a:off x="640080" y="1737360"/>
-            <a:ext cx="10911535" cy="2011680"/>
+            <a:off x="4937760" y="1737360"/>
+            <a:ext cx="6766560" cy="1097280"/>
           </a:xfrm>
           <a:prstGeom prst="rect">
             <a:avLst/>
@@ -3247,13 +3526,9 @@
           </a:bodyPr>
           <a:lstStyle/>
           <a:p>
-            <a:pPr algn="l">
-              <a:lnSpc>
-                <a:spcPct val="115000"/>
-              </a:lnSpc>
-            </a:pPr>
-            <a:r>
-              <a:rPr sz="4000" b="1">
+            <a:pPr algn="l"/>
+            <a:r>
+              <a:rPr sz="3000" b="1">
                 <a:solidFill>
                   <a:srgbClr val="1C2A33"/>
                 </a:solidFill>
@@ -3261,21 +3536,21 @@
                 <a:ea typeface="楷体"/>
                 <a:cs typeface="楷体"/>
               </a:rPr>
-              <a:t>百合花 精读——细节描写与「百合花」意象</a:t>
-            </a:r>
-          </a:p>
-        </p:txBody>
-      </p:sp>
-      <p:sp>
-        <p:nvSpPr>
-          <p:cNvPr id="6" name="TextBox 5"/>
+              <a:t>细节描写与「百合花」意象</a:t>
+            </a:r>
+          </a:p>
+        </p:txBody>
+      </p:sp>
+      <p:sp>
+        <p:nvSpPr>
+          <p:cNvPr id="12" name="TextBox 11"/>
           <p:cNvSpPr txBox="1"/>
           <p:nvPr/>
         </p:nvSpPr>
         <p:spPr>
           <a:xfrm>
-            <a:off x="640080" y="3840480"/>
-            <a:ext cx="10911535" cy="457200"/>
+            <a:off x="4937760" y="2880360"/>
+            <a:ext cx="6766560" cy="2194560"/>
           </a:xfrm>
           <a:prstGeom prst="rect">
             <a:avLst/>
@@ -3288,37 +3563,83 @@
           </a:bodyPr>
           <a:lstStyle/>
           <a:p>
-            <a:pPr algn="l"/>
-            <a:r>
-              <a:rPr sz="1700" b="1">
+            <a:pPr algn="l">
+              <a:lnSpc>
+                <a:spcPct val="155000"/>
+              </a:lnSpc>
+              <a:spcAft>
+                <a:spcPts val="800"/>
+              </a:spcAft>
+            </a:pPr>
+            <a:r>
+              <a:rPr sz="1500" b="0">
+                <a:solidFill>
+                  <a:srgbClr val="1C2A33"/>
+                </a:solidFill>
+                <a:latin typeface="楷体"/>
+                <a:ea typeface="楷体"/>
+                <a:cs typeface="楷体"/>
+              </a:rPr>
+              <a:t>一条枣红底、洒满白色百合花的新被子，串起三个人物：文工团的"我"、</a:t>
+            </a:r>
+          </a:p>
+          <a:p>
+            <a:pPr algn="l">
+              <a:lnSpc>
+                <a:spcPct val="155000"/>
+              </a:lnSpc>
+              <a:spcAft>
+                <a:spcPts val="800"/>
+              </a:spcAft>
+            </a:pPr>
+            <a:r>
+              <a:rPr sz="1500" b="0">
+                <a:solidFill>
+                  <a:srgbClr val="1C2A33"/>
+                </a:solidFill>
+                <a:latin typeface="楷体"/>
+                <a:ea typeface="楷体"/>
+                <a:cs typeface="楷体"/>
+              </a:rPr>
+              <a:t>腼腆的小通讯员、刚过门三天的新媳妇。借被子、牺牲、盖被子——</a:t>
+            </a:r>
+          </a:p>
+          <a:p>
+            <a:pPr algn="l">
+              <a:lnSpc>
+                <a:spcPct val="155000"/>
+              </a:lnSpc>
+            </a:pPr>
+            <a:r>
+              <a:rPr sz="1500" b="1">
                 <a:solidFill>
                   <a:srgbClr val="B23A2A"/>
                 </a:solidFill>
-                <a:latin typeface="微软雅黑"/>
-                <a:ea typeface="微软雅黑"/>
-                <a:cs typeface="微软雅黑"/>
-              </a:rPr>
-              <a:t>课文精读  ·  第4课时  ·  45分钟</a:t>
-            </a:r>
-          </a:p>
-        </p:txBody>
-      </p:sp>
-      <p:sp>
-        <p:nvSpPr>
-          <p:cNvPr id="7" name="Rectangle 6"/>
+                <a:latin typeface="楷体"/>
+                <a:ea typeface="楷体"/>
+                <a:cs typeface="楷体"/>
+              </a:rPr>
+              <a:t>看细节怎么把"纯洁"与"牺牲"写到一起。</a:t>
+            </a:r>
+          </a:p>
+        </p:txBody>
+      </p:sp>
+      <p:sp>
+        <p:nvSpPr>
+          <p:cNvPr id="13" name="Rounded Rectangle 12"/>
           <p:cNvSpPr/>
           <p:nvPr/>
         </p:nvSpPr>
         <p:spPr>
           <a:xfrm>
-            <a:off x="640080" y="5394960"/>
-            <a:ext cx="2011680" cy="33020"/>
-          </a:xfrm>
-          <a:prstGeom prst="rect">
+            <a:off x="4937760" y="5212080"/>
+            <a:ext cx="4206240" cy="822960"/>
+          </a:xfrm>
+          <a:prstGeom prst="roundRect">
             <a:avLst/>
           </a:prstGeom>
           <a:solidFill>
-            <a:srgbClr val="C8A86B"/>
+            <a:srgbClr val="2E7D6B"/>
           </a:solidFill>
           <a:ln>
             <a:noFill/>
@@ -3349,14 +3670,14 @@
       </p:sp>
       <p:sp>
         <p:nvSpPr>
-          <p:cNvPr id="8" name="TextBox 7"/>
+          <p:cNvPr id="14" name="TextBox 13"/>
           <p:cNvSpPr txBox="1"/>
           <p:nvPr/>
         </p:nvSpPr>
         <p:spPr>
           <a:xfrm>
-            <a:off x="640080" y="5623560"/>
-            <a:ext cx="10911535" cy="548640"/>
+            <a:off x="5120640" y="5321808"/>
+            <a:ext cx="3931920" cy="640080"/>
           </a:xfrm>
           <a:prstGeom prst="rect">
             <a:avLst/>
@@ -3369,24 +3690,24 @@
           </a:bodyPr>
           <a:lstStyle/>
           <a:p>
-            <a:pPr algn="l"/>
-            <a:r>
-              <a:rPr sz="1400" b="0">
-                <a:solidFill>
-                  <a:srgbClr val="6B6258"/>
+            <a:pPr algn="ctr"/>
+            <a:r>
+              <a:rPr sz="1300" b="1">
+                <a:solidFill>
+                  <a:srgbClr val="FFFFFF"/>
                 </a:solidFill>
                 <a:latin typeface="微软雅黑"/>
                 <a:ea typeface="微软雅黑"/>
                 <a:cs typeface="微软雅黑"/>
               </a:rPr>
-              <a:t>学习任务群：文学阅读与写作    |    年级：高一</a:t>
-            </a:r>
-          </a:p>
-        </p:txBody>
-      </p:sp>
-      <p:sp>
-        <p:nvSpPr>
-          <p:cNvPr id="9" name="TextBox 8"/>
+              <a:t>读这篇小说，带三把钥匙：细节 · 意象 · 视角</a:t>
+            </a:r>
+          </a:p>
+        </p:txBody>
+      </p:sp>
+      <p:sp>
+        <p:nvSpPr>
+          <p:cNvPr id="15" name="TextBox 14"/>
           <p:cNvSpPr txBox="1"/>
           <p:nvPr/>
         </p:nvSpPr>
@@ -3519,7 +3840,7 @@
                 <a:ea typeface="微软雅黑"/>
                 <a:cs typeface="微软雅黑"/>
               </a:rPr>
-              <a:t>学习目标</a:t>
+              <a:t>本课目标</a:t>
             </a:r>
           </a:p>
         </p:txBody>
@@ -3570,14 +3891,51 @@
       </p:sp>
       <p:sp>
         <p:nvSpPr>
-          <p:cNvPr id="5" name="Rounded Rectangle 4"/>
+          <p:cNvPr id="5" name="TextBox 4"/>
+          <p:cNvSpPr txBox="1"/>
+          <p:nvPr/>
+        </p:nvSpPr>
+        <p:spPr>
+          <a:xfrm>
+            <a:off x="640080" y="1325880"/>
+            <a:ext cx="10058400" cy="640080"/>
+          </a:xfrm>
+          <a:prstGeom prst="rect">
+            <a:avLst/>
+          </a:prstGeom>
+          <a:noFill/>
+        </p:spPr>
+        <p:txBody>
+          <a:bodyPr wrap="square" anchor="t" lIns="0" rIns="0" tIns="0" bIns="0">
+            <a:spAutoFit/>
+          </a:bodyPr>
+          <a:lstStyle/>
+          <a:p>
+            <a:pPr algn="l"/>
+            <a:r>
+              <a:rPr sz="3200" b="1">
+                <a:solidFill>
+                  <a:srgbClr val="1C2A33"/>
+                </a:solidFill>
+                <a:latin typeface="楷体"/>
+                <a:ea typeface="楷体"/>
+                <a:cs typeface="楷体"/>
+              </a:rPr>
+              <a:t>四向学习目标</a:t>
+            </a:r>
+          </a:p>
+        </p:txBody>
+      </p:sp>
+      <p:sp>
+        <p:nvSpPr>
+          <p:cNvPr id="6" name="Rounded Rectangle 5"/>
           <p:cNvSpPr/>
           <p:nvPr/>
         </p:nvSpPr>
         <p:spPr>
           <a:xfrm>
-            <a:off x="640080" y="1417320"/>
-            <a:ext cx="5349240" cy="2057400"/>
+            <a:off x="640080" y="2377440"/>
+            <a:ext cx="2453563" cy="3291840"/>
           </a:xfrm>
           <a:prstGeom prst="roundRect">
             <a:avLst/>
@@ -3585,7 +3943,7 @@
           <a:solidFill>
             <a:srgbClr val="FFFFFF"/>
           </a:solidFill>
-          <a:ln w="22860">
+          <a:ln w="20320">
             <a:solidFill>
               <a:srgbClr val="B23A2A"/>
             </a:solidFill>
@@ -3616,14 +3974,14 @@
       </p:sp>
       <p:sp>
         <p:nvSpPr>
-          <p:cNvPr id="6" name="Oval 5"/>
+          <p:cNvPr id="7" name="Oval 6"/>
           <p:cNvSpPr/>
           <p:nvPr/>
         </p:nvSpPr>
         <p:spPr>
           <a:xfrm>
-            <a:off x="804672" y="1581912"/>
-            <a:ext cx="457200" cy="457200"/>
+            <a:off x="1455381" y="2697480"/>
+            <a:ext cx="822960" cy="822960"/>
           </a:xfrm>
           <a:prstGeom prst="ellipse">
             <a:avLst/>
@@ -3660,14 +4018,14 @@
       </p:sp>
       <p:sp>
         <p:nvSpPr>
-          <p:cNvPr id="7" name="TextBox 6"/>
+          <p:cNvPr id="8" name="TextBox 7"/>
           <p:cNvSpPr txBox="1"/>
           <p:nvPr/>
         </p:nvSpPr>
         <p:spPr>
           <a:xfrm>
-            <a:off x="804672" y="1636776"/>
-            <a:ext cx="457200" cy="384048"/>
+            <a:off x="1455381" y="2880360"/>
+            <a:ext cx="822960" cy="457200"/>
           </a:xfrm>
           <a:prstGeom prst="rect">
             <a:avLst/>
@@ -3682,29 +4040,66 @@
           <a:p>
             <a:pPr algn="ctr"/>
             <a:r>
-              <a:rPr sz="1600" b="1">
+              <a:rPr sz="2400" b="1">
                 <a:solidFill>
                   <a:srgbClr val="FFFFFF"/>
+                </a:solidFill>
+                <a:latin typeface="楷体"/>
+                <a:ea typeface="楷体"/>
+                <a:cs typeface="楷体"/>
+              </a:rPr>
+              <a:t>1</a:t>
+            </a:r>
+          </a:p>
+        </p:txBody>
+      </p:sp>
+      <p:sp>
+        <p:nvSpPr>
+          <p:cNvPr id="9" name="TextBox 8"/>
+          <p:cNvSpPr txBox="1"/>
+          <p:nvPr/>
+        </p:nvSpPr>
+        <p:spPr>
+          <a:xfrm>
+            <a:off x="822960" y="3749040"/>
+            <a:ext cx="2087803" cy="548640"/>
+          </a:xfrm>
+          <a:prstGeom prst="rect">
+            <a:avLst/>
+          </a:prstGeom>
+          <a:noFill/>
+        </p:spPr>
+        <p:txBody>
+          <a:bodyPr wrap="square" anchor="t" lIns="0" rIns="0" tIns="0" bIns="0">
+            <a:spAutoFit/>
+          </a:bodyPr>
+          <a:lstStyle/>
+          <a:p>
+            <a:pPr algn="ctr"/>
+            <a:r>
+              <a:rPr sz="1800" b="1">
+                <a:solidFill>
+                  <a:srgbClr val="B23A2A"/>
                 </a:solidFill>
                 <a:latin typeface="微软雅黑"/>
                 <a:ea typeface="微软雅黑"/>
                 <a:cs typeface="微软雅黑"/>
               </a:rPr>
-              <a:t>1</a:t>
-            </a:r>
-          </a:p>
-        </p:txBody>
-      </p:sp>
-      <p:sp>
-        <p:nvSpPr>
-          <p:cNvPr id="8" name="TextBox 7"/>
+              <a:t>语言能力</a:t>
+            </a:r>
+          </a:p>
+        </p:txBody>
+      </p:sp>
+      <p:sp>
+        <p:nvSpPr>
+          <p:cNvPr id="10" name="TextBox 9"/>
           <p:cNvSpPr txBox="1"/>
           <p:nvPr/>
         </p:nvSpPr>
         <p:spPr>
           <a:xfrm>
-            <a:off x="1371600" y="1527048"/>
-            <a:ext cx="4434840" cy="457200"/>
+            <a:off x="841248" y="4343400"/>
+            <a:ext cx="2051227" cy="1188720"/>
           </a:xfrm>
           <a:prstGeom prst="rect">
             <a:avLst/>
@@ -3717,54 +4112,13 @@
           </a:bodyPr>
           <a:lstStyle/>
           <a:p>
-            <a:pPr algn="l">
+            <a:pPr algn="ctr">
               <a:lnSpc>
-                <a:spcPct val="110000"/>
+                <a:spcPct val="150000"/>
               </a:lnSpc>
             </a:pPr>
             <a:r>
-              <a:rPr sz="1600" b="1">
-                <a:solidFill>
-                  <a:srgbClr val="1C2A33"/>
-                </a:solidFill>
-                <a:latin typeface="微软雅黑"/>
-                <a:ea typeface="微软雅黑"/>
-                <a:cs typeface="微软雅黑"/>
-              </a:rPr>
-              <a:t>目标</a:t>
-            </a:r>
-          </a:p>
-        </p:txBody>
-      </p:sp>
-      <p:sp>
-        <p:nvSpPr>
-          <p:cNvPr id="9" name="TextBox 8"/>
-          <p:cNvSpPr txBox="1"/>
-          <p:nvPr/>
-        </p:nvSpPr>
-        <p:spPr>
-          <a:xfrm>
-            <a:off x="1371600" y="1965960"/>
-            <a:ext cx="4434840" cy="1417320"/>
-          </a:xfrm>
-          <a:prstGeom prst="rect">
-            <a:avLst/>
-          </a:prstGeom>
-          <a:noFill/>
-        </p:spPr>
-        <p:txBody>
-          <a:bodyPr wrap="square" anchor="t" lIns="0" rIns="0" tIns="0" bIns="0">
-            <a:spAutoFit/>
-          </a:bodyPr>
-          <a:lstStyle/>
-          <a:p>
-            <a:pPr algn="l">
-              <a:lnSpc>
-                <a:spcPct val="128000"/>
-              </a:lnSpc>
-            </a:pPr>
-            <a:r>
-              <a:rPr sz="1200" b="0">
+              <a:rPr sz="1300" b="0">
                 <a:solidFill>
                   <a:srgbClr val="1C2A33"/>
                 </a:solidFill>
@@ -3772,21 +4126,21 @@
                 <a:ea typeface="楷体"/>
                 <a:cs typeface="楷体"/>
               </a:rPr>
-              <a:t>语言能力：梳理小说情节脉络（借被子→包扎所→牺牲→盖被子），找出3处以上关键细节并分析其作用。</a:t>
-            </a:r>
-          </a:p>
-        </p:txBody>
-      </p:sp>
-      <p:sp>
-        <p:nvSpPr>
-          <p:cNvPr id="10" name="Rounded Rectangle 9"/>
+              <a:t>梳理情节脉络（借被子→包扎所→牺牲→盖被子），找出3处以上关键细节并说清作用。</a:t>
+            </a:r>
+          </a:p>
+        </p:txBody>
+      </p:sp>
+      <p:sp>
+        <p:nvSpPr>
+          <p:cNvPr id="11" name="Rounded Rectangle 10"/>
           <p:cNvSpPr/>
           <p:nvPr/>
         </p:nvSpPr>
         <p:spPr>
           <a:xfrm>
-            <a:off x="6263640" y="1417320"/>
-            <a:ext cx="5349240" cy="2057400"/>
+            <a:off x="3459403" y="2377440"/>
+            <a:ext cx="2453563" cy="3291840"/>
           </a:xfrm>
           <a:prstGeom prst="roundRect">
             <a:avLst/>
@@ -3794,9 +4148,9 @@
           <a:solidFill>
             <a:srgbClr val="FFFFFF"/>
           </a:solidFill>
-          <a:ln w="22860">
+          <a:ln w="20320">
             <a:solidFill>
-              <a:srgbClr val="B23A2A"/>
+              <a:srgbClr val="2E7D6B"/>
             </a:solidFill>
           </a:ln>
           <a:effectLst/>
@@ -3825,20 +4179,20 @@
       </p:sp>
       <p:sp>
         <p:nvSpPr>
-          <p:cNvPr id="11" name="Oval 10"/>
+          <p:cNvPr id="12" name="Oval 11"/>
           <p:cNvSpPr/>
           <p:nvPr/>
         </p:nvSpPr>
         <p:spPr>
           <a:xfrm>
-            <a:off x="6428232" y="1581912"/>
-            <a:ext cx="457200" cy="457200"/>
+            <a:off x="4274705" y="2697480"/>
+            <a:ext cx="822960" cy="822960"/>
           </a:xfrm>
           <a:prstGeom prst="ellipse">
             <a:avLst/>
           </a:prstGeom>
           <a:solidFill>
-            <a:srgbClr val="B23A2A"/>
+            <a:srgbClr val="2E7D6B"/>
           </a:solidFill>
           <a:ln>
             <a:noFill/>
@@ -3869,14 +4223,14 @@
       </p:sp>
       <p:sp>
         <p:nvSpPr>
-          <p:cNvPr id="12" name="TextBox 11"/>
+          <p:cNvPr id="13" name="TextBox 12"/>
           <p:cNvSpPr txBox="1"/>
           <p:nvPr/>
         </p:nvSpPr>
         <p:spPr>
           <a:xfrm>
-            <a:off x="6428232" y="1636776"/>
-            <a:ext cx="457200" cy="384048"/>
+            <a:off x="4274705" y="2880360"/>
+            <a:ext cx="822960" cy="457200"/>
           </a:xfrm>
           <a:prstGeom prst="rect">
             <a:avLst/>
@@ -3891,29 +4245,66 @@
           <a:p>
             <a:pPr algn="ctr"/>
             <a:r>
-              <a:rPr sz="1600" b="1">
+              <a:rPr sz="2400" b="1">
                 <a:solidFill>
                   <a:srgbClr val="FFFFFF"/>
+                </a:solidFill>
+                <a:latin typeface="楷体"/>
+                <a:ea typeface="楷体"/>
+                <a:cs typeface="楷体"/>
+              </a:rPr>
+              <a:t>2</a:t>
+            </a:r>
+          </a:p>
+        </p:txBody>
+      </p:sp>
+      <p:sp>
+        <p:nvSpPr>
+          <p:cNvPr id="14" name="TextBox 13"/>
+          <p:cNvSpPr txBox="1"/>
+          <p:nvPr/>
+        </p:nvSpPr>
+        <p:spPr>
+          <a:xfrm>
+            <a:off x="3642283" y="3749040"/>
+            <a:ext cx="2087803" cy="548640"/>
+          </a:xfrm>
+          <a:prstGeom prst="rect">
+            <a:avLst/>
+          </a:prstGeom>
+          <a:noFill/>
+        </p:spPr>
+        <p:txBody>
+          <a:bodyPr wrap="square" anchor="t" lIns="0" rIns="0" tIns="0" bIns="0">
+            <a:spAutoFit/>
+          </a:bodyPr>
+          <a:lstStyle/>
+          <a:p>
+            <a:pPr algn="ctr"/>
+            <a:r>
+              <a:rPr sz="1800" b="1">
+                <a:solidFill>
+                  <a:srgbClr val="2E7D6B"/>
                 </a:solidFill>
                 <a:latin typeface="微软雅黑"/>
                 <a:ea typeface="微软雅黑"/>
                 <a:cs typeface="微软雅黑"/>
               </a:rPr>
-              <a:t>2</a:t>
-            </a:r>
-          </a:p>
-        </p:txBody>
-      </p:sp>
-      <p:sp>
-        <p:nvSpPr>
-          <p:cNvPr id="13" name="TextBox 12"/>
+              <a:t>文化意识</a:t>
+            </a:r>
+          </a:p>
+        </p:txBody>
+      </p:sp>
+      <p:sp>
+        <p:nvSpPr>
+          <p:cNvPr id="15" name="TextBox 14"/>
           <p:cNvSpPr txBox="1"/>
           <p:nvPr/>
         </p:nvSpPr>
         <p:spPr>
           <a:xfrm>
-            <a:off x="6995160" y="1527048"/>
-            <a:ext cx="4434840" cy="457200"/>
+            <a:off x="3660571" y="4343400"/>
+            <a:ext cx="2051227" cy="1188720"/>
           </a:xfrm>
           <a:prstGeom prst="rect">
             <a:avLst/>
@@ -3926,54 +4317,13 @@
           </a:bodyPr>
           <a:lstStyle/>
           <a:p>
-            <a:pPr algn="l">
+            <a:pPr algn="ctr">
               <a:lnSpc>
-                <a:spcPct val="110000"/>
+                <a:spcPct val="150000"/>
               </a:lnSpc>
             </a:pPr>
             <a:r>
-              <a:rPr sz="1600" b="1">
-                <a:solidFill>
-                  <a:srgbClr val="1C2A33"/>
-                </a:solidFill>
-                <a:latin typeface="微软雅黑"/>
-                <a:ea typeface="微软雅黑"/>
-                <a:cs typeface="微软雅黑"/>
-              </a:rPr>
-              <a:t>目标</a:t>
-            </a:r>
-          </a:p>
-        </p:txBody>
-      </p:sp>
-      <p:sp>
-        <p:nvSpPr>
-          <p:cNvPr id="14" name="TextBox 13"/>
-          <p:cNvSpPr txBox="1"/>
-          <p:nvPr/>
-        </p:nvSpPr>
-        <p:spPr>
-          <a:xfrm>
-            <a:off x="6995160" y="1965960"/>
-            <a:ext cx="4434840" cy="1417320"/>
-          </a:xfrm>
-          <a:prstGeom prst="rect">
-            <a:avLst/>
-          </a:prstGeom>
-          <a:noFill/>
-        </p:spPr>
-        <p:txBody>
-          <a:bodyPr wrap="square" anchor="t" lIns="0" rIns="0" tIns="0" bIns="0">
-            <a:spAutoFit/>
-          </a:bodyPr>
-          <a:lstStyle/>
-          <a:p>
-            <a:pPr algn="l">
-              <a:lnSpc>
-                <a:spcPct val="128000"/>
-              </a:lnSpc>
-            </a:pPr>
-            <a:r>
-              <a:rPr sz="1400" b="0">
+              <a:rPr sz="1300" b="0">
                 <a:solidFill>
                   <a:srgbClr val="1C2A33"/>
                 </a:solidFill>
@@ -3981,21 +4331,21 @@
                 <a:ea typeface="楷体"/>
                 <a:cs typeface="楷体"/>
               </a:rPr>
-              <a:t>文化意识：理解战争中普通人的人性之美与青春的纯真，感受革命年代的人情温度。</a:t>
-            </a:r>
-          </a:p>
-        </p:txBody>
-      </p:sp>
-      <p:sp>
-        <p:nvSpPr>
-          <p:cNvPr id="15" name="Rounded Rectangle 14"/>
+              <a:t>读懂战争中普通人的人性之美与青春之纯真，感受那个年代的人情温度。</a:t>
+            </a:r>
+          </a:p>
+        </p:txBody>
+      </p:sp>
+      <p:sp>
+        <p:nvSpPr>
+          <p:cNvPr id="16" name="Rounded Rectangle 15"/>
           <p:cNvSpPr/>
           <p:nvPr/>
         </p:nvSpPr>
         <p:spPr>
           <a:xfrm>
-            <a:off x="640080" y="3703320"/>
-            <a:ext cx="5349240" cy="2057400"/>
+            <a:off x="6278727" y="2377440"/>
+            <a:ext cx="2453563" cy="3291840"/>
           </a:xfrm>
           <a:prstGeom prst="roundRect">
             <a:avLst/>
@@ -4003,9 +4353,9 @@
           <a:solidFill>
             <a:srgbClr val="FFFFFF"/>
           </a:solidFill>
-          <a:ln w="22860">
+          <a:ln w="20320">
             <a:solidFill>
-              <a:srgbClr val="B23A2A"/>
+              <a:srgbClr val="C8A86B"/>
             </a:solidFill>
           </a:ln>
           <a:effectLst/>
@@ -4034,20 +4384,20 @@
       </p:sp>
       <p:sp>
         <p:nvSpPr>
-          <p:cNvPr id="16" name="Oval 15"/>
+          <p:cNvPr id="17" name="Oval 16"/>
           <p:cNvSpPr/>
           <p:nvPr/>
         </p:nvSpPr>
         <p:spPr>
           <a:xfrm>
-            <a:off x="804672" y="3867912"/>
-            <a:ext cx="457200" cy="457200"/>
+            <a:off x="7094029" y="2697480"/>
+            <a:ext cx="822960" cy="822960"/>
           </a:xfrm>
           <a:prstGeom prst="ellipse">
             <a:avLst/>
           </a:prstGeom>
           <a:solidFill>
-            <a:srgbClr val="B23A2A"/>
+            <a:srgbClr val="C8A86B"/>
           </a:solidFill>
           <a:ln>
             <a:noFill/>
@@ -4078,14 +4428,14 @@
       </p:sp>
       <p:sp>
         <p:nvSpPr>
-          <p:cNvPr id="17" name="TextBox 16"/>
+          <p:cNvPr id="18" name="TextBox 17"/>
           <p:cNvSpPr txBox="1"/>
           <p:nvPr/>
         </p:nvSpPr>
         <p:spPr>
           <a:xfrm>
-            <a:off x="804672" y="3922776"/>
-            <a:ext cx="457200" cy="384048"/>
+            <a:off x="7094029" y="2880360"/>
+            <a:ext cx="822960" cy="457200"/>
           </a:xfrm>
           <a:prstGeom prst="rect">
             <a:avLst/>
@@ -4100,29 +4450,66 @@
           <a:p>
             <a:pPr algn="ctr"/>
             <a:r>
-              <a:rPr sz="1600" b="1">
+              <a:rPr sz="2400" b="1">
                 <a:solidFill>
                   <a:srgbClr val="FFFFFF"/>
+                </a:solidFill>
+                <a:latin typeface="楷体"/>
+                <a:ea typeface="楷体"/>
+                <a:cs typeface="楷体"/>
+              </a:rPr>
+              <a:t>3</a:t>
+            </a:r>
+          </a:p>
+        </p:txBody>
+      </p:sp>
+      <p:sp>
+        <p:nvSpPr>
+          <p:cNvPr id="19" name="TextBox 18"/>
+          <p:cNvSpPr txBox="1"/>
+          <p:nvPr/>
+        </p:nvSpPr>
+        <p:spPr>
+          <a:xfrm>
+            <a:off x="6461607" y="3749040"/>
+            <a:ext cx="2087803" cy="548640"/>
+          </a:xfrm>
+          <a:prstGeom prst="rect">
+            <a:avLst/>
+          </a:prstGeom>
+          <a:noFill/>
+        </p:spPr>
+        <p:txBody>
+          <a:bodyPr wrap="square" anchor="t" lIns="0" rIns="0" tIns="0" bIns="0">
+            <a:spAutoFit/>
+          </a:bodyPr>
+          <a:lstStyle/>
+          <a:p>
+            <a:pPr algn="ctr"/>
+            <a:r>
+              <a:rPr sz="1800" b="1">
+                <a:solidFill>
+                  <a:srgbClr val="C8A86B"/>
                 </a:solidFill>
                 <a:latin typeface="微软雅黑"/>
                 <a:ea typeface="微软雅黑"/>
                 <a:cs typeface="微软雅黑"/>
               </a:rPr>
-              <a:t>3</a:t>
-            </a:r>
-          </a:p>
-        </p:txBody>
-      </p:sp>
-      <p:sp>
-        <p:nvSpPr>
-          <p:cNvPr id="18" name="TextBox 17"/>
+              <a:t>思维品质</a:t>
+            </a:r>
+          </a:p>
+        </p:txBody>
+      </p:sp>
+      <p:sp>
+        <p:nvSpPr>
+          <p:cNvPr id="20" name="TextBox 19"/>
           <p:cNvSpPr txBox="1"/>
           <p:nvPr/>
         </p:nvSpPr>
         <p:spPr>
           <a:xfrm>
-            <a:off x="1371600" y="3813048"/>
-            <a:ext cx="4434840" cy="457200"/>
+            <a:off x="6479895" y="4343400"/>
+            <a:ext cx="2051227" cy="1188720"/>
           </a:xfrm>
           <a:prstGeom prst="rect">
             <a:avLst/>
@@ -4135,54 +4522,13 @@
           </a:bodyPr>
           <a:lstStyle/>
           <a:p>
-            <a:pPr algn="l">
+            <a:pPr algn="ctr">
               <a:lnSpc>
-                <a:spcPct val="110000"/>
+                <a:spcPct val="150000"/>
               </a:lnSpc>
             </a:pPr>
             <a:r>
-              <a:rPr sz="1600" b="1">
-                <a:solidFill>
-                  <a:srgbClr val="1C2A33"/>
-                </a:solidFill>
-                <a:latin typeface="微软雅黑"/>
-                <a:ea typeface="微软雅黑"/>
-                <a:cs typeface="微软雅黑"/>
-              </a:rPr>
-              <a:t>目标</a:t>
-            </a:r>
-          </a:p>
-        </p:txBody>
-      </p:sp>
-      <p:sp>
-        <p:nvSpPr>
-          <p:cNvPr id="19" name="TextBox 18"/>
-          <p:cNvSpPr txBox="1"/>
-          <p:nvPr/>
-        </p:nvSpPr>
-        <p:spPr>
-          <a:xfrm>
-            <a:off x="1371600" y="4251960"/>
-            <a:ext cx="4434840" cy="1417320"/>
-          </a:xfrm>
-          <a:prstGeom prst="rect">
-            <a:avLst/>
-          </a:prstGeom>
-          <a:noFill/>
-        </p:spPr>
-        <p:txBody>
-          <a:bodyPr wrap="square" anchor="t" lIns="0" rIns="0" tIns="0" bIns="0">
-            <a:spAutoFit/>
-          </a:bodyPr>
-          <a:lstStyle/>
-          <a:p>
-            <a:pPr algn="l">
-              <a:lnSpc>
-                <a:spcPct val="128000"/>
-              </a:lnSpc>
-            </a:pPr>
-            <a:r>
-              <a:rPr sz="1200" b="0">
+              <a:rPr sz="1300" b="0">
                 <a:solidFill>
                   <a:srgbClr val="1C2A33"/>
                 </a:solidFill>
@@ -4190,21 +4536,21 @@
                 <a:ea typeface="楷体"/>
                 <a:cs typeface="楷体"/>
               </a:rPr>
-              <a:t>思维品质：通过分析「百合花被子」意象在不同情节中的变化，培养追踪意象演变的思维能力。</a:t>
-            </a:r>
-          </a:p>
-        </p:txBody>
-      </p:sp>
-      <p:sp>
-        <p:nvSpPr>
-          <p:cNvPr id="20" name="Rounded Rectangle 19"/>
+              <a:t>追踪「百合花被子」意象在情节中的变化，培养意象演变的阅读思维。</a:t>
+            </a:r>
+          </a:p>
+        </p:txBody>
+      </p:sp>
+      <p:sp>
+        <p:nvSpPr>
+          <p:cNvPr id="21" name="Rounded Rectangle 20"/>
           <p:cNvSpPr/>
           <p:nvPr/>
         </p:nvSpPr>
         <p:spPr>
           <a:xfrm>
-            <a:off x="6263640" y="3703320"/>
-            <a:ext cx="5349240" cy="2057400"/>
+            <a:off x="9098051" y="2377440"/>
+            <a:ext cx="2453563" cy="3291840"/>
           </a:xfrm>
           <a:prstGeom prst="roundRect">
             <a:avLst/>
@@ -4212,9 +4558,9 @@
           <a:solidFill>
             <a:srgbClr val="FFFFFF"/>
           </a:solidFill>
-          <a:ln w="22860">
+          <a:ln w="20320">
             <a:solidFill>
-              <a:srgbClr val="B23A2A"/>
+              <a:srgbClr val="6B6258"/>
             </a:solidFill>
           </a:ln>
           <a:effectLst/>
@@ -4243,20 +4589,20 @@
       </p:sp>
       <p:sp>
         <p:nvSpPr>
-          <p:cNvPr id="21" name="Oval 20"/>
+          <p:cNvPr id="22" name="Oval 21"/>
           <p:cNvSpPr/>
           <p:nvPr/>
         </p:nvSpPr>
         <p:spPr>
           <a:xfrm>
-            <a:off x="6428232" y="3867912"/>
-            <a:ext cx="457200" cy="457200"/>
+            <a:off x="9913353" y="2697480"/>
+            <a:ext cx="822960" cy="822960"/>
           </a:xfrm>
           <a:prstGeom prst="ellipse">
             <a:avLst/>
           </a:prstGeom>
           <a:solidFill>
-            <a:srgbClr val="B23A2A"/>
+            <a:srgbClr val="6B6258"/>
           </a:solidFill>
           <a:ln>
             <a:noFill/>
@@ -4287,14 +4633,14 @@
       </p:sp>
       <p:sp>
         <p:nvSpPr>
-          <p:cNvPr id="22" name="TextBox 21"/>
+          <p:cNvPr id="23" name="TextBox 22"/>
           <p:cNvSpPr txBox="1"/>
           <p:nvPr/>
         </p:nvSpPr>
         <p:spPr>
           <a:xfrm>
-            <a:off x="6428232" y="3922776"/>
-            <a:ext cx="457200" cy="384048"/>
+            <a:off x="9913353" y="2880360"/>
+            <a:ext cx="822960" cy="457200"/>
           </a:xfrm>
           <a:prstGeom prst="rect">
             <a:avLst/>
@@ -4309,29 +4655,66 @@
           <a:p>
             <a:pPr algn="ctr"/>
             <a:r>
-              <a:rPr sz="1600" b="1">
+              <a:rPr sz="2400" b="1">
                 <a:solidFill>
                   <a:srgbClr val="FFFFFF"/>
+                </a:solidFill>
+                <a:latin typeface="楷体"/>
+                <a:ea typeface="楷体"/>
+                <a:cs typeface="楷体"/>
+              </a:rPr>
+              <a:t>4</a:t>
+            </a:r>
+          </a:p>
+        </p:txBody>
+      </p:sp>
+      <p:sp>
+        <p:nvSpPr>
+          <p:cNvPr id="24" name="TextBox 23"/>
+          <p:cNvSpPr txBox="1"/>
+          <p:nvPr/>
+        </p:nvSpPr>
+        <p:spPr>
+          <a:xfrm>
+            <a:off x="9280931" y="3749040"/>
+            <a:ext cx="2087803" cy="548640"/>
+          </a:xfrm>
+          <a:prstGeom prst="rect">
+            <a:avLst/>
+          </a:prstGeom>
+          <a:noFill/>
+        </p:spPr>
+        <p:txBody>
+          <a:bodyPr wrap="square" anchor="t" lIns="0" rIns="0" tIns="0" bIns="0">
+            <a:spAutoFit/>
+          </a:bodyPr>
+          <a:lstStyle/>
+          <a:p>
+            <a:pPr algn="ctr"/>
+            <a:r>
+              <a:rPr sz="1800" b="1">
+                <a:solidFill>
+                  <a:srgbClr val="6B6258"/>
                 </a:solidFill>
                 <a:latin typeface="微软雅黑"/>
                 <a:ea typeface="微软雅黑"/>
                 <a:cs typeface="微软雅黑"/>
               </a:rPr>
-              <a:t>4</a:t>
-            </a:r>
-          </a:p>
-        </p:txBody>
-      </p:sp>
-      <p:sp>
-        <p:nvSpPr>
-          <p:cNvPr id="23" name="TextBox 22"/>
+              <a:t>学习能力</a:t>
+            </a:r>
+          </a:p>
+        </p:txBody>
+      </p:sp>
+      <p:sp>
+        <p:nvSpPr>
+          <p:cNvPr id="25" name="TextBox 24"/>
           <p:cNvSpPr txBox="1"/>
           <p:nvPr/>
         </p:nvSpPr>
         <p:spPr>
           <a:xfrm>
-            <a:off x="6995160" y="3813048"/>
-            <a:ext cx="4434840" cy="457200"/>
+            <a:off x="9299219" y="4343400"/>
+            <a:ext cx="2051227" cy="1188720"/>
           </a:xfrm>
           <a:prstGeom prst="rect">
             <a:avLst/>
@@ -4344,54 +4727,13 @@
           </a:bodyPr>
           <a:lstStyle/>
           <a:p>
-            <a:pPr algn="l">
+            <a:pPr algn="ctr">
               <a:lnSpc>
-                <a:spcPct val="110000"/>
+                <a:spcPct val="150000"/>
               </a:lnSpc>
             </a:pPr>
             <a:r>
-              <a:rPr sz="1600" b="1">
-                <a:solidFill>
-                  <a:srgbClr val="1C2A33"/>
-                </a:solidFill>
-                <a:latin typeface="微软雅黑"/>
-                <a:ea typeface="微软雅黑"/>
-                <a:cs typeface="微软雅黑"/>
-              </a:rPr>
-              <a:t>目标</a:t>
-            </a:r>
-          </a:p>
-        </p:txBody>
-      </p:sp>
-      <p:sp>
-        <p:nvSpPr>
-          <p:cNvPr id="24" name="TextBox 23"/>
-          <p:cNvSpPr txBox="1"/>
-          <p:nvPr/>
-        </p:nvSpPr>
-        <p:spPr>
-          <a:xfrm>
-            <a:off x="6995160" y="4251960"/>
-            <a:ext cx="4434840" cy="1417320"/>
-          </a:xfrm>
-          <a:prstGeom prst="rect">
-            <a:avLst/>
-          </a:prstGeom>
-          <a:noFill/>
-        </p:spPr>
-        <p:txBody>
-          <a:bodyPr wrap="square" anchor="t" lIns="0" rIns="0" tIns="0" bIns="0">
-            <a:spAutoFit/>
-          </a:bodyPr>
-          <a:lstStyle/>
-          <a:p>
-            <a:pPr algn="l">
-              <a:lnSpc>
-                <a:spcPct val="128000"/>
-              </a:lnSpc>
-            </a:pPr>
-            <a:r>
-              <a:rPr sz="1400" b="0">
+              <a:rPr sz="1300" b="0">
                 <a:solidFill>
                   <a:srgbClr val="1C2A33"/>
                 </a:solidFill>
@@ -4399,14 +4741,14 @@
                 <a:ea typeface="楷体"/>
                 <a:cs typeface="楷体"/>
               </a:rPr>
-              <a:t>学习能力：掌握「细节→人物→主题」的小说细读路径，能迁移到其他小说阅读。</a:t>
-            </a:r>
-          </a:p>
-        </p:txBody>
-      </p:sp>
-      <p:sp>
-        <p:nvSpPr>
-          <p:cNvPr id="25" name="TextBox 24"/>
+              <a:t>掌握「细节→人物→主题」的小说细读路径，能迁移到其他小说。</a:t>
+            </a:r>
+          </a:p>
+        </p:txBody>
+      </p:sp>
+      <p:sp>
+        <p:nvSpPr>
+          <p:cNvPr id="26" name="TextBox 25"/>
           <p:cNvSpPr txBox="1"/>
           <p:nvPr/>
         </p:nvSpPr>
@@ -4533,13 +4875,13 @@
             <a:r>
               <a:rPr sz="1300" b="1">
                 <a:solidFill>
-                  <a:srgbClr val="2E7D6B"/>
+                  <a:srgbClr val="B23A2A"/>
                 </a:solidFill>
                 <a:latin typeface="微软雅黑"/>
                 <a:ea typeface="微软雅黑"/>
                 <a:cs typeface="微软雅黑"/>
               </a:rPr>
-              <a:t>课文背景</a:t>
+              <a:t>背景 · 权威调研</a:t>
             </a:r>
           </a:p>
         </p:txBody>
@@ -4559,7 +4901,7 @@
             <a:avLst/>
           </a:prstGeom>
           <a:solidFill>
-            <a:srgbClr val="2E7D6B"/>
+            <a:srgbClr val="B23A2A"/>
           </a:solidFill>
           <a:ln>
             <a:noFill/>
@@ -4596,8 +4938,268 @@
         </p:nvSpPr>
         <p:spPr>
           <a:xfrm>
-            <a:off x="640080" y="1508760"/>
-            <a:ext cx="6766560" cy="4572000"/>
+            <a:off x="640080" y="1737360"/>
+            <a:ext cx="5227167" cy="548640"/>
+          </a:xfrm>
+          <a:prstGeom prst="rect">
+            <a:avLst/>
+          </a:prstGeom>
+          <a:noFill/>
+        </p:spPr>
+        <p:txBody>
+          <a:bodyPr wrap="square" anchor="t" lIns="0" rIns="0" tIns="0" bIns="0">
+            <a:spAutoFit/>
+          </a:bodyPr>
+          <a:lstStyle/>
+          <a:p>
+            <a:pPr algn="l">
+              <a:spcAft>
+                <a:spcPts val="600"/>
+              </a:spcAft>
+            </a:pPr>
+            <a:r>
+              <a:rPr sz="2000" b="1">
+                <a:solidFill>
+                  <a:srgbClr val="B23A2A"/>
+                </a:solidFill>
+                <a:latin typeface="楷体"/>
+                <a:ea typeface="楷体"/>
+                <a:cs typeface="楷体"/>
+              </a:rPr>
+              <a:t>一篇小说的来历</a:t>
+            </a:r>
+          </a:p>
+        </p:txBody>
+      </p:sp>
+      <p:sp>
+        <p:nvSpPr>
+          <p:cNvPr id="6" name="TextBox 5"/>
+          <p:cNvSpPr txBox="1"/>
+          <p:nvPr/>
+        </p:nvSpPr>
+        <p:spPr>
+          <a:xfrm>
+            <a:off x="640080" y="2377440"/>
+            <a:ext cx="5227167" cy="4389120"/>
+          </a:xfrm>
+          <a:prstGeom prst="rect">
+            <a:avLst/>
+          </a:prstGeom>
+          <a:noFill/>
+        </p:spPr>
+        <p:txBody>
+          <a:bodyPr wrap="square" anchor="t" lIns="0" rIns="0" tIns="0" bIns="0">
+            <a:spAutoFit/>
+          </a:bodyPr>
+          <a:lstStyle/>
+          <a:p>
+            <a:pPr algn="l">
+              <a:lnSpc>
+                <a:spcPct val="155000"/>
+              </a:lnSpc>
+              <a:spcAft>
+                <a:spcPts val="800"/>
+              </a:spcAft>
+            </a:pPr>
+            <a:r>
+              <a:rPr sz="1450" b="0">
+                <a:solidFill>
+                  <a:srgbClr val="1C2A33"/>
+                </a:solidFill>
+                <a:latin typeface="楷体"/>
+                <a:ea typeface="楷体"/>
+                <a:cs typeface="楷体"/>
+              </a:rPr>
+              <a:t>《百合花》写于 1958 年，首发于《延河》第3期，是茹志鹃的成名作。</a:t>
+            </a:r>
+          </a:p>
+          <a:p>
+            <a:pPr algn="l">
+              <a:lnSpc>
+                <a:spcPct val="155000"/>
+              </a:lnSpc>
+              <a:spcAft>
+                <a:spcPts val="800"/>
+              </a:spcAft>
+            </a:pPr>
+            <a:r>
+              <a:rPr sz="1450" b="0">
+                <a:solidFill>
+                  <a:srgbClr val="1C2A33"/>
+                </a:solidFill>
+                <a:latin typeface="楷体"/>
+                <a:ea typeface="楷体"/>
+                <a:cs typeface="楷体"/>
+              </a:rPr>
+              <a:t>故事背景设在 1946 年中秋的前线包扎所——不写战斗场面，只写三个人在战前的短暂交集。</a:t>
+            </a:r>
+          </a:p>
+          <a:p>
+            <a:pPr algn="l">
+              <a:lnSpc>
+                <a:spcPct val="155000"/>
+              </a:lnSpc>
+              <a:spcAft>
+                <a:spcPts val="800"/>
+              </a:spcAft>
+            </a:pPr>
+            <a:r>
+              <a:rPr sz="1450" b="0">
+                <a:solidFill>
+                  <a:srgbClr val="1C2A33"/>
+                </a:solidFill>
+                <a:latin typeface="楷体"/>
+                <a:ea typeface="楷体"/>
+                <a:cs typeface="楷体"/>
+              </a:rPr>
+              <a:t>叙事用第一人称限知视角（"我"是文工团女团员），语言清新克制。</a:t>
+            </a:r>
+          </a:p>
+          <a:p>
+            <a:pPr algn="l">
+              <a:lnSpc>
+                <a:spcPct val="155000"/>
+              </a:lnSpc>
+            </a:pPr>
+            <a:r>
+              <a:rPr sz="1450" b="0">
+                <a:solidFill>
+                  <a:srgbClr val="6B6258"/>
+                </a:solidFill>
+                <a:latin typeface="楷体"/>
+                <a:ea typeface="楷体"/>
+                <a:cs typeface="楷体"/>
+              </a:rPr>
+              <a:t>小说三要素，这篇用"细节"而非"场面"取胜。</a:t>
+            </a:r>
+          </a:p>
+        </p:txBody>
+      </p:sp>
+      <p:sp>
+        <p:nvSpPr>
+          <p:cNvPr id="7" name="Rounded Rectangle 6"/>
+          <p:cNvSpPr/>
+          <p:nvPr/>
+        </p:nvSpPr>
+        <p:spPr>
+          <a:xfrm>
+            <a:off x="6324447" y="1737360"/>
+            <a:ext cx="5227167" cy="4114800"/>
+          </a:xfrm>
+          <a:prstGeom prst="roundRect">
+            <a:avLst/>
+          </a:prstGeom>
+          <a:solidFill>
+            <a:srgbClr val="1C2A33"/>
+          </a:solidFill>
+          <a:effectLst/>
+        </p:spPr>
+        <p:style>
+          <a:lnRef idx="1">
+            <a:schemeClr val="accent1"/>
+          </a:lnRef>
+          <a:fillRef idx="3">
+            <a:schemeClr val="accent1"/>
+          </a:fillRef>
+          <a:effectRef idx="2">
+            <a:schemeClr val="accent1"/>
+          </a:effectRef>
+          <a:fontRef idx="minor">
+            <a:schemeClr val="lt1"/>
+          </a:fontRef>
+        </p:style>
+        <p:txBody>
+          <a:bodyPr rtlCol="0" anchor="ctr"/>
+          <a:lstStyle/>
+          <a:p>
+            <a:pPr algn="ctr"/>
+          </a:p>
+        </p:txBody>
+      </p:sp>
+      <p:sp>
+        <p:nvSpPr>
+          <p:cNvPr id="8" name="TextBox 7"/>
+          <p:cNvSpPr txBox="1"/>
+          <p:nvPr/>
+        </p:nvSpPr>
+        <p:spPr>
+          <a:xfrm>
+            <a:off x="6598767" y="1901952"/>
+            <a:ext cx="4678527" cy="457200"/>
+          </a:xfrm>
+          <a:prstGeom prst="rect">
+            <a:avLst/>
+          </a:prstGeom>
+          <a:noFill/>
+        </p:spPr>
+        <p:txBody>
+          <a:bodyPr wrap="square" anchor="t" lIns="0" rIns="0" tIns="0" bIns="0">
+            <a:spAutoFit/>
+          </a:bodyPr>
+          <a:lstStyle/>
+          <a:p>
+            <a:pPr algn="l"/>
+            <a:r>
+              <a:rPr sz="1700" b="1">
+                <a:solidFill>
+                  <a:srgbClr val="C8A86B"/>
+                </a:solidFill>
+                <a:latin typeface="楷体"/>
+                <a:ea typeface="楷体"/>
+                <a:cs typeface="楷体"/>
+              </a:rPr>
+              <a:t>权威调研 · 真实来源</a:t>
+            </a:r>
+          </a:p>
+        </p:txBody>
+      </p:sp>
+      <p:sp>
+        <p:nvSpPr>
+          <p:cNvPr id="9" name="TextBox 8"/>
+          <p:cNvSpPr txBox="1"/>
+          <p:nvPr/>
+        </p:nvSpPr>
+        <p:spPr>
+          <a:xfrm>
+            <a:off x="6598767" y="2423160"/>
+            <a:ext cx="4678527" cy="365760"/>
+          </a:xfrm>
+          <a:prstGeom prst="rect">
+            <a:avLst/>
+          </a:prstGeom>
+          <a:noFill/>
+        </p:spPr>
+        <p:txBody>
+          <a:bodyPr wrap="square" anchor="t" lIns="0" rIns="0" tIns="0" bIns="0">
+            <a:spAutoFit/>
+          </a:bodyPr>
+          <a:lstStyle/>
+          <a:p>
+            <a:pPr algn="l"/>
+            <a:r>
+              <a:rPr sz="1350" b="1">
+                <a:solidFill>
+                  <a:srgbClr val="FFFFFF"/>
+                </a:solidFill>
+                <a:latin typeface="微软雅黑"/>
+                <a:ea typeface="微软雅黑"/>
+                <a:cs typeface="微软雅黑"/>
+              </a:rPr>
+              <a:t>① 作者自述（茹志鹃）</a:t>
+            </a:r>
+          </a:p>
+        </p:txBody>
+      </p:sp>
+      <p:sp>
+        <p:nvSpPr>
+          <p:cNvPr id="10" name="TextBox 9"/>
+          <p:cNvSpPr txBox="1"/>
+          <p:nvPr/>
+        </p:nvSpPr>
+        <p:spPr>
+          <a:xfrm>
+            <a:off x="6598767" y="2788920"/>
+            <a:ext cx="4678527" cy="1097280"/>
           </a:xfrm>
           <a:prstGeom prst="rect">
             <a:avLst/>
@@ -4614,59 +5216,31 @@
               <a:lnSpc>
                 <a:spcPct val="150000"/>
               </a:lnSpc>
-              <a:spcAft>
-                <a:spcPts val="600"/>
-              </a:spcAft>
             </a:pPr>
             <a:r>
-              <a:rPr sz="1600" b="0">
-                <a:solidFill>
-                  <a:srgbClr val="1C2A33"/>
+              <a:rPr sz="1250" b="0">
+                <a:solidFill>
+                  <a:srgbClr val="FFFFFF"/>
                 </a:solidFill>
                 <a:latin typeface="楷体"/>
                 <a:ea typeface="楷体"/>
                 <a:cs typeface="楷体"/>
               </a:rPr>
-              <a:t>本课为第一单元第四课时，从诗歌转向小说阅读。《百合花》是茹志鹃1958年短篇代表作，以解放战争为背景，写「我」（文工团女团员）、小通讯员、新媳妇三人在包扎所的短暂交集。小说不以战争场面取胜，而以「百合花被子」「馒头」「衣服破洞」等细节传达战争中的人性之美与青春之纯。「百合花被子」是核心意象——洁白的百合象征纯洁与美好，被子上洒的鲜血象征牺牲与崇高。叙事视角独特（第一人称限知），语言清新克制。</a:t>
-            </a:r>
-          </a:p>
-        </p:txBody>
-      </p:sp>
-      <p:pic>
-        <p:nvPicPr>
-          <p:cNvPr id="6" name="Picture 5" descr="typewriter.jpg"/>
-          <p:cNvPicPr>
-            <a:picLocks noChangeAspect="1"/>
-          </p:cNvPicPr>
-          <p:nvPr/>
-        </p:nvPicPr>
-        <p:blipFill>
-          <a:blip r:embed="rId2"/>
-          <a:srcRect l="5860" r="5860"/>
-          <a:stretch>
-            <a:fillRect/>
-          </a:stretch>
-        </p:blipFill>
-        <p:spPr>
-          <a:xfrm>
-            <a:off x="8046720" y="1508760"/>
-            <a:ext cx="4114800" cy="3108960"/>
-          </a:xfrm>
-          <a:prstGeom prst="rect">
-            <a:avLst/>
-          </a:prstGeom>
-        </p:spPr>
-      </p:pic>
-      <p:sp>
-        <p:nvSpPr>
-          <p:cNvPr id="7" name="TextBox 6"/>
+              <a:t>"战争使人不能有长谈的机会，但是战争却能使人深交……便能够肝胆相照，生死与共。"《百合花》是在"匝匝忧虑之中，缅怀追念时得来的产物"。</a:t>
+            </a:r>
+          </a:p>
+        </p:txBody>
+      </p:sp>
+      <p:sp>
+        <p:nvSpPr>
+          <p:cNvPr id="11" name="TextBox 10"/>
           <p:cNvSpPr txBox="1"/>
           <p:nvPr/>
         </p:nvSpPr>
         <p:spPr>
           <a:xfrm>
-            <a:off x="8046720" y="4663440"/>
-            <a:ext cx="4114800" cy="365760"/>
+            <a:off x="6598767" y="3886200"/>
+            <a:ext cx="4678527" cy="320040"/>
           </a:xfrm>
           <a:prstGeom prst="rect">
             <a:avLst/>
@@ -4679,24 +5253,176 @@
           </a:bodyPr>
           <a:lstStyle/>
           <a:p>
-            <a:pPr algn="ctr"/>
+            <a:pPr algn="l"/>
             <a:r>
               <a:rPr sz="1100" b="0">
                 <a:solidFill>
-                  <a:srgbClr val="6B6258"/>
+                  <a:srgbClr val="C8A86B"/>
                 </a:solidFill>
                 <a:latin typeface="微软雅黑"/>
                 <a:ea typeface="微软雅黑"/>
                 <a:cs typeface="微软雅黑"/>
               </a:rPr>
-              <a:t>资料图（自由授权，复用 typewriter.jpg）</a:t>
-            </a:r>
-          </a:p>
-        </p:txBody>
-      </p:sp>
-      <p:sp>
-        <p:nvSpPr>
-          <p:cNvPr id="8" name="TextBox 7"/>
+              <a:t>—— 茹志鹃《漫谈我的创作经历》</a:t>
+            </a:r>
+          </a:p>
+        </p:txBody>
+      </p:sp>
+      <p:sp>
+        <p:nvSpPr>
+          <p:cNvPr id="12" name="TextBox 11"/>
+          <p:cNvSpPr txBox="1"/>
+          <p:nvPr/>
+        </p:nvSpPr>
+        <p:spPr>
+          <a:xfrm>
+            <a:off x="6598767" y="4251960"/>
+            <a:ext cx="4678527" cy="365760"/>
+          </a:xfrm>
+          <a:prstGeom prst="rect">
+            <a:avLst/>
+          </a:prstGeom>
+          <a:noFill/>
+        </p:spPr>
+        <p:txBody>
+          <a:bodyPr wrap="square" anchor="t" lIns="0" rIns="0" tIns="0" bIns="0">
+            <a:spAutoFit/>
+          </a:bodyPr>
+          <a:lstStyle/>
+          <a:p>
+            <a:pPr algn="l"/>
+            <a:r>
+              <a:rPr sz="1350" b="1">
+                <a:solidFill>
+                  <a:srgbClr val="FFFFFF"/>
+                </a:solidFill>
+                <a:latin typeface="微软雅黑"/>
+                <a:ea typeface="微软雅黑"/>
+                <a:cs typeface="微软雅黑"/>
+              </a:rPr>
+              <a:t>② 权威评论（茅盾，1958）</a:t>
+            </a:r>
+          </a:p>
+        </p:txBody>
+      </p:sp>
+      <p:sp>
+        <p:nvSpPr>
+          <p:cNvPr id="13" name="TextBox 12"/>
+          <p:cNvSpPr txBox="1"/>
+          <p:nvPr/>
+        </p:nvSpPr>
+        <p:spPr>
+          <a:xfrm>
+            <a:off x="6598767" y="4617719"/>
+            <a:ext cx="4678527" cy="914400"/>
+          </a:xfrm>
+          <a:prstGeom prst="rect">
+            <a:avLst/>
+          </a:prstGeom>
+          <a:noFill/>
+        </p:spPr>
+        <p:txBody>
+          <a:bodyPr wrap="square" anchor="t" lIns="0" rIns="0" tIns="0" bIns="0">
+            <a:spAutoFit/>
+          </a:bodyPr>
+          <a:lstStyle/>
+          <a:p>
+            <a:pPr algn="l">
+              <a:lnSpc>
+                <a:spcPct val="150000"/>
+              </a:lnSpc>
+            </a:pPr>
+            <a:r>
+              <a:rPr sz="1250" b="0">
+                <a:solidFill>
+                  <a:srgbClr val="FFFFFF"/>
+                </a:solidFill>
+                <a:latin typeface="楷体"/>
+                <a:ea typeface="楷体"/>
+                <a:cs typeface="楷体"/>
+              </a:rPr>
+              <a:t>"结构谨严、没有闲笔"，"富于抒情诗的风味"；风格"清新、俊逸"——茅盾读过的几十个短篇里"最满意、最感动"的一篇。</a:t>
+            </a:r>
+          </a:p>
+        </p:txBody>
+      </p:sp>
+      <p:sp>
+        <p:nvSpPr>
+          <p:cNvPr id="14" name="TextBox 13"/>
+          <p:cNvSpPr txBox="1"/>
+          <p:nvPr/>
+        </p:nvSpPr>
+        <p:spPr>
+          <a:xfrm>
+            <a:off x="6598767" y="5532120"/>
+            <a:ext cx="4678527" cy="365760"/>
+          </a:xfrm>
+          <a:prstGeom prst="rect">
+            <a:avLst/>
+          </a:prstGeom>
+          <a:noFill/>
+        </p:spPr>
+        <p:txBody>
+          <a:bodyPr wrap="square" anchor="t" lIns="0" rIns="0" tIns="0" bIns="0">
+            <a:spAutoFit/>
+          </a:bodyPr>
+          <a:lstStyle/>
+          <a:p>
+            <a:pPr algn="l"/>
+            <a:r>
+              <a:rPr sz="1100" b="0">
+                <a:solidFill>
+                  <a:srgbClr val="C8A86B"/>
+                </a:solidFill>
+                <a:latin typeface="微软雅黑"/>
+                <a:ea typeface="微软雅黑"/>
+                <a:cs typeface="微软雅黑"/>
+              </a:rPr>
+              <a:t>—— 茅盾《谈最近的短篇小说》，《人民文学》1958</a:t>
+            </a:r>
+          </a:p>
+        </p:txBody>
+      </p:sp>
+      <p:sp>
+        <p:nvSpPr>
+          <p:cNvPr id="15" name="TextBox 14"/>
+          <p:cNvSpPr txBox="1"/>
+          <p:nvPr/>
+        </p:nvSpPr>
+        <p:spPr>
+          <a:xfrm>
+            <a:off x="640080" y="6263640"/>
+            <a:ext cx="10911535" cy="365760"/>
+          </a:xfrm>
+          <a:prstGeom prst="rect">
+            <a:avLst/>
+          </a:prstGeom>
+          <a:noFill/>
+        </p:spPr>
+        <p:txBody>
+          <a:bodyPr wrap="square" anchor="t" lIns="0" rIns="0" tIns="0" bIns="0">
+            <a:spAutoFit/>
+          </a:bodyPr>
+          <a:lstStyle/>
+          <a:p>
+            <a:pPr algn="l"/>
+            <a:r>
+              <a:rPr sz="1150" b="0">
+                <a:solidFill>
+                  <a:srgbClr val="6B6258"/>
+                </a:solidFill>
+                <a:latin typeface="微软雅黑"/>
+                <a:ea typeface="微软雅黑"/>
+                <a:cs typeface="微软雅黑"/>
+              </a:rPr>
+              <a:t>本课件未使用无关配图（网络不可用；按规范 §2.3 以学科色块兜底，未套用无关图像）。</a:t>
+            </a:r>
+          </a:p>
+        </p:txBody>
+      </p:sp>
+      <p:sp>
+        <p:nvSpPr>
+          <p:cNvPr id="16" name="TextBox 15"/>
           <p:cNvSpPr txBox="1"/>
           <p:nvPr/>
         </p:nvSpPr>
@@ -4829,7 +5555,7 @@
                 <a:ea typeface="微软雅黑"/>
                 <a:cs typeface="微软雅黑"/>
               </a:rPr>
-              <a:t>学习重点</a:t>
+              <a:t>重点 · 三个抓手</a:t>
             </a:r>
           </a:p>
         </p:txBody>
@@ -4880,14 +5606,51 @@
       </p:sp>
       <p:sp>
         <p:nvSpPr>
-          <p:cNvPr id="5" name="Rounded Rectangle 4"/>
+          <p:cNvPr id="5" name="TextBox 4"/>
+          <p:cNvSpPr txBox="1"/>
+          <p:nvPr/>
+        </p:nvSpPr>
+        <p:spPr>
+          <a:xfrm>
+            <a:off x="640080" y="1325880"/>
+            <a:ext cx="10515600" cy="548640"/>
+          </a:xfrm>
+          <a:prstGeom prst="rect">
+            <a:avLst/>
+          </a:prstGeom>
+          <a:noFill/>
+        </p:spPr>
+        <p:txBody>
+          <a:bodyPr wrap="square" anchor="t" lIns="0" rIns="0" tIns="0" bIns="0">
+            <a:spAutoFit/>
+          </a:bodyPr>
+          <a:lstStyle/>
+          <a:p>
+            <a:pPr algn="l"/>
+            <a:r>
+              <a:rPr sz="2400" b="1">
+                <a:solidFill>
+                  <a:srgbClr val="1C2A33"/>
+                </a:solidFill>
+                <a:latin typeface="楷体"/>
+                <a:ea typeface="楷体"/>
+                <a:cs typeface="楷体"/>
+              </a:rPr>
+              <a:t>情节 · 意象 · 细节</a:t>
+            </a:r>
+          </a:p>
+        </p:txBody>
+      </p:sp>
+      <p:sp>
+        <p:nvSpPr>
+          <p:cNvPr id="6" name="Rounded Rectangle 5"/>
           <p:cNvSpPr/>
           <p:nvPr/>
         </p:nvSpPr>
         <p:spPr>
           <a:xfrm>
-            <a:off x="640080" y="1371600"/>
-            <a:ext cx="10911535" cy="1597152"/>
+            <a:off x="640080" y="2194560"/>
+            <a:ext cx="3393338" cy="3840480"/>
           </a:xfrm>
           <a:prstGeom prst="roundRect">
             <a:avLst/>
@@ -4895,7 +5658,425 @@
           <a:solidFill>
             <a:srgbClr val="FFFFFF"/>
           </a:solidFill>
-          <a:ln w="22860">
+          <a:ln w="20320">
+            <a:solidFill>
+              <a:srgbClr val="B23A2A"/>
+            </a:solidFill>
+          </a:ln>
+          <a:effectLst/>
+        </p:spPr>
+        <p:style>
+          <a:lnRef idx="1">
+            <a:schemeClr val="accent1"/>
+          </a:lnRef>
+          <a:fillRef idx="3">
+            <a:schemeClr val="accent1"/>
+          </a:fillRef>
+          <a:effectRef idx="2">
+            <a:schemeClr val="accent1"/>
+          </a:effectRef>
+          <a:fontRef idx="minor">
+            <a:schemeClr val="lt1"/>
+          </a:fontRef>
+        </p:style>
+        <p:txBody>
+          <a:bodyPr rtlCol="0" anchor="ctr"/>
+          <a:lstStyle/>
+          <a:p>
+            <a:pPr algn="ctr"/>
+          </a:p>
+        </p:txBody>
+      </p:sp>
+      <p:sp>
+        <p:nvSpPr>
+          <p:cNvPr id="7" name="Rectangle 6"/>
+          <p:cNvSpPr/>
+          <p:nvPr/>
+        </p:nvSpPr>
+        <p:spPr>
+          <a:xfrm>
+            <a:off x="640080" y="2194560"/>
+            <a:ext cx="3393338" cy="548640"/>
+          </a:xfrm>
+          <a:prstGeom prst="rect">
+            <a:avLst/>
+          </a:prstGeom>
+          <a:solidFill>
+            <a:srgbClr val="B23A2A"/>
+          </a:solidFill>
+          <a:ln>
+            <a:noFill/>
+          </a:ln>
+          <a:effectLst/>
+        </p:spPr>
+        <p:style>
+          <a:lnRef idx="1">
+            <a:schemeClr val="accent1"/>
+          </a:lnRef>
+          <a:fillRef idx="3">
+            <a:schemeClr val="accent1"/>
+          </a:fillRef>
+          <a:effectRef idx="2">
+            <a:schemeClr val="accent1"/>
+          </a:effectRef>
+          <a:fontRef idx="minor">
+            <a:schemeClr val="lt1"/>
+          </a:fontRef>
+        </p:style>
+        <p:txBody>
+          <a:bodyPr rtlCol="0" anchor="ctr"/>
+          <a:lstStyle/>
+          <a:p>
+            <a:pPr algn="ctr"/>
+          </a:p>
+        </p:txBody>
+      </p:sp>
+      <p:sp>
+        <p:nvSpPr>
+          <p:cNvPr id="8" name="TextBox 7"/>
+          <p:cNvSpPr txBox="1"/>
+          <p:nvPr/>
+        </p:nvSpPr>
+        <p:spPr>
+          <a:xfrm>
+            <a:off x="640080" y="2304288"/>
+            <a:ext cx="3393338" cy="365760"/>
+          </a:xfrm>
+          <a:prstGeom prst="rect">
+            <a:avLst/>
+          </a:prstGeom>
+          <a:noFill/>
+        </p:spPr>
+        <p:txBody>
+          <a:bodyPr wrap="square" anchor="t" lIns="0" rIns="0" tIns="0" bIns="0">
+            <a:spAutoFit/>
+          </a:bodyPr>
+          <a:lstStyle/>
+          <a:p>
+            <a:pPr algn="ctr"/>
+            <a:r>
+              <a:rPr sz="1500" b="1">
+                <a:solidFill>
+                  <a:srgbClr val="FFFFFF"/>
+                </a:solidFill>
+                <a:latin typeface="微软雅黑"/>
+                <a:ea typeface="微软雅黑"/>
+                <a:cs typeface="微软雅黑"/>
+              </a:rPr>
+              <a:t>① 情节脉络</a:t>
+            </a:r>
+          </a:p>
+        </p:txBody>
+      </p:sp>
+      <p:sp>
+        <p:nvSpPr>
+          <p:cNvPr id="9" name="TextBox 8"/>
+          <p:cNvSpPr txBox="1"/>
+          <p:nvPr/>
+        </p:nvSpPr>
+        <p:spPr>
+          <a:xfrm>
+            <a:off x="914400" y="2971800"/>
+            <a:ext cx="2844698" cy="2103120"/>
+          </a:xfrm>
+          <a:prstGeom prst="rect">
+            <a:avLst/>
+          </a:prstGeom>
+          <a:noFill/>
+        </p:spPr>
+        <p:txBody>
+          <a:bodyPr wrap="square" anchor="t" lIns="0" rIns="0" tIns="0" bIns="0">
+            <a:spAutoFit/>
+          </a:bodyPr>
+          <a:lstStyle/>
+          <a:p>
+            <a:pPr algn="l">
+              <a:lnSpc>
+                <a:spcPct val="155000"/>
+              </a:lnSpc>
+            </a:pPr>
+            <a:r>
+              <a:rPr sz="1350" b="0">
+                <a:solidFill>
+                  <a:srgbClr val="1C2A33"/>
+                </a:solidFill>
+                <a:latin typeface="楷体"/>
+                <a:ea typeface="楷体"/>
+                <a:cs typeface="楷体"/>
+              </a:rPr>
+              <a:t>借被子（初遇）→ 包扎所帮忙（相处）→ 通讯员牺牲（高潮）→ 新媳妇盖被子（结局）。</a:t>
+            </a:r>
+          </a:p>
+        </p:txBody>
+      </p:sp>
+      <p:sp>
+        <p:nvSpPr>
+          <p:cNvPr id="10" name="TextBox 9"/>
+          <p:cNvSpPr txBox="1"/>
+          <p:nvPr/>
+        </p:nvSpPr>
+        <p:spPr>
+          <a:xfrm>
+            <a:off x="914400" y="5120640"/>
+            <a:ext cx="2844698" cy="822960"/>
+          </a:xfrm>
+          <a:prstGeom prst="rect">
+            <a:avLst/>
+          </a:prstGeom>
+          <a:noFill/>
+        </p:spPr>
+        <p:txBody>
+          <a:bodyPr wrap="square" anchor="t" lIns="0" rIns="0" tIns="0" bIns="0">
+            <a:spAutoFit/>
+          </a:bodyPr>
+          <a:lstStyle/>
+          <a:p>
+            <a:pPr algn="l">
+              <a:lnSpc>
+                <a:spcPct val="150000"/>
+              </a:lnSpc>
+            </a:pPr>
+            <a:r>
+              <a:rPr sz="1250" b="1">
+                <a:solidFill>
+                  <a:srgbClr val="B23A2A"/>
+                </a:solidFill>
+                <a:latin typeface="楷体"/>
+                <a:ea typeface="楷体"/>
+                <a:cs typeface="楷体"/>
+              </a:rPr>
+              <a:t> 四幕一条线：从"不愿借"到"主动盖"。</a:t>
+            </a:r>
+          </a:p>
+        </p:txBody>
+      </p:sp>
+      <p:sp>
+        <p:nvSpPr>
+          <p:cNvPr id="11" name="Rounded Rectangle 10"/>
+          <p:cNvSpPr/>
+          <p:nvPr/>
+        </p:nvSpPr>
+        <p:spPr>
+          <a:xfrm>
+            <a:off x="4399178" y="2194560"/>
+            <a:ext cx="3393338" cy="3840480"/>
+          </a:xfrm>
+          <a:prstGeom prst="roundRect">
+            <a:avLst/>
+          </a:prstGeom>
+          <a:solidFill>
+            <a:srgbClr val="FFFFFF"/>
+          </a:solidFill>
+          <a:ln w="20320">
+            <a:solidFill>
+              <a:srgbClr val="2E7D6B"/>
+            </a:solidFill>
+          </a:ln>
+          <a:effectLst/>
+        </p:spPr>
+        <p:style>
+          <a:lnRef idx="1">
+            <a:schemeClr val="accent1"/>
+          </a:lnRef>
+          <a:fillRef idx="3">
+            <a:schemeClr val="accent1"/>
+          </a:fillRef>
+          <a:effectRef idx="2">
+            <a:schemeClr val="accent1"/>
+          </a:effectRef>
+          <a:fontRef idx="minor">
+            <a:schemeClr val="lt1"/>
+          </a:fontRef>
+        </p:style>
+        <p:txBody>
+          <a:bodyPr rtlCol="0" anchor="ctr"/>
+          <a:lstStyle/>
+          <a:p>
+            <a:pPr algn="ctr"/>
+          </a:p>
+        </p:txBody>
+      </p:sp>
+      <p:sp>
+        <p:nvSpPr>
+          <p:cNvPr id="12" name="Rectangle 11"/>
+          <p:cNvSpPr/>
+          <p:nvPr/>
+        </p:nvSpPr>
+        <p:spPr>
+          <a:xfrm>
+            <a:off x="4399178" y="2194560"/>
+            <a:ext cx="3393338" cy="548640"/>
+          </a:xfrm>
+          <a:prstGeom prst="rect">
+            <a:avLst/>
+          </a:prstGeom>
+          <a:solidFill>
+            <a:srgbClr val="2E7D6B"/>
+          </a:solidFill>
+          <a:ln>
+            <a:noFill/>
+          </a:ln>
+          <a:effectLst/>
+        </p:spPr>
+        <p:style>
+          <a:lnRef idx="1">
+            <a:schemeClr val="accent1"/>
+          </a:lnRef>
+          <a:fillRef idx="3">
+            <a:schemeClr val="accent1"/>
+          </a:fillRef>
+          <a:effectRef idx="2">
+            <a:schemeClr val="accent1"/>
+          </a:effectRef>
+          <a:fontRef idx="minor">
+            <a:schemeClr val="lt1"/>
+          </a:fontRef>
+        </p:style>
+        <p:txBody>
+          <a:bodyPr rtlCol="0" anchor="ctr"/>
+          <a:lstStyle/>
+          <a:p>
+            <a:pPr algn="ctr"/>
+          </a:p>
+        </p:txBody>
+      </p:sp>
+      <p:sp>
+        <p:nvSpPr>
+          <p:cNvPr id="13" name="TextBox 12"/>
+          <p:cNvSpPr txBox="1"/>
+          <p:nvPr/>
+        </p:nvSpPr>
+        <p:spPr>
+          <a:xfrm>
+            <a:off x="4399178" y="2304288"/>
+            <a:ext cx="3393338" cy="365760"/>
+          </a:xfrm>
+          <a:prstGeom prst="rect">
+            <a:avLst/>
+          </a:prstGeom>
+          <a:noFill/>
+        </p:spPr>
+        <p:txBody>
+          <a:bodyPr wrap="square" anchor="t" lIns="0" rIns="0" tIns="0" bIns="0">
+            <a:spAutoFit/>
+          </a:bodyPr>
+          <a:lstStyle/>
+          <a:p>
+            <a:pPr algn="ctr"/>
+            <a:r>
+              <a:rPr sz="1500" b="1">
+                <a:solidFill>
+                  <a:srgbClr val="FFFFFF"/>
+                </a:solidFill>
+                <a:latin typeface="微软雅黑"/>
+                <a:ea typeface="微软雅黑"/>
+                <a:cs typeface="微软雅黑"/>
+              </a:rPr>
+              <a:t>② 核心意象</a:t>
+            </a:r>
+          </a:p>
+        </p:txBody>
+      </p:sp>
+      <p:sp>
+        <p:nvSpPr>
+          <p:cNvPr id="14" name="TextBox 13"/>
+          <p:cNvSpPr txBox="1"/>
+          <p:nvPr/>
+        </p:nvSpPr>
+        <p:spPr>
+          <a:xfrm>
+            <a:off x="4673498" y="2971800"/>
+            <a:ext cx="2844698" cy="2103120"/>
+          </a:xfrm>
+          <a:prstGeom prst="rect">
+            <a:avLst/>
+          </a:prstGeom>
+          <a:noFill/>
+        </p:spPr>
+        <p:txBody>
+          <a:bodyPr wrap="square" anchor="t" lIns="0" rIns="0" tIns="0" bIns="0">
+            <a:spAutoFit/>
+          </a:bodyPr>
+          <a:lstStyle/>
+          <a:p>
+            <a:pPr algn="l">
+              <a:lnSpc>
+                <a:spcPct val="155000"/>
+              </a:lnSpc>
+            </a:pPr>
+            <a:r>
+              <a:rPr sz="1350" b="0">
+                <a:solidFill>
+                  <a:srgbClr val="1C2A33"/>
+                </a:solidFill>
+                <a:latin typeface="楷体"/>
+                <a:ea typeface="楷体"/>
+                <a:cs typeface="楷体"/>
+              </a:rPr>
+              <a:t>「百合花被子」——初见（新媳妇不愿借）→ 相处（铺在包扎所）→ 高潮（盖在遗体上）。</a:t>
+            </a:r>
+          </a:p>
+        </p:txBody>
+      </p:sp>
+      <p:sp>
+        <p:nvSpPr>
+          <p:cNvPr id="15" name="TextBox 14"/>
+          <p:cNvSpPr txBox="1"/>
+          <p:nvPr/>
+        </p:nvSpPr>
+        <p:spPr>
+          <a:xfrm>
+            <a:off x="4673498" y="5120640"/>
+            <a:ext cx="2844698" cy="822960"/>
+          </a:xfrm>
+          <a:prstGeom prst="rect">
+            <a:avLst/>
+          </a:prstGeom>
+          <a:noFill/>
+        </p:spPr>
+        <p:txBody>
+          <a:bodyPr wrap="square" anchor="t" lIns="0" rIns="0" tIns="0" bIns="0">
+            <a:spAutoFit/>
+          </a:bodyPr>
+          <a:lstStyle/>
+          <a:p>
+            <a:pPr algn="l">
+              <a:lnSpc>
+                <a:spcPct val="150000"/>
+              </a:lnSpc>
+            </a:pPr>
+            <a:r>
+              <a:rPr sz="1250" b="1">
+                <a:solidFill>
+                  <a:srgbClr val="2E7D6B"/>
+                </a:solidFill>
+                <a:latin typeface="楷体"/>
+                <a:ea typeface="楷体"/>
+                <a:cs typeface="楷体"/>
+              </a:rPr>
+              <a:t> 意象随情节演变，承载人的情感变化。</a:t>
+            </a:r>
+          </a:p>
+        </p:txBody>
+      </p:sp>
+      <p:sp>
+        <p:nvSpPr>
+          <p:cNvPr id="16" name="Rounded Rectangle 15"/>
+          <p:cNvSpPr/>
+          <p:nvPr/>
+        </p:nvSpPr>
+        <p:spPr>
+          <a:xfrm>
+            <a:off x="8158276" y="2194560"/>
+            <a:ext cx="3393338" cy="3840480"/>
+          </a:xfrm>
+          <a:prstGeom prst="roundRect">
+            <a:avLst/>
+          </a:prstGeom>
+          <a:solidFill>
+            <a:srgbClr val="FFFFFF"/>
+          </a:solidFill>
+          <a:ln w="20320">
             <a:solidFill>
               <a:srgbClr val="C8A86B"/>
             </a:solidFill>
@@ -4926,107 +6107,23 @@
       </p:sp>
       <p:sp>
         <p:nvSpPr>
-          <p:cNvPr id="6" name="TextBox 5"/>
-          <p:cNvSpPr txBox="1"/>
-          <p:nvPr/>
-        </p:nvSpPr>
-        <p:spPr>
-          <a:xfrm>
-            <a:off x="1371600" y="1481328"/>
-            <a:ext cx="9997135" cy="457200"/>
-          </a:xfrm>
-          <a:prstGeom prst="rect">
-            <a:avLst/>
-          </a:prstGeom>
-          <a:noFill/>
-        </p:spPr>
-        <p:txBody>
-          <a:bodyPr wrap="square" anchor="t" lIns="0" rIns="0" tIns="0" bIns="0">
-            <a:spAutoFit/>
-          </a:bodyPr>
-          <a:lstStyle/>
-          <a:p>
-            <a:pPr algn="l">
-              <a:lnSpc>
-                <a:spcPct val="110000"/>
-              </a:lnSpc>
-            </a:pPr>
-            <a:r>
-              <a:rPr sz="1600" b="1">
-                <a:solidFill>
-                  <a:srgbClr val="1C2A33"/>
-                </a:solidFill>
-                <a:latin typeface="微软雅黑"/>
-                <a:ea typeface="微软雅黑"/>
-                <a:cs typeface="微软雅黑"/>
-              </a:rPr>
-              <a:t/>
-            </a:r>
-          </a:p>
-        </p:txBody>
-      </p:sp>
-      <p:sp>
-        <p:nvSpPr>
-          <p:cNvPr id="7" name="TextBox 6"/>
-          <p:cNvSpPr txBox="1"/>
-          <p:nvPr/>
-        </p:nvSpPr>
-        <p:spPr>
-          <a:xfrm>
-            <a:off x="1371600" y="1920240"/>
-            <a:ext cx="9997135" cy="957072"/>
-          </a:xfrm>
-          <a:prstGeom prst="rect">
-            <a:avLst/>
-          </a:prstGeom>
-          <a:noFill/>
-        </p:spPr>
-        <p:txBody>
-          <a:bodyPr wrap="square" anchor="t" lIns="0" rIns="0" tIns="0" bIns="0">
-            <a:spAutoFit/>
-          </a:bodyPr>
-          <a:lstStyle/>
-          <a:p>
-            <a:pPr algn="l">
-              <a:lnSpc>
-                <a:spcPct val="128000"/>
-              </a:lnSpc>
-            </a:pPr>
-            <a:r>
-              <a:rPr sz="1200" b="0">
-                <a:solidFill>
-                  <a:srgbClr val="1C2A33"/>
-                </a:solidFill>
-                <a:latin typeface="楷体"/>
-                <a:ea typeface="楷体"/>
-                <a:cs typeface="楷体"/>
-              </a:rPr>
-              <a:t>① 情节脉络：借被子（初遇）→包扎所帮忙（相处）→通讯员牺牲（高潮）→新媳妇盖被子（结局）。</a:t>
-            </a:r>
-          </a:p>
-        </p:txBody>
-      </p:sp>
-      <p:sp>
-        <p:nvSpPr>
-          <p:cNvPr id="8" name="Rounded Rectangle 7"/>
+          <p:cNvPr id="17" name="Rectangle 16"/>
           <p:cNvSpPr/>
           <p:nvPr/>
         </p:nvSpPr>
         <p:spPr>
           <a:xfrm>
-            <a:off x="640080" y="3078480"/>
-            <a:ext cx="10911535" cy="1597152"/>
-          </a:xfrm>
-          <a:prstGeom prst="roundRect">
+            <a:off x="8158276" y="2194560"/>
+            <a:ext cx="3393338" cy="548640"/>
+          </a:xfrm>
+          <a:prstGeom prst="rect">
             <a:avLst/>
           </a:prstGeom>
           <a:solidFill>
-            <a:srgbClr val="FFFFFF"/>
+            <a:srgbClr val="C8A86B"/>
           </a:solidFill>
-          <a:ln w="22860">
-            <a:solidFill>
-              <a:srgbClr val="C8A86B"/>
-            </a:solidFill>
+          <a:ln>
+            <a:noFill/>
           </a:ln>
           <a:effectLst/>
         </p:spPr>
@@ -5054,14 +6151,14 @@
       </p:sp>
       <p:sp>
         <p:nvSpPr>
-          <p:cNvPr id="9" name="TextBox 8"/>
+          <p:cNvPr id="18" name="TextBox 17"/>
           <p:cNvSpPr txBox="1"/>
           <p:nvPr/>
         </p:nvSpPr>
         <p:spPr>
           <a:xfrm>
-            <a:off x="1371600" y="3188208"/>
-            <a:ext cx="9997135" cy="457200"/>
+            <a:off x="8158276" y="2304288"/>
+            <a:ext cx="3393338" cy="365760"/>
           </a:xfrm>
           <a:prstGeom prst="rect">
             <a:avLst/>
@@ -5074,35 +6171,31 @@
           </a:bodyPr>
           <a:lstStyle/>
           <a:p>
-            <a:pPr algn="l">
-              <a:lnSpc>
-                <a:spcPct val="110000"/>
-              </a:lnSpc>
-            </a:pPr>
-            <a:r>
-              <a:rPr sz="1600" b="1">
-                <a:solidFill>
-                  <a:srgbClr val="1C2A33"/>
+            <a:pPr algn="ctr"/>
+            <a:r>
+              <a:rPr sz="1500" b="1">
+                <a:solidFill>
+                  <a:srgbClr val="FFFFFF"/>
                 </a:solidFill>
                 <a:latin typeface="微软雅黑"/>
                 <a:ea typeface="微软雅黑"/>
                 <a:cs typeface="微软雅黑"/>
               </a:rPr>
-              <a:t/>
-            </a:r>
-          </a:p>
-        </p:txBody>
-      </p:sp>
-      <p:sp>
-        <p:nvSpPr>
-          <p:cNvPr id="10" name="TextBox 9"/>
+              <a:t>③ 关键细节</a:t>
+            </a:r>
+          </a:p>
+        </p:txBody>
+      </p:sp>
+      <p:sp>
+        <p:nvSpPr>
+          <p:cNvPr id="19" name="TextBox 18"/>
           <p:cNvSpPr txBox="1"/>
           <p:nvPr/>
         </p:nvSpPr>
         <p:spPr>
           <a:xfrm>
-            <a:off x="1371600" y="3627120"/>
-            <a:ext cx="9997135" cy="957072"/>
+            <a:off x="8432596" y="2971800"/>
+            <a:ext cx="2844698" cy="2103120"/>
           </a:xfrm>
           <a:prstGeom prst="rect">
             <a:avLst/>
@@ -5117,11 +6210,11 @@
           <a:p>
             <a:pPr algn="l">
               <a:lnSpc>
-                <a:spcPct val="128000"/>
+                <a:spcPct val="155000"/>
               </a:lnSpc>
             </a:pPr>
             <a:r>
-              <a:rPr sz="1200" b="0">
+              <a:rPr sz="1350" b="0">
                 <a:solidFill>
                   <a:srgbClr val="1C2A33"/>
                 </a:solidFill>
@@ -5129,67 +6222,21 @@
                 <a:ea typeface="楷体"/>
                 <a:cs typeface="楷体"/>
               </a:rPr>
-              <a:t>② 核心意象：百合花被子——初见（新媳妇不愿借）→相处（铺在包扎所）→高潮（盖在通讯员遗体上），意象随情节演变。</a:t>
-            </a:r>
-          </a:p>
-        </p:txBody>
-      </p:sp>
-      <p:sp>
-        <p:nvSpPr>
-          <p:cNvPr id="11" name="Rounded Rectangle 10"/>
-          <p:cNvSpPr/>
-          <p:nvPr/>
-        </p:nvSpPr>
-        <p:spPr>
-          <a:xfrm>
-            <a:off x="640080" y="4785360"/>
-            <a:ext cx="10911535" cy="1597152"/>
-          </a:xfrm>
-          <a:prstGeom prst="roundRect">
-            <a:avLst/>
-          </a:prstGeom>
-          <a:solidFill>
-            <a:srgbClr val="FFFFFF"/>
-          </a:solidFill>
-          <a:ln w="22860">
-            <a:solidFill>
-              <a:srgbClr val="C8A86B"/>
-            </a:solidFill>
-          </a:ln>
-          <a:effectLst/>
-        </p:spPr>
-        <p:style>
-          <a:lnRef idx="1">
-            <a:schemeClr val="accent1"/>
-          </a:lnRef>
-          <a:fillRef idx="3">
-            <a:schemeClr val="accent1"/>
-          </a:fillRef>
-          <a:effectRef idx="2">
-            <a:schemeClr val="accent1"/>
-          </a:effectRef>
-          <a:fontRef idx="minor">
-            <a:schemeClr val="lt1"/>
-          </a:fontRef>
-        </p:style>
-        <p:txBody>
-          <a:bodyPr rtlCol="0" anchor="ctr"/>
-          <a:lstStyle/>
-          <a:p>
-            <a:pPr algn="ctr"/>
-          </a:p>
-        </p:txBody>
-      </p:sp>
-      <p:sp>
-        <p:nvSpPr>
-          <p:cNvPr id="12" name="TextBox 11"/>
+              <a:t>枪筒插树枝、衣服破洞、两个馒头——三个反复出现的细节，以小见大塑人物。</a:t>
+            </a:r>
+          </a:p>
+        </p:txBody>
+      </p:sp>
+      <p:sp>
+        <p:nvSpPr>
+          <p:cNvPr id="20" name="TextBox 19"/>
           <p:cNvSpPr txBox="1"/>
           <p:nvPr/>
         </p:nvSpPr>
         <p:spPr>
           <a:xfrm>
-            <a:off x="1371600" y="4895088"/>
-            <a:ext cx="9997135" cy="457200"/>
+            <a:off x="8432596" y="5120640"/>
+            <a:ext cx="2844698" cy="822960"/>
           </a:xfrm>
           <a:prstGeom prst="rect">
             <a:avLst/>
@@ -5204,67 +6251,26 @@
           <a:p>
             <a:pPr algn="l">
               <a:lnSpc>
-                <a:spcPct val="110000"/>
+                <a:spcPct val="150000"/>
               </a:lnSpc>
             </a:pPr>
             <a:r>
-              <a:rPr sz="1600" b="1">
-                <a:solidFill>
-                  <a:srgbClr val="1C2A33"/>
-                </a:solidFill>
-                <a:latin typeface="微软雅黑"/>
-                <a:ea typeface="微软雅黑"/>
-                <a:cs typeface="微软雅黑"/>
-              </a:rPr>
-              <a:t/>
-            </a:r>
-          </a:p>
-        </p:txBody>
-      </p:sp>
-      <p:sp>
-        <p:nvSpPr>
-          <p:cNvPr id="13" name="TextBox 12"/>
-          <p:cNvSpPr txBox="1"/>
-          <p:nvPr/>
-        </p:nvSpPr>
-        <p:spPr>
-          <a:xfrm>
-            <a:off x="1371600" y="5334000"/>
-            <a:ext cx="9997135" cy="957072"/>
-          </a:xfrm>
-          <a:prstGeom prst="rect">
-            <a:avLst/>
-          </a:prstGeom>
-          <a:noFill/>
-        </p:spPr>
-        <p:txBody>
-          <a:bodyPr wrap="square" anchor="t" lIns="0" rIns="0" tIns="0" bIns="0">
-            <a:spAutoFit/>
-          </a:bodyPr>
-          <a:lstStyle/>
-          <a:p>
-            <a:pPr algn="l">
-              <a:lnSpc>
-                <a:spcPct val="128000"/>
-              </a:lnSpc>
-            </a:pPr>
-            <a:r>
-              <a:rPr sz="1300" b="0">
-                <a:solidFill>
-                  <a:srgbClr val="1C2A33"/>
+              <a:rPr sz="1250" b="1">
+                <a:solidFill>
+                  <a:srgbClr val="C8A86B"/>
                 </a:solidFill>
                 <a:latin typeface="楷体"/>
                 <a:ea typeface="楷体"/>
                 <a:cs typeface="楷体"/>
               </a:rPr>
-              <a:t>③ 关键细节：通讯员枪筒插树枝、衣服破洞、两个馒头——以小见大塑造人物。</a:t>
-            </a:r>
-          </a:p>
-        </p:txBody>
-      </p:sp>
-      <p:sp>
-        <p:nvSpPr>
-          <p:cNvPr id="14" name="TextBox 13"/>
+              <a:t> 找细节、看它出现几次、每次有何不同。</a:t>
+            </a:r>
+          </a:p>
+        </p:txBody>
+      </p:sp>
+      <p:sp>
+        <p:nvSpPr>
+          <p:cNvPr id="21" name="TextBox 20"/>
           <p:cNvSpPr txBox="1"/>
           <p:nvPr/>
         </p:nvSpPr>
@@ -5391,13 +6397,13 @@
             <a:r>
               <a:rPr sz="1300" b="1">
                 <a:solidFill>
-                  <a:srgbClr val="2E7D6B"/>
+                  <a:srgbClr val="B23A2A"/>
                 </a:solidFill>
                 <a:latin typeface="微软雅黑"/>
                 <a:ea typeface="微软雅黑"/>
                 <a:cs typeface="微软雅黑"/>
               </a:rPr>
-              <a:t>学习路径</a:t>
+              <a:t>方法 · 四步读法</a:t>
             </a:r>
           </a:p>
         </p:txBody>
@@ -5417,7 +6423,7 @@
             <a:avLst/>
           </a:prstGeom>
           <a:solidFill>
-            <a:srgbClr val="2E7D6B"/>
+            <a:srgbClr val="B23A2A"/>
           </a:solidFill>
           <a:ln>
             <a:noFill/>
@@ -5448,14 +6454,256 @@
       </p:sp>
       <p:sp>
         <p:nvSpPr>
-          <p:cNvPr id="5" name="Rounded Rectangle 4"/>
+          <p:cNvPr id="5" name="TextBox 4"/>
+          <p:cNvSpPr txBox="1"/>
+          <p:nvPr/>
+        </p:nvSpPr>
+        <p:spPr>
+          <a:xfrm>
+            <a:off x="640080" y="1325880"/>
+            <a:ext cx="10515600" cy="548640"/>
+          </a:xfrm>
+          <a:prstGeom prst="rect">
+            <a:avLst/>
+          </a:prstGeom>
+          <a:noFill/>
+        </p:spPr>
+        <p:txBody>
+          <a:bodyPr wrap="square" anchor="t" lIns="0" rIns="0" tIns="0" bIns="0">
+            <a:spAutoFit/>
+          </a:bodyPr>
+          <a:lstStyle/>
+          <a:p>
+            <a:pPr algn="l"/>
+            <a:r>
+              <a:rPr sz="2600" b="1">
+                <a:solidFill>
+                  <a:srgbClr val="1C2A33"/>
+                </a:solidFill>
+                <a:latin typeface="楷体"/>
+                <a:ea typeface="楷体"/>
+                <a:cs typeface="楷体"/>
+              </a:rPr>
+              <a:t>怎么读这篇小说</a:t>
+            </a:r>
+          </a:p>
+        </p:txBody>
+      </p:sp>
+      <p:sp>
+        <p:nvSpPr>
+          <p:cNvPr id="6" name="Rounded Rectangle 5"/>
           <p:cNvSpPr/>
           <p:nvPr/>
         </p:nvSpPr>
         <p:spPr>
           <a:xfrm>
-            <a:off x="640080" y="1371600"/>
-            <a:ext cx="10911535" cy="685800"/>
+            <a:off x="640080" y="2194560"/>
+            <a:ext cx="2453563" cy="3840480"/>
+          </a:xfrm>
+          <a:prstGeom prst="roundRect">
+            <a:avLst/>
+          </a:prstGeom>
+          <a:solidFill>
+            <a:srgbClr val="FFFFFF"/>
+          </a:solidFill>
+          <a:ln w="22860">
+            <a:solidFill>
+              <a:srgbClr val="B23A2A"/>
+            </a:solidFill>
+          </a:ln>
+          <a:effectLst/>
+        </p:spPr>
+        <p:style>
+          <a:lnRef idx="1">
+            <a:schemeClr val="accent1"/>
+          </a:lnRef>
+          <a:fillRef idx="3">
+            <a:schemeClr val="accent1"/>
+          </a:fillRef>
+          <a:effectRef idx="2">
+            <a:schemeClr val="accent1"/>
+          </a:effectRef>
+          <a:fontRef idx="minor">
+            <a:schemeClr val="lt1"/>
+          </a:fontRef>
+        </p:style>
+        <p:txBody>
+          <a:bodyPr rtlCol="0" anchor="ctr"/>
+          <a:lstStyle/>
+          <a:p>
+            <a:pPr algn="ctr"/>
+          </a:p>
+        </p:txBody>
+      </p:sp>
+      <p:sp>
+        <p:nvSpPr>
+          <p:cNvPr id="7" name="Oval 6"/>
+          <p:cNvSpPr/>
+          <p:nvPr/>
+        </p:nvSpPr>
+        <p:spPr>
+          <a:xfrm>
+            <a:off x="868680" y="2468880"/>
+            <a:ext cx="548640" cy="548640"/>
+          </a:xfrm>
+          <a:prstGeom prst="ellipse">
+            <a:avLst/>
+          </a:prstGeom>
+          <a:solidFill>
+            <a:srgbClr val="B23A2A"/>
+          </a:solidFill>
+          <a:ln>
+            <a:noFill/>
+          </a:ln>
+          <a:effectLst/>
+        </p:spPr>
+        <p:style>
+          <a:lnRef idx="1">
+            <a:schemeClr val="accent1"/>
+          </a:lnRef>
+          <a:fillRef idx="3">
+            <a:schemeClr val="accent1"/>
+          </a:fillRef>
+          <a:effectRef idx="2">
+            <a:schemeClr val="accent1"/>
+          </a:effectRef>
+          <a:fontRef idx="minor">
+            <a:schemeClr val="lt1"/>
+          </a:fontRef>
+        </p:style>
+        <p:txBody>
+          <a:bodyPr rtlCol="0" anchor="ctr"/>
+          <a:lstStyle/>
+          <a:p>
+            <a:pPr algn="ctr"/>
+          </a:p>
+        </p:txBody>
+      </p:sp>
+      <p:sp>
+        <p:nvSpPr>
+          <p:cNvPr id="8" name="TextBox 7"/>
+          <p:cNvSpPr txBox="1"/>
+          <p:nvPr/>
+        </p:nvSpPr>
+        <p:spPr>
+          <a:xfrm>
+            <a:off x="868680" y="2532888"/>
+            <a:ext cx="548640" cy="411480"/>
+          </a:xfrm>
+          <a:prstGeom prst="rect">
+            <a:avLst/>
+          </a:prstGeom>
+          <a:noFill/>
+        </p:spPr>
+        <p:txBody>
+          <a:bodyPr wrap="square" anchor="t" lIns="0" rIns="0" tIns="0" bIns="0">
+            <a:spAutoFit/>
+          </a:bodyPr>
+          <a:lstStyle/>
+          <a:p>
+            <a:pPr algn="ctr"/>
+            <a:r>
+              <a:rPr sz="2000" b="1">
+                <a:solidFill>
+                  <a:srgbClr val="FFFFFF"/>
+                </a:solidFill>
+                <a:latin typeface="微软雅黑"/>
+                <a:ea typeface="微软雅黑"/>
+                <a:cs typeface="微软雅黑"/>
+              </a:rPr>
+              <a:t>1</a:t>
+            </a:r>
+          </a:p>
+        </p:txBody>
+      </p:sp>
+      <p:sp>
+        <p:nvSpPr>
+          <p:cNvPr id="9" name="TextBox 8"/>
+          <p:cNvSpPr txBox="1"/>
+          <p:nvPr/>
+        </p:nvSpPr>
+        <p:spPr>
+          <a:xfrm>
+            <a:off x="914400" y="3154680"/>
+            <a:ext cx="1996363" cy="548640"/>
+          </a:xfrm>
+          <a:prstGeom prst="rect">
+            <a:avLst/>
+          </a:prstGeom>
+          <a:noFill/>
+        </p:spPr>
+        <p:txBody>
+          <a:bodyPr wrap="square" anchor="t" lIns="0" rIns="0" tIns="0" bIns="0">
+            <a:spAutoFit/>
+          </a:bodyPr>
+          <a:lstStyle/>
+          <a:p>
+            <a:pPr algn="l"/>
+            <a:r>
+              <a:rPr sz="1800" b="1">
+                <a:solidFill>
+                  <a:srgbClr val="B23A2A"/>
+                </a:solidFill>
+                <a:latin typeface="楷体"/>
+                <a:ea typeface="楷体"/>
+                <a:cs typeface="楷体"/>
+              </a:rPr>
+              <a:t>细读法</a:t>
+            </a:r>
+          </a:p>
+        </p:txBody>
+      </p:sp>
+      <p:sp>
+        <p:nvSpPr>
+          <p:cNvPr id="10" name="TextBox 9"/>
+          <p:cNvSpPr txBox="1"/>
+          <p:nvPr/>
+        </p:nvSpPr>
+        <p:spPr>
+          <a:xfrm>
+            <a:off x="914400" y="3794760"/>
+            <a:ext cx="1904923" cy="2011680"/>
+          </a:xfrm>
+          <a:prstGeom prst="rect">
+            <a:avLst/>
+          </a:prstGeom>
+          <a:noFill/>
+        </p:spPr>
+        <p:txBody>
+          <a:bodyPr wrap="square" anchor="t" lIns="0" rIns="0" tIns="0" bIns="0">
+            <a:spAutoFit/>
+          </a:bodyPr>
+          <a:lstStyle/>
+          <a:p>
+            <a:pPr algn="l">
+              <a:lnSpc>
+                <a:spcPct val="155000"/>
+              </a:lnSpc>
+            </a:pPr>
+            <a:r>
+              <a:rPr sz="1350" b="0">
+                <a:solidFill>
+                  <a:srgbClr val="1C2A33"/>
+                </a:solidFill>
+                <a:latin typeface="楷体"/>
+                <a:ea typeface="楷体"/>
+                <a:cs typeface="楷体"/>
+              </a:rPr>
+              <a:t>聚焦关键段落（借被子 / 牺牲 / 盖被子），逐句品味细节。</a:t>
+            </a:r>
+          </a:p>
+        </p:txBody>
+      </p:sp>
+      <p:sp>
+        <p:nvSpPr>
+          <p:cNvPr id="11" name="Rounded Rectangle 10"/>
+          <p:cNvSpPr/>
+          <p:nvPr/>
+        </p:nvSpPr>
+        <p:spPr>
+          <a:xfrm>
+            <a:off x="3459403" y="2194560"/>
+            <a:ext cx="2453563" cy="3840480"/>
           </a:xfrm>
           <a:prstGeom prst="roundRect">
             <a:avLst/>
@@ -5494,14 +6742,14 @@
       </p:sp>
       <p:sp>
         <p:nvSpPr>
-          <p:cNvPr id="6" name="Oval 5"/>
+          <p:cNvPr id="12" name="Oval 11"/>
           <p:cNvSpPr/>
           <p:nvPr/>
         </p:nvSpPr>
         <p:spPr>
           <a:xfrm>
-            <a:off x="804672" y="1536192"/>
-            <a:ext cx="457200" cy="457200"/>
+            <a:off x="3688003" y="2468880"/>
+            <a:ext cx="548640" cy="548640"/>
           </a:xfrm>
           <a:prstGeom prst="ellipse">
             <a:avLst/>
@@ -5538,14 +6786,14 @@
       </p:sp>
       <p:sp>
         <p:nvSpPr>
-          <p:cNvPr id="7" name="TextBox 6"/>
+          <p:cNvPr id="13" name="TextBox 12"/>
           <p:cNvSpPr txBox="1"/>
           <p:nvPr/>
         </p:nvSpPr>
         <p:spPr>
           <a:xfrm>
-            <a:off x="804672" y="1591056"/>
-            <a:ext cx="457200" cy="384048"/>
+            <a:off x="3688003" y="2532888"/>
+            <a:ext cx="548640" cy="411480"/>
           </a:xfrm>
           <a:prstGeom prst="rect">
             <a:avLst/>
@@ -5560,7 +6808,7 @@
           <a:p>
             <a:pPr algn="ctr"/>
             <a:r>
-              <a:rPr sz="1600" b="1">
+              <a:rPr sz="2000" b="1">
                 <a:solidFill>
                   <a:srgbClr val="FFFFFF"/>
                 </a:solidFill>
@@ -5568,21 +6816,21 @@
                 <a:ea typeface="微软雅黑"/>
                 <a:cs typeface="微软雅黑"/>
               </a:rPr>
-              <a:t>1</a:t>
-            </a:r>
-          </a:p>
-        </p:txBody>
-      </p:sp>
-      <p:sp>
-        <p:nvSpPr>
-          <p:cNvPr id="8" name="TextBox 7"/>
+              <a:t>2</a:t>
+            </a:r>
+          </a:p>
+        </p:txBody>
+      </p:sp>
+      <p:sp>
+        <p:nvSpPr>
+          <p:cNvPr id="14" name="TextBox 13"/>
           <p:cNvSpPr txBox="1"/>
           <p:nvPr/>
         </p:nvSpPr>
         <p:spPr>
           <a:xfrm>
-            <a:off x="1371600" y="1481328"/>
-            <a:ext cx="9997135" cy="484632"/>
+            <a:off x="3733723" y="3154680"/>
+            <a:ext cx="1996363" cy="548640"/>
           </a:xfrm>
           <a:prstGeom prst="rect">
             <a:avLst/>
@@ -5595,35 +6843,72 @@
           </a:bodyPr>
           <a:lstStyle/>
           <a:p>
+            <a:pPr algn="l"/>
+            <a:r>
+              <a:rPr sz="1800" b="1">
+                <a:solidFill>
+                  <a:srgbClr val="2E7D6B"/>
+                </a:solidFill>
+                <a:latin typeface="楷体"/>
+                <a:ea typeface="楷体"/>
+                <a:cs typeface="楷体"/>
+              </a:rPr>
+              <a:t>意象追踪法</a:t>
+            </a:r>
+          </a:p>
+        </p:txBody>
+      </p:sp>
+      <p:sp>
+        <p:nvSpPr>
+          <p:cNvPr id="15" name="TextBox 14"/>
+          <p:cNvSpPr txBox="1"/>
+          <p:nvPr/>
+        </p:nvSpPr>
+        <p:spPr>
+          <a:xfrm>
+            <a:off x="3733723" y="3794760"/>
+            <a:ext cx="1904923" cy="2011680"/>
+          </a:xfrm>
+          <a:prstGeom prst="rect">
+            <a:avLst/>
+          </a:prstGeom>
+          <a:noFill/>
+        </p:spPr>
+        <p:txBody>
+          <a:bodyPr wrap="square" anchor="t" lIns="0" rIns="0" tIns="0" bIns="0">
+            <a:spAutoFit/>
+          </a:bodyPr>
+          <a:lstStyle/>
+          <a:p>
             <a:pPr algn="l">
               <a:lnSpc>
-                <a:spcPct val="110000"/>
+                <a:spcPct val="155000"/>
               </a:lnSpc>
             </a:pPr>
             <a:r>
-              <a:rPr sz="1600" b="1">
+              <a:rPr sz="1350" b="0">
                 <a:solidFill>
                   <a:srgbClr val="1C2A33"/>
                 </a:solidFill>
-                <a:latin typeface="微软雅黑"/>
-                <a:ea typeface="微软雅黑"/>
-                <a:cs typeface="微软雅黑"/>
-              </a:rPr>
-              <a:t>Step 1 导入</a:t>
-            </a:r>
-          </a:p>
-        </p:txBody>
-      </p:sp>
-      <p:sp>
-        <p:nvSpPr>
-          <p:cNvPr id="9" name="Rounded Rectangle 8"/>
+                <a:latin typeface="楷体"/>
+                <a:ea typeface="楷体"/>
+                <a:cs typeface="楷体"/>
+              </a:rPr>
+              <a:t>画「百合花被子」的演变线索图，看意象怎么随情节走。</a:t>
+            </a:r>
+          </a:p>
+        </p:txBody>
+      </p:sp>
+      <p:sp>
+        <p:nvSpPr>
+          <p:cNvPr id="16" name="Rounded Rectangle 15"/>
           <p:cNvSpPr/>
           <p:nvPr/>
         </p:nvSpPr>
         <p:spPr>
           <a:xfrm>
-            <a:off x="640080" y="2194560"/>
-            <a:ext cx="10911535" cy="685800"/>
+            <a:off x="6278727" y="2194560"/>
+            <a:ext cx="2453563" cy="3840480"/>
           </a:xfrm>
           <a:prstGeom prst="roundRect">
             <a:avLst/>
@@ -5633,7 +6918,7 @@
           </a:solidFill>
           <a:ln w="22860">
             <a:solidFill>
-              <a:srgbClr val="2E7D6B"/>
+              <a:srgbClr val="C8A86B"/>
             </a:solidFill>
           </a:ln>
           <a:effectLst/>
@@ -5662,20 +6947,20 @@
       </p:sp>
       <p:sp>
         <p:nvSpPr>
-          <p:cNvPr id="10" name="Oval 9"/>
+          <p:cNvPr id="17" name="Oval 16"/>
           <p:cNvSpPr/>
           <p:nvPr/>
         </p:nvSpPr>
         <p:spPr>
           <a:xfrm>
-            <a:off x="804672" y="2359152"/>
-            <a:ext cx="457200" cy="457200"/>
+            <a:off x="6507327" y="2468880"/>
+            <a:ext cx="548640" cy="548640"/>
           </a:xfrm>
           <a:prstGeom prst="ellipse">
             <a:avLst/>
           </a:prstGeom>
           <a:solidFill>
-            <a:srgbClr val="2E7D6B"/>
+            <a:srgbClr val="C8A86B"/>
           </a:solidFill>
           <a:ln>
             <a:noFill/>
@@ -5706,14 +6991,14 @@
       </p:sp>
       <p:sp>
         <p:nvSpPr>
-          <p:cNvPr id="11" name="TextBox 10"/>
+          <p:cNvPr id="18" name="TextBox 17"/>
           <p:cNvSpPr txBox="1"/>
           <p:nvPr/>
         </p:nvSpPr>
         <p:spPr>
           <a:xfrm>
-            <a:off x="804672" y="2414016"/>
-            <a:ext cx="457200" cy="384048"/>
+            <a:off x="6507327" y="2532888"/>
+            <a:ext cx="548640" cy="411480"/>
           </a:xfrm>
           <a:prstGeom prst="rect">
             <a:avLst/>
@@ -5728,7 +7013,7 @@
           <a:p>
             <a:pPr algn="ctr"/>
             <a:r>
-              <a:rPr sz="1600" b="1">
+              <a:rPr sz="2000" b="1">
                 <a:solidFill>
                   <a:srgbClr val="FFFFFF"/>
                 </a:solidFill>
@@ -5736,21 +7021,21 @@
                 <a:ea typeface="微软雅黑"/>
                 <a:cs typeface="微软雅黑"/>
               </a:rPr>
-              <a:t>2</a:t>
-            </a:r>
-          </a:p>
-        </p:txBody>
-      </p:sp>
-      <p:sp>
-        <p:nvSpPr>
-          <p:cNvPr id="12" name="TextBox 11"/>
+              <a:t>3</a:t>
+            </a:r>
+          </a:p>
+        </p:txBody>
+      </p:sp>
+      <p:sp>
+        <p:nvSpPr>
+          <p:cNvPr id="19" name="TextBox 18"/>
           <p:cNvSpPr txBox="1"/>
           <p:nvPr/>
         </p:nvSpPr>
         <p:spPr>
           <a:xfrm>
-            <a:off x="1371600" y="2304288"/>
-            <a:ext cx="9997135" cy="484632"/>
+            <a:off x="6553047" y="3154680"/>
+            <a:ext cx="1996363" cy="548640"/>
           </a:xfrm>
           <a:prstGeom prst="rect">
             <a:avLst/>
@@ -5763,35 +7048,72 @@
           </a:bodyPr>
           <a:lstStyle/>
           <a:p>
+            <a:pPr algn="l"/>
+            <a:r>
+              <a:rPr sz="1800" b="1">
+                <a:solidFill>
+                  <a:srgbClr val="C8A86B"/>
+                </a:solidFill>
+                <a:latin typeface="楷体"/>
+                <a:ea typeface="楷体"/>
+                <a:cs typeface="楷体"/>
+              </a:rPr>
+              <a:t>角色分析法</a:t>
+            </a:r>
+          </a:p>
+        </p:txBody>
+      </p:sp>
+      <p:sp>
+        <p:nvSpPr>
+          <p:cNvPr id="20" name="TextBox 19"/>
+          <p:cNvSpPr txBox="1"/>
+          <p:nvPr/>
+        </p:nvSpPr>
+        <p:spPr>
+          <a:xfrm>
+            <a:off x="6553047" y="3794760"/>
+            <a:ext cx="1904923" cy="2011680"/>
+          </a:xfrm>
+          <a:prstGeom prst="rect">
+            <a:avLst/>
+          </a:prstGeom>
+          <a:noFill/>
+        </p:spPr>
+        <p:txBody>
+          <a:bodyPr wrap="square" anchor="t" lIns="0" rIns="0" tIns="0" bIns="0">
+            <a:spAutoFit/>
+          </a:bodyPr>
+          <a:lstStyle/>
+          <a:p>
             <a:pPr algn="l">
               <a:lnSpc>
-                <a:spcPct val="110000"/>
+                <a:spcPct val="155000"/>
               </a:lnSpc>
             </a:pPr>
             <a:r>
-              <a:rPr sz="1600" b="1">
+              <a:rPr sz="1350" b="0">
                 <a:solidFill>
                   <a:srgbClr val="1C2A33"/>
                 </a:solidFill>
-                <a:latin typeface="微软雅黑"/>
-                <a:ea typeface="微软雅黑"/>
-                <a:cs typeface="微软雅黑"/>
-              </a:rPr>
-              <a:t>Step 2 情节梳理</a:t>
-            </a:r>
-          </a:p>
-        </p:txBody>
-      </p:sp>
-      <p:sp>
-        <p:nvSpPr>
-          <p:cNvPr id="13" name="Rounded Rectangle 12"/>
+                <a:latin typeface="楷体"/>
+                <a:ea typeface="楷体"/>
+                <a:cs typeface="楷体"/>
+              </a:rPr>
+              <a:t>从言行细节推导人物性格（小通讯员的腼腆 / 新媳妇的转变）。</a:t>
+            </a:r>
+          </a:p>
+        </p:txBody>
+      </p:sp>
+      <p:sp>
+        <p:nvSpPr>
+          <p:cNvPr id="21" name="Rounded Rectangle 20"/>
           <p:cNvSpPr/>
           <p:nvPr/>
         </p:nvSpPr>
         <p:spPr>
           <a:xfrm>
-            <a:off x="640080" y="3017520"/>
-            <a:ext cx="10911535" cy="685800"/>
+            <a:off x="9098051" y="2194560"/>
+            <a:ext cx="2453563" cy="3840480"/>
           </a:xfrm>
           <a:prstGeom prst="roundRect">
             <a:avLst/>
@@ -5801,7 +7123,7 @@
           </a:solidFill>
           <a:ln w="22860">
             <a:solidFill>
-              <a:srgbClr val="2E7D6B"/>
+              <a:srgbClr val="6B6258"/>
             </a:solidFill>
           </a:ln>
           <a:effectLst/>
@@ -5830,20 +7152,20 @@
       </p:sp>
       <p:sp>
         <p:nvSpPr>
-          <p:cNvPr id="14" name="Oval 13"/>
+          <p:cNvPr id="22" name="Oval 21"/>
           <p:cNvSpPr/>
           <p:nvPr/>
         </p:nvSpPr>
         <p:spPr>
           <a:xfrm>
-            <a:off x="804672" y="3182112"/>
-            <a:ext cx="457200" cy="457200"/>
+            <a:off x="9326651" y="2468880"/>
+            <a:ext cx="548640" cy="548640"/>
           </a:xfrm>
           <a:prstGeom prst="ellipse">
             <a:avLst/>
           </a:prstGeom>
           <a:solidFill>
-            <a:srgbClr val="2E7D6B"/>
+            <a:srgbClr val="6B6258"/>
           </a:solidFill>
           <a:ln>
             <a:noFill/>
@@ -5874,14 +7196,14 @@
       </p:sp>
       <p:sp>
         <p:nvSpPr>
-          <p:cNvPr id="15" name="TextBox 14"/>
+          <p:cNvPr id="23" name="TextBox 22"/>
           <p:cNvSpPr txBox="1"/>
           <p:nvPr/>
         </p:nvSpPr>
         <p:spPr>
           <a:xfrm>
-            <a:off x="804672" y="3236976"/>
-            <a:ext cx="457200" cy="384048"/>
+            <a:off x="9326651" y="2532888"/>
+            <a:ext cx="548640" cy="411480"/>
           </a:xfrm>
           <a:prstGeom prst="rect">
             <a:avLst/>
@@ -5896,7 +7218,7 @@
           <a:p>
             <a:pPr algn="ctr"/>
             <a:r>
-              <a:rPr sz="1600" b="1">
+              <a:rPr sz="2000" b="1">
                 <a:solidFill>
                   <a:srgbClr val="FFFFFF"/>
                 </a:solidFill>
@@ -5904,21 +7226,21 @@
                 <a:ea typeface="微软雅黑"/>
                 <a:cs typeface="微软雅黑"/>
               </a:rPr>
-              <a:t>3</a:t>
-            </a:r>
-          </a:p>
-        </p:txBody>
-      </p:sp>
-      <p:sp>
-        <p:nvSpPr>
-          <p:cNvPr id="16" name="TextBox 15"/>
+              <a:t>4</a:t>
+            </a:r>
+          </a:p>
+        </p:txBody>
+      </p:sp>
+      <p:sp>
+        <p:nvSpPr>
+          <p:cNvPr id="24" name="TextBox 23"/>
           <p:cNvSpPr txBox="1"/>
           <p:nvPr/>
         </p:nvSpPr>
         <p:spPr>
           <a:xfrm>
-            <a:off x="1371600" y="3127248"/>
-            <a:ext cx="9997135" cy="484632"/>
+            <a:off x="9372371" y="3154680"/>
+            <a:ext cx="1996363" cy="548640"/>
           </a:xfrm>
           <a:prstGeom prst="rect">
             <a:avLst/>
@@ -5931,125 +7253,31 @@
           </a:bodyPr>
           <a:lstStyle/>
           <a:p>
-            <a:pPr algn="l">
-              <a:lnSpc>
-                <a:spcPct val="110000"/>
-              </a:lnSpc>
-            </a:pPr>
-            <a:r>
-              <a:rPr sz="1600" b="1">
-                <a:solidFill>
-                  <a:srgbClr val="1C2A33"/>
-                </a:solidFill>
-                <a:latin typeface="微软雅黑"/>
-                <a:ea typeface="微软雅黑"/>
-                <a:cs typeface="微软雅黑"/>
-              </a:rPr>
-              <a:t>Step 3 意象追踪</a:t>
-            </a:r>
-          </a:p>
-        </p:txBody>
-      </p:sp>
-      <p:sp>
-        <p:nvSpPr>
-          <p:cNvPr id="17" name="Rounded Rectangle 16"/>
-          <p:cNvSpPr/>
-          <p:nvPr/>
-        </p:nvSpPr>
-        <p:spPr>
-          <a:xfrm>
-            <a:off x="640080" y="3840480"/>
-            <a:ext cx="10911535" cy="685800"/>
-          </a:xfrm>
-          <a:prstGeom prst="roundRect">
-            <a:avLst/>
-          </a:prstGeom>
-          <a:solidFill>
-            <a:srgbClr val="FFFFFF"/>
-          </a:solidFill>
-          <a:ln w="22860">
-            <a:solidFill>
-              <a:srgbClr val="2E7D6B"/>
-            </a:solidFill>
-          </a:ln>
-          <a:effectLst/>
-        </p:spPr>
-        <p:style>
-          <a:lnRef idx="1">
-            <a:schemeClr val="accent1"/>
-          </a:lnRef>
-          <a:fillRef idx="3">
-            <a:schemeClr val="accent1"/>
-          </a:fillRef>
-          <a:effectRef idx="2">
-            <a:schemeClr val="accent1"/>
-          </a:effectRef>
-          <a:fontRef idx="minor">
-            <a:schemeClr val="lt1"/>
-          </a:fontRef>
-        </p:style>
-        <p:txBody>
-          <a:bodyPr rtlCol="0" anchor="ctr"/>
-          <a:lstStyle/>
-          <a:p>
-            <a:pPr algn="ctr"/>
-          </a:p>
-        </p:txBody>
-      </p:sp>
-      <p:sp>
-        <p:nvSpPr>
-          <p:cNvPr id="18" name="Oval 17"/>
-          <p:cNvSpPr/>
-          <p:nvPr/>
-        </p:nvSpPr>
-        <p:spPr>
-          <a:xfrm>
-            <a:off x="804672" y="4005072"/>
-            <a:ext cx="457200" cy="457200"/>
-          </a:xfrm>
-          <a:prstGeom prst="ellipse">
-            <a:avLst/>
-          </a:prstGeom>
-          <a:solidFill>
-            <a:srgbClr val="2E7D6B"/>
-          </a:solidFill>
-          <a:ln>
-            <a:noFill/>
-          </a:ln>
-          <a:effectLst/>
-        </p:spPr>
-        <p:style>
-          <a:lnRef idx="1">
-            <a:schemeClr val="accent1"/>
-          </a:lnRef>
-          <a:fillRef idx="3">
-            <a:schemeClr val="accent1"/>
-          </a:fillRef>
-          <a:effectRef idx="2">
-            <a:schemeClr val="accent1"/>
-          </a:effectRef>
-          <a:fontRef idx="minor">
-            <a:schemeClr val="lt1"/>
-          </a:fontRef>
-        </p:style>
-        <p:txBody>
-          <a:bodyPr rtlCol="0" anchor="ctr"/>
-          <a:lstStyle/>
-          <a:p>
-            <a:pPr algn="ctr"/>
-          </a:p>
-        </p:txBody>
-      </p:sp>
-      <p:sp>
-        <p:nvSpPr>
-          <p:cNvPr id="19" name="TextBox 18"/>
+            <a:pPr algn="l"/>
+            <a:r>
+              <a:rPr sz="1800" b="1">
+                <a:solidFill>
+                  <a:srgbClr val="6B6258"/>
+                </a:solidFill>
+                <a:latin typeface="楷体"/>
+                <a:ea typeface="楷体"/>
+                <a:cs typeface="楷体"/>
+              </a:rPr>
+              <a:t>比较法</a:t>
+            </a:r>
+          </a:p>
+        </p:txBody>
+      </p:sp>
+      <p:sp>
+        <p:nvSpPr>
+          <p:cNvPr id="25" name="TextBox 24"/>
           <p:cNvSpPr txBox="1"/>
           <p:nvPr/>
         </p:nvSpPr>
         <p:spPr>
           <a:xfrm>
-            <a:off x="804672" y="4059936"/>
-            <a:ext cx="457200" cy="384048"/>
+            <a:off x="9372371" y="3794760"/>
+            <a:ext cx="1904923" cy="2011680"/>
           </a:xfrm>
           <a:prstGeom prst="rect">
             <a:avLst/>
@@ -6062,401 +7290,28 @@
           </a:bodyPr>
           <a:lstStyle/>
           <a:p>
-            <a:pPr algn="ctr"/>
-            <a:r>
-              <a:rPr sz="1600" b="1">
-                <a:solidFill>
-                  <a:srgbClr val="FFFFFF"/>
-                </a:solidFill>
-                <a:latin typeface="微软雅黑"/>
-                <a:ea typeface="微软雅黑"/>
-                <a:cs typeface="微软雅黑"/>
-              </a:rPr>
-              <a:t>4</a:t>
-            </a:r>
-          </a:p>
-        </p:txBody>
-      </p:sp>
-      <p:sp>
-        <p:nvSpPr>
-          <p:cNvPr id="20" name="TextBox 19"/>
-          <p:cNvSpPr txBox="1"/>
-          <p:nvPr/>
-        </p:nvSpPr>
-        <p:spPr>
-          <a:xfrm>
-            <a:off x="1371600" y="3950208"/>
-            <a:ext cx="9997135" cy="484632"/>
-          </a:xfrm>
-          <a:prstGeom prst="rect">
-            <a:avLst/>
-          </a:prstGeom>
-          <a:noFill/>
-        </p:spPr>
-        <p:txBody>
-          <a:bodyPr wrap="square" anchor="t" lIns="0" rIns="0" tIns="0" bIns="0">
-            <a:spAutoFit/>
-          </a:bodyPr>
-          <a:lstStyle/>
-          <a:p>
             <a:pPr algn="l">
               <a:lnSpc>
-                <a:spcPct val="110000"/>
+                <a:spcPct val="155000"/>
               </a:lnSpc>
             </a:pPr>
             <a:r>
-              <a:rPr sz="1600" b="1">
+              <a:rPr sz="1350" b="0">
                 <a:solidFill>
                   <a:srgbClr val="1C2A33"/>
                 </a:solidFill>
-                <a:latin typeface="微软雅黑"/>
-                <a:ea typeface="微软雅黑"/>
-                <a:cs typeface="微软雅黑"/>
-              </a:rPr>
-              <a:t>Step 4 细读细节</a:t>
-            </a:r>
-          </a:p>
-        </p:txBody>
-      </p:sp>
-      <p:sp>
-        <p:nvSpPr>
-          <p:cNvPr id="21" name="Rounded Rectangle 20"/>
-          <p:cNvSpPr/>
-          <p:nvPr/>
-        </p:nvSpPr>
-        <p:spPr>
-          <a:xfrm>
-            <a:off x="640080" y="4663440"/>
-            <a:ext cx="10911535" cy="685800"/>
-          </a:xfrm>
-          <a:prstGeom prst="roundRect">
-            <a:avLst/>
-          </a:prstGeom>
-          <a:solidFill>
-            <a:srgbClr val="FFFFFF"/>
-          </a:solidFill>
-          <a:ln w="22860">
-            <a:solidFill>
-              <a:srgbClr val="2E7D6B"/>
-            </a:solidFill>
-          </a:ln>
-          <a:effectLst/>
-        </p:spPr>
-        <p:style>
-          <a:lnRef idx="1">
-            <a:schemeClr val="accent1"/>
-          </a:lnRef>
-          <a:fillRef idx="3">
-            <a:schemeClr val="accent1"/>
-          </a:fillRef>
-          <a:effectRef idx="2">
-            <a:schemeClr val="accent1"/>
-          </a:effectRef>
-          <a:fontRef idx="minor">
-            <a:schemeClr val="lt1"/>
-          </a:fontRef>
-        </p:style>
-        <p:txBody>
-          <a:bodyPr rtlCol="0" anchor="ctr"/>
-          <a:lstStyle/>
-          <a:p>
-            <a:pPr algn="ctr"/>
-          </a:p>
-        </p:txBody>
-      </p:sp>
-      <p:sp>
-        <p:nvSpPr>
-          <p:cNvPr id="22" name="Oval 21"/>
-          <p:cNvSpPr/>
-          <p:nvPr/>
-        </p:nvSpPr>
-        <p:spPr>
-          <a:xfrm>
-            <a:off x="804672" y="4828032"/>
-            <a:ext cx="457200" cy="457200"/>
-          </a:xfrm>
-          <a:prstGeom prst="ellipse">
-            <a:avLst/>
-          </a:prstGeom>
-          <a:solidFill>
-            <a:srgbClr val="2E7D6B"/>
-          </a:solidFill>
-          <a:ln>
-            <a:noFill/>
-          </a:ln>
-          <a:effectLst/>
-        </p:spPr>
-        <p:style>
-          <a:lnRef idx="1">
-            <a:schemeClr val="accent1"/>
-          </a:lnRef>
-          <a:fillRef idx="3">
-            <a:schemeClr val="accent1"/>
-          </a:fillRef>
-          <a:effectRef idx="2">
-            <a:schemeClr val="accent1"/>
-          </a:effectRef>
-          <a:fontRef idx="minor">
-            <a:schemeClr val="lt1"/>
-          </a:fontRef>
-        </p:style>
-        <p:txBody>
-          <a:bodyPr rtlCol="0" anchor="ctr"/>
-          <a:lstStyle/>
-          <a:p>
-            <a:pPr algn="ctr"/>
-          </a:p>
-        </p:txBody>
-      </p:sp>
-      <p:sp>
-        <p:nvSpPr>
-          <p:cNvPr id="23" name="TextBox 22"/>
-          <p:cNvSpPr txBox="1"/>
-          <p:nvPr/>
-        </p:nvSpPr>
-        <p:spPr>
-          <a:xfrm>
-            <a:off x="804672" y="4882896"/>
-            <a:ext cx="457200" cy="384048"/>
-          </a:xfrm>
-          <a:prstGeom prst="rect">
-            <a:avLst/>
-          </a:prstGeom>
-          <a:noFill/>
-        </p:spPr>
-        <p:txBody>
-          <a:bodyPr wrap="square" anchor="t" lIns="0" rIns="0" tIns="0" bIns="0">
-            <a:spAutoFit/>
-          </a:bodyPr>
-          <a:lstStyle/>
-          <a:p>
-            <a:pPr algn="ctr"/>
-            <a:r>
-              <a:rPr sz="1600" b="1">
-                <a:solidFill>
-                  <a:srgbClr val="FFFFFF"/>
-                </a:solidFill>
-                <a:latin typeface="微软雅黑"/>
-                <a:ea typeface="微软雅黑"/>
-                <a:cs typeface="微软雅黑"/>
-              </a:rPr>
-              <a:t>5</a:t>
-            </a:r>
-          </a:p>
-        </p:txBody>
-      </p:sp>
-      <p:sp>
-        <p:nvSpPr>
-          <p:cNvPr id="24" name="TextBox 23"/>
-          <p:cNvSpPr txBox="1"/>
-          <p:nvPr/>
-        </p:nvSpPr>
-        <p:spPr>
-          <a:xfrm>
-            <a:off x="1371600" y="4773168"/>
-            <a:ext cx="9997135" cy="484632"/>
-          </a:xfrm>
-          <a:prstGeom prst="rect">
-            <a:avLst/>
-          </a:prstGeom>
-          <a:noFill/>
-        </p:spPr>
-        <p:txBody>
-          <a:bodyPr wrap="square" anchor="t" lIns="0" rIns="0" tIns="0" bIns="0">
-            <a:spAutoFit/>
-          </a:bodyPr>
-          <a:lstStyle/>
-          <a:p>
-            <a:pPr algn="l">
-              <a:lnSpc>
-                <a:spcPct val="110000"/>
-              </a:lnSpc>
-            </a:pPr>
-            <a:r>
-              <a:rPr sz="1400" b="1">
-                <a:solidFill>
-                  <a:srgbClr val="1C2A33"/>
-                </a:solidFill>
-                <a:latin typeface="微软雅黑"/>
-                <a:ea typeface="微软雅黑"/>
-                <a:cs typeface="微软雅黑"/>
-              </a:rPr>
-              <a:t>Step 5 限知视角辨析</a:t>
-            </a:r>
-          </a:p>
-        </p:txBody>
-      </p:sp>
-      <p:sp>
-        <p:nvSpPr>
-          <p:cNvPr id="25" name="Rounded Rectangle 24"/>
-          <p:cNvSpPr/>
-          <p:nvPr/>
-        </p:nvSpPr>
-        <p:spPr>
-          <a:xfrm>
-            <a:off x="640080" y="5486400"/>
-            <a:ext cx="10911535" cy="685800"/>
-          </a:xfrm>
-          <a:prstGeom prst="roundRect">
-            <a:avLst/>
-          </a:prstGeom>
-          <a:solidFill>
-            <a:srgbClr val="FFFFFF"/>
-          </a:solidFill>
-          <a:ln w="22860">
-            <a:solidFill>
-              <a:srgbClr val="2E7D6B"/>
-            </a:solidFill>
-          </a:ln>
-          <a:effectLst/>
-        </p:spPr>
-        <p:style>
-          <a:lnRef idx="1">
-            <a:schemeClr val="accent1"/>
-          </a:lnRef>
-          <a:fillRef idx="3">
-            <a:schemeClr val="accent1"/>
-          </a:fillRef>
-          <a:effectRef idx="2">
-            <a:schemeClr val="accent1"/>
-          </a:effectRef>
-          <a:fontRef idx="minor">
-            <a:schemeClr val="lt1"/>
-          </a:fontRef>
-        </p:style>
-        <p:txBody>
-          <a:bodyPr rtlCol="0" anchor="ctr"/>
-          <a:lstStyle/>
-          <a:p>
-            <a:pPr algn="ctr"/>
-          </a:p>
-        </p:txBody>
-      </p:sp>
-      <p:sp>
-        <p:nvSpPr>
-          <p:cNvPr id="26" name="Oval 25"/>
-          <p:cNvSpPr/>
-          <p:nvPr/>
-        </p:nvSpPr>
-        <p:spPr>
-          <a:xfrm>
-            <a:off x="804672" y="5650992"/>
-            <a:ext cx="457200" cy="457200"/>
-          </a:xfrm>
-          <a:prstGeom prst="ellipse">
-            <a:avLst/>
-          </a:prstGeom>
-          <a:solidFill>
-            <a:srgbClr val="2E7D6B"/>
-          </a:solidFill>
-          <a:ln>
-            <a:noFill/>
-          </a:ln>
-          <a:effectLst/>
-        </p:spPr>
-        <p:style>
-          <a:lnRef idx="1">
-            <a:schemeClr val="accent1"/>
-          </a:lnRef>
-          <a:fillRef idx="3">
-            <a:schemeClr val="accent1"/>
-          </a:fillRef>
-          <a:effectRef idx="2">
-            <a:schemeClr val="accent1"/>
-          </a:effectRef>
-          <a:fontRef idx="minor">
-            <a:schemeClr val="lt1"/>
-          </a:fontRef>
-        </p:style>
-        <p:txBody>
-          <a:bodyPr rtlCol="0" anchor="ctr"/>
-          <a:lstStyle/>
-          <a:p>
-            <a:pPr algn="ctr"/>
-          </a:p>
-        </p:txBody>
-      </p:sp>
-      <p:sp>
-        <p:nvSpPr>
-          <p:cNvPr id="27" name="TextBox 26"/>
-          <p:cNvSpPr txBox="1"/>
-          <p:nvPr/>
-        </p:nvSpPr>
-        <p:spPr>
-          <a:xfrm>
-            <a:off x="804672" y="5705856"/>
-            <a:ext cx="457200" cy="384048"/>
-          </a:xfrm>
-          <a:prstGeom prst="rect">
-            <a:avLst/>
-          </a:prstGeom>
-          <a:noFill/>
-        </p:spPr>
-        <p:txBody>
-          <a:bodyPr wrap="square" anchor="t" lIns="0" rIns="0" tIns="0" bIns="0">
-            <a:spAutoFit/>
-          </a:bodyPr>
-          <a:lstStyle/>
-          <a:p>
-            <a:pPr algn="ctr"/>
-            <a:r>
-              <a:rPr sz="1600" b="1">
-                <a:solidFill>
-                  <a:srgbClr val="FFFFFF"/>
-                </a:solidFill>
-                <a:latin typeface="微软雅黑"/>
-                <a:ea typeface="微软雅黑"/>
-                <a:cs typeface="微软雅黑"/>
-              </a:rPr>
-              <a:t>6</a:t>
-            </a:r>
-          </a:p>
-        </p:txBody>
-      </p:sp>
-      <p:sp>
-        <p:nvSpPr>
-          <p:cNvPr id="28" name="TextBox 27"/>
-          <p:cNvSpPr txBox="1"/>
-          <p:nvPr/>
-        </p:nvSpPr>
-        <p:spPr>
-          <a:xfrm>
-            <a:off x="1371600" y="5596128"/>
-            <a:ext cx="9997135" cy="484632"/>
-          </a:xfrm>
-          <a:prstGeom prst="rect">
-            <a:avLst/>
-          </a:prstGeom>
-          <a:noFill/>
-        </p:spPr>
-        <p:txBody>
-          <a:bodyPr wrap="square" anchor="t" lIns="0" rIns="0" tIns="0" bIns="0">
-            <a:spAutoFit/>
-          </a:bodyPr>
-          <a:lstStyle/>
-          <a:p>
-            <a:pPr algn="l">
-              <a:lnSpc>
-                <a:spcPct val="110000"/>
-              </a:lnSpc>
-            </a:pPr>
-            <a:r>
-              <a:rPr sz="1600" b="1">
-                <a:solidFill>
-                  <a:srgbClr val="1C2A33"/>
-                </a:solidFill>
-                <a:latin typeface="微软雅黑"/>
-                <a:ea typeface="微软雅黑"/>
-                <a:cs typeface="微软雅黑"/>
-              </a:rPr>
-              <a:t>Step 6 小结+作业</a:t>
-            </a:r>
-          </a:p>
-        </p:txBody>
-      </p:sp>
-      <p:sp>
-        <p:nvSpPr>
-          <p:cNvPr id="29" name="TextBox 28"/>
+                <a:latin typeface="楷体"/>
+                <a:ea typeface="楷体"/>
+                <a:cs typeface="楷体"/>
+              </a:rPr>
+              <a:t>对比「限知视角」与「全知视角」的叙事差异与效果。</a:t>
+            </a:r>
+          </a:p>
+        </p:txBody>
+      </p:sp>
+      <p:sp>
+        <p:nvSpPr>
+          <p:cNvPr id="26" name="TextBox 25"/>
           <p:cNvSpPr txBox="1"/>
           <p:nvPr/>
         </p:nvSpPr>
@@ -6589,7 +7444,7 @@
                 <a:ea typeface="微软雅黑"/>
                 <a:cs typeface="微软雅黑"/>
               </a:rPr>
-              <a:t>易混易错</a:t>
+              <a:t>难点 · 怎么破</a:t>
             </a:r>
           </a:p>
         </p:txBody>
@@ -6640,14 +7495,51 @@
       </p:sp>
       <p:sp>
         <p:nvSpPr>
-          <p:cNvPr id="5" name="Rounded Rectangle 4"/>
+          <p:cNvPr id="5" name="TextBox 4"/>
+          <p:cNvSpPr txBox="1"/>
+          <p:nvPr/>
+        </p:nvSpPr>
+        <p:spPr>
+          <a:xfrm>
+            <a:off x="640080" y="1325880"/>
+            <a:ext cx="10058400" cy="548640"/>
+          </a:xfrm>
+          <a:prstGeom prst="rect">
+            <a:avLst/>
+          </a:prstGeom>
+          <a:noFill/>
+        </p:spPr>
+        <p:txBody>
+          <a:bodyPr wrap="square" anchor="t" lIns="0" rIns="0" tIns="0" bIns="0">
+            <a:spAutoFit/>
+          </a:bodyPr>
+          <a:lstStyle/>
+          <a:p>
+            <a:pPr algn="l"/>
+            <a:r>
+              <a:rPr sz="2600" b="1">
+                <a:solidFill>
+                  <a:srgbClr val="1C2A33"/>
+                </a:solidFill>
+                <a:latin typeface="楷体"/>
+                <a:ea typeface="楷体"/>
+                <a:cs typeface="楷体"/>
+              </a:rPr>
+              <a:t>三处容易卡住的地方</a:t>
+            </a:r>
+          </a:p>
+        </p:txBody>
+      </p:sp>
+      <p:sp>
+        <p:nvSpPr>
+          <p:cNvPr id="6" name="Rounded Rectangle 5"/>
           <p:cNvSpPr/>
           <p:nvPr/>
         </p:nvSpPr>
         <p:spPr>
           <a:xfrm>
-            <a:off x="640080" y="1417320"/>
-            <a:ext cx="5349240" cy="2057400"/>
+            <a:off x="640080" y="2194560"/>
+            <a:ext cx="3393338" cy="3840480"/>
           </a:xfrm>
           <a:prstGeom prst="roundRect">
             <a:avLst/>
@@ -6655,7 +7547,7 @@
           <a:solidFill>
             <a:srgbClr val="FFFFFF"/>
           </a:solidFill>
-          <a:ln w="22860">
+          <a:ln w="20320">
             <a:solidFill>
               <a:srgbClr val="B23A2A"/>
             </a:solidFill>
@@ -6686,14 +7578,14 @@
       </p:sp>
       <p:sp>
         <p:nvSpPr>
-          <p:cNvPr id="6" name="Oval 5"/>
+          <p:cNvPr id="7" name="Oval 6"/>
           <p:cNvSpPr/>
           <p:nvPr/>
         </p:nvSpPr>
         <p:spPr>
           <a:xfrm>
-            <a:off x="804672" y="1581912"/>
-            <a:ext cx="457200" cy="457200"/>
+            <a:off x="868680" y="2423160"/>
+            <a:ext cx="548640" cy="548640"/>
           </a:xfrm>
           <a:prstGeom prst="ellipse">
             <a:avLst/>
@@ -6730,14 +7622,14 @@
       </p:sp>
       <p:sp>
         <p:nvSpPr>
-          <p:cNvPr id="7" name="TextBox 6"/>
+          <p:cNvPr id="8" name="TextBox 7"/>
           <p:cNvSpPr txBox="1"/>
           <p:nvPr/>
         </p:nvSpPr>
         <p:spPr>
           <a:xfrm>
-            <a:off x="804672" y="1636776"/>
-            <a:ext cx="457200" cy="384048"/>
+            <a:off x="868680" y="2496312"/>
+            <a:ext cx="548640" cy="411480"/>
           </a:xfrm>
           <a:prstGeom prst="rect">
             <a:avLst/>
@@ -6752,7 +7644,7 @@
           <a:p>
             <a:pPr algn="ctr"/>
             <a:r>
-              <a:rPr sz="1600" b="1">
+              <a:rPr sz="2000" b="1">
                 <a:solidFill>
                   <a:srgbClr val="FFFFFF"/>
                 </a:solidFill>
@@ -6760,21 +7652,21 @@
                 <a:ea typeface="微软雅黑"/>
                 <a:cs typeface="微软雅黑"/>
               </a:rPr>
-              <a:t>!</a:t>
-            </a:r>
-          </a:p>
-        </p:txBody>
-      </p:sp>
-      <p:sp>
-        <p:nvSpPr>
-          <p:cNvPr id="8" name="TextBox 7"/>
+              <a:t>1</a:t>
+            </a:r>
+          </a:p>
+        </p:txBody>
+      </p:sp>
+      <p:sp>
+        <p:nvSpPr>
+          <p:cNvPr id="9" name="TextBox 8"/>
           <p:cNvSpPr txBox="1"/>
           <p:nvPr/>
         </p:nvSpPr>
         <p:spPr>
           <a:xfrm>
-            <a:off x="1371600" y="1527048"/>
-            <a:ext cx="4434840" cy="457200"/>
+            <a:off x="1554480" y="2432304"/>
+            <a:ext cx="2296058" cy="822960"/>
           </a:xfrm>
           <a:prstGeom prst="rect">
             <a:avLst/>
@@ -6789,7 +7681,7 @@
           <a:p>
             <a:pPr algn="l">
               <a:lnSpc>
-                <a:spcPct val="110000"/>
+                <a:spcPct val="130000"/>
               </a:lnSpc>
             </a:pPr>
             <a:r>
@@ -6797,25 +7689,25 @@
                 <a:solidFill>
                   <a:srgbClr val="1C2A33"/>
                 </a:solidFill>
-                <a:latin typeface="微软雅黑"/>
-                <a:ea typeface="微软雅黑"/>
-                <a:cs typeface="微软雅黑"/>
-              </a:rPr>
-              <a:t/>
-            </a:r>
-          </a:p>
-        </p:txBody>
-      </p:sp>
-      <p:sp>
-        <p:nvSpPr>
-          <p:cNvPr id="9" name="TextBox 8"/>
+                <a:latin typeface="楷体"/>
+                <a:ea typeface="楷体"/>
+                <a:cs typeface="楷体"/>
+              </a:rPr>
+              <a:t>「限知视角」的叙事效果</a:t>
+            </a:r>
+          </a:p>
+        </p:txBody>
+      </p:sp>
+      <p:sp>
+        <p:nvSpPr>
+          <p:cNvPr id="10" name="TextBox 9"/>
           <p:cNvSpPr txBox="1"/>
           <p:nvPr/>
         </p:nvSpPr>
         <p:spPr>
           <a:xfrm>
-            <a:off x="1371600" y="1965960"/>
-            <a:ext cx="4434840" cy="1417320"/>
+            <a:off x="914400" y="3246120"/>
+            <a:ext cx="2844698" cy="2651760"/>
           </a:xfrm>
           <a:prstGeom prst="rect">
             <a:avLst/>
@@ -6830,11 +7722,11 @@
           <a:p>
             <a:pPr algn="l">
               <a:lnSpc>
-                <a:spcPct val="128000"/>
+                <a:spcPct val="155000"/>
               </a:lnSpc>
             </a:pPr>
             <a:r>
-              <a:rPr sz="1200" b="0">
+              <a:rPr sz="1400" b="0">
                 <a:solidFill>
                   <a:srgbClr val="1C2A33"/>
                 </a:solidFill>
@@ -6842,21 +7734,21 @@
                 <a:ea typeface="楷体"/>
                 <a:cs typeface="楷体"/>
               </a:rPr>
-              <a:t>① 「限知视角」的叙事效果。原因：学生习惯全知视角小说，不理解「我」只看到一部分的叙事策略，需对比说明。</a:t>
-            </a:r>
-          </a:p>
-        </p:txBody>
-      </p:sp>
-      <p:sp>
-        <p:nvSpPr>
-          <p:cNvPr id="10" name="Rounded Rectangle 9"/>
+              <a:t>叙述者"我"只看到一部分、听不到通讯员心里想什么。→ 体会这种"只知所见"带来的真实感与悬念。</a:t>
+            </a:r>
+          </a:p>
+        </p:txBody>
+      </p:sp>
+      <p:sp>
+        <p:nvSpPr>
+          <p:cNvPr id="11" name="Rounded Rectangle 10"/>
           <p:cNvSpPr/>
           <p:nvPr/>
         </p:nvSpPr>
         <p:spPr>
           <a:xfrm>
-            <a:off x="6263640" y="1417320"/>
-            <a:ext cx="5349240" cy="2057400"/>
+            <a:off x="4399178" y="2194560"/>
+            <a:ext cx="3393338" cy="3840480"/>
           </a:xfrm>
           <a:prstGeom prst="roundRect">
             <a:avLst/>
@@ -6864,9 +7756,9 @@
           <a:solidFill>
             <a:srgbClr val="FFFFFF"/>
           </a:solidFill>
-          <a:ln w="22860">
+          <a:ln w="20320">
             <a:solidFill>
-              <a:srgbClr val="B23A2A"/>
+              <a:srgbClr val="2E7D6B"/>
             </a:solidFill>
           </a:ln>
           <a:effectLst/>
@@ -6895,20 +7787,20 @@
       </p:sp>
       <p:sp>
         <p:nvSpPr>
-          <p:cNvPr id="11" name="Oval 10"/>
+          <p:cNvPr id="12" name="Oval 11"/>
           <p:cNvSpPr/>
           <p:nvPr/>
         </p:nvSpPr>
         <p:spPr>
           <a:xfrm>
-            <a:off x="6428232" y="1581912"/>
-            <a:ext cx="457200" cy="457200"/>
+            <a:off x="4627778" y="2423160"/>
+            <a:ext cx="548640" cy="548640"/>
           </a:xfrm>
           <a:prstGeom prst="ellipse">
             <a:avLst/>
           </a:prstGeom>
           <a:solidFill>
-            <a:srgbClr val="B23A2A"/>
+            <a:srgbClr val="2E7D6B"/>
           </a:solidFill>
           <a:ln>
             <a:noFill/>
@@ -6939,14 +7831,14 @@
       </p:sp>
       <p:sp>
         <p:nvSpPr>
-          <p:cNvPr id="12" name="TextBox 11"/>
+          <p:cNvPr id="13" name="TextBox 12"/>
           <p:cNvSpPr txBox="1"/>
           <p:nvPr/>
         </p:nvSpPr>
         <p:spPr>
           <a:xfrm>
-            <a:off x="6428232" y="1636776"/>
-            <a:ext cx="457200" cy="384048"/>
+            <a:off x="4627778" y="2496312"/>
+            <a:ext cx="548640" cy="411480"/>
           </a:xfrm>
           <a:prstGeom prst="rect">
             <a:avLst/>
@@ -6961,7 +7853,7 @@
           <a:p>
             <a:pPr algn="ctr"/>
             <a:r>
-              <a:rPr sz="1600" b="1">
+              <a:rPr sz="2000" b="1">
                 <a:solidFill>
                   <a:srgbClr val="FFFFFF"/>
                 </a:solidFill>
@@ -6969,21 +7861,21 @@
                 <a:ea typeface="微软雅黑"/>
                 <a:cs typeface="微软雅黑"/>
               </a:rPr>
-              <a:t>!</a:t>
-            </a:r>
-          </a:p>
-        </p:txBody>
-      </p:sp>
-      <p:sp>
-        <p:nvSpPr>
-          <p:cNvPr id="13" name="TextBox 12"/>
+              <a:t>2</a:t>
+            </a:r>
+          </a:p>
+        </p:txBody>
+      </p:sp>
+      <p:sp>
+        <p:nvSpPr>
+          <p:cNvPr id="14" name="TextBox 13"/>
           <p:cNvSpPr txBox="1"/>
           <p:nvPr/>
         </p:nvSpPr>
         <p:spPr>
           <a:xfrm>
-            <a:off x="6995160" y="1527048"/>
-            <a:ext cx="4434840" cy="457200"/>
+            <a:off x="5313578" y="2432304"/>
+            <a:ext cx="2296058" cy="822960"/>
           </a:xfrm>
           <a:prstGeom prst="rect">
             <a:avLst/>
@@ -6998,7 +7890,7 @@
           <a:p>
             <a:pPr algn="l">
               <a:lnSpc>
-                <a:spcPct val="110000"/>
+                <a:spcPct val="130000"/>
               </a:lnSpc>
             </a:pPr>
             <a:r>
@@ -7006,25 +7898,25 @@
                 <a:solidFill>
                   <a:srgbClr val="1C2A33"/>
                 </a:solidFill>
-                <a:latin typeface="微软雅黑"/>
-                <a:ea typeface="微软雅黑"/>
-                <a:cs typeface="微软雅黑"/>
-              </a:rPr>
-              <a:t/>
-            </a:r>
-          </a:p>
-        </p:txBody>
-      </p:sp>
-      <p:sp>
-        <p:nvSpPr>
-          <p:cNvPr id="14" name="TextBox 13"/>
+                <a:latin typeface="楷体"/>
+                <a:ea typeface="楷体"/>
+                <a:cs typeface="楷体"/>
+              </a:rPr>
+              <a:t>细节的「反复」手法</a:t>
+            </a:r>
+          </a:p>
+        </p:txBody>
+      </p:sp>
+      <p:sp>
+        <p:nvSpPr>
+          <p:cNvPr id="15" name="TextBox 14"/>
           <p:cNvSpPr txBox="1"/>
           <p:nvPr/>
         </p:nvSpPr>
         <p:spPr>
           <a:xfrm>
-            <a:off x="6995160" y="1965960"/>
-            <a:ext cx="4434840" cy="1417320"/>
+            <a:off x="4673498" y="3246120"/>
+            <a:ext cx="2844698" cy="2651760"/>
           </a:xfrm>
           <a:prstGeom prst="rect">
             <a:avLst/>
@@ -7039,11 +7931,11 @@
           <a:p>
             <a:pPr algn="l">
               <a:lnSpc>
-                <a:spcPct val="128000"/>
+                <a:spcPct val="155000"/>
               </a:lnSpc>
             </a:pPr>
             <a:r>
-              <a:rPr sz="1200" b="0">
+              <a:rPr sz="1400" b="0">
                 <a:solidFill>
                   <a:srgbClr val="1C2A33"/>
                 </a:solidFill>
@@ -7051,21 +7943,21 @@
                 <a:ea typeface="楷体"/>
                 <a:cs typeface="楷体"/>
               </a:rPr>
-              <a:t>② 细节的「反复」手法。原因：学生看不出「衣服破洞」出现三次的递进意义，需引导追踪。</a:t>
-            </a:r>
-          </a:p>
-        </p:txBody>
-      </p:sp>
-      <p:sp>
-        <p:nvSpPr>
-          <p:cNvPr id="15" name="Rounded Rectangle 14"/>
+              <a:t>"衣服破洞"出现三次：生活细节（腼腆）→ 关切（要缝）→ 牺牲后（成永恒伤痕）。→ 追踪它的递进。</a:t>
+            </a:r>
+          </a:p>
+        </p:txBody>
+      </p:sp>
+      <p:sp>
+        <p:nvSpPr>
+          <p:cNvPr id="16" name="Rounded Rectangle 15"/>
           <p:cNvSpPr/>
           <p:nvPr/>
         </p:nvSpPr>
         <p:spPr>
           <a:xfrm>
-            <a:off x="640080" y="3703320"/>
-            <a:ext cx="5349240" cy="2057400"/>
+            <a:off x="8158276" y="2194560"/>
+            <a:ext cx="3393338" cy="3840480"/>
           </a:xfrm>
           <a:prstGeom prst="roundRect">
             <a:avLst/>
@@ -7073,9 +7965,9 @@
           <a:solidFill>
             <a:srgbClr val="FFFFFF"/>
           </a:solidFill>
-          <a:ln w="22860">
+          <a:ln w="20320">
             <a:solidFill>
-              <a:srgbClr val="B23A2A"/>
+              <a:srgbClr val="C8A86B"/>
             </a:solidFill>
           </a:ln>
           <a:effectLst/>
@@ -7104,20 +7996,20 @@
       </p:sp>
       <p:sp>
         <p:nvSpPr>
-          <p:cNvPr id="16" name="Oval 15"/>
+          <p:cNvPr id="17" name="Oval 16"/>
           <p:cNvSpPr/>
           <p:nvPr/>
         </p:nvSpPr>
         <p:spPr>
           <a:xfrm>
-            <a:off x="804672" y="3867912"/>
-            <a:ext cx="457200" cy="457200"/>
+            <a:off x="8386876" y="2423160"/>
+            <a:ext cx="548640" cy="548640"/>
           </a:xfrm>
           <a:prstGeom prst="ellipse">
             <a:avLst/>
           </a:prstGeom>
           <a:solidFill>
-            <a:srgbClr val="B23A2A"/>
+            <a:srgbClr val="C8A86B"/>
           </a:solidFill>
           <a:ln>
             <a:noFill/>
@@ -7148,14 +8040,14 @@
       </p:sp>
       <p:sp>
         <p:nvSpPr>
-          <p:cNvPr id="17" name="TextBox 16"/>
+          <p:cNvPr id="18" name="TextBox 17"/>
           <p:cNvSpPr txBox="1"/>
           <p:nvPr/>
         </p:nvSpPr>
         <p:spPr>
           <a:xfrm>
-            <a:off x="804672" y="3922776"/>
-            <a:ext cx="457200" cy="384048"/>
+            <a:off x="8386876" y="2496312"/>
+            <a:ext cx="548640" cy="411480"/>
           </a:xfrm>
           <a:prstGeom prst="rect">
             <a:avLst/>
@@ -7170,7 +8062,7 @@
           <a:p>
             <a:pPr algn="ctr"/>
             <a:r>
-              <a:rPr sz="1600" b="1">
+              <a:rPr sz="2000" b="1">
                 <a:solidFill>
                   <a:srgbClr val="FFFFFF"/>
                 </a:solidFill>
@@ -7178,21 +8070,21 @@
                 <a:ea typeface="微软雅黑"/>
                 <a:cs typeface="微软雅黑"/>
               </a:rPr>
-              <a:t>!</a:t>
-            </a:r>
-          </a:p>
-        </p:txBody>
-      </p:sp>
-      <p:sp>
-        <p:nvSpPr>
-          <p:cNvPr id="18" name="TextBox 17"/>
+              <a:t>3</a:t>
+            </a:r>
+          </a:p>
+        </p:txBody>
+      </p:sp>
+      <p:sp>
+        <p:nvSpPr>
+          <p:cNvPr id="19" name="TextBox 18"/>
           <p:cNvSpPr txBox="1"/>
           <p:nvPr/>
         </p:nvSpPr>
         <p:spPr>
           <a:xfrm>
-            <a:off x="1371600" y="3813048"/>
-            <a:ext cx="4434840" cy="457200"/>
+            <a:off x="9072676" y="2432304"/>
+            <a:ext cx="2296058" cy="822960"/>
           </a:xfrm>
           <a:prstGeom prst="rect">
             <a:avLst/>
@@ -7207,7 +8099,7 @@
           <a:p>
             <a:pPr algn="l">
               <a:lnSpc>
-                <a:spcPct val="110000"/>
+                <a:spcPct val="130000"/>
               </a:lnSpc>
             </a:pPr>
             <a:r>
@@ -7215,25 +8107,25 @@
                 <a:solidFill>
                   <a:srgbClr val="1C2A33"/>
                 </a:solidFill>
-                <a:latin typeface="微软雅黑"/>
-                <a:ea typeface="微软雅黑"/>
-                <a:cs typeface="微软雅黑"/>
-              </a:rPr>
-              <a:t/>
-            </a:r>
-          </a:p>
-        </p:txBody>
-      </p:sp>
-      <p:sp>
-        <p:nvSpPr>
-          <p:cNvPr id="19" name="TextBox 18"/>
+                <a:latin typeface="楷体"/>
+                <a:ea typeface="楷体"/>
+                <a:cs typeface="楷体"/>
+              </a:rPr>
+              <a:t>结尾「盖被子」的情感分量</a:t>
+            </a:r>
+          </a:p>
+        </p:txBody>
+      </p:sp>
+      <p:sp>
+        <p:nvSpPr>
+          <p:cNvPr id="20" name="TextBox 19"/>
           <p:cNvSpPr txBox="1"/>
           <p:nvPr/>
         </p:nvSpPr>
         <p:spPr>
           <a:xfrm>
-            <a:off x="1371600" y="4251960"/>
-            <a:ext cx="4434840" cy="1417320"/>
+            <a:off x="8432596" y="3246120"/>
+            <a:ext cx="2844698" cy="2651760"/>
           </a:xfrm>
           <a:prstGeom prst="rect">
             <a:avLst/>
@@ -7248,11 +8140,11 @@
           <a:p>
             <a:pPr algn="l">
               <a:lnSpc>
-                <a:spcPct val="128000"/>
+                <a:spcPct val="155000"/>
               </a:lnSpc>
             </a:pPr>
             <a:r>
-              <a:rPr sz="1200" b="0">
+              <a:rPr sz="1400" b="0">
                 <a:solidFill>
                   <a:srgbClr val="1C2A33"/>
                 </a:solidFill>
@@ -7260,14 +8152,14 @@
                 <a:ea typeface="楷体"/>
                 <a:cs typeface="楷体"/>
               </a:rPr>
-              <a:t>③ 结尾「盖被子」的情感分量。原因：学生易理解为「就是盖了一床被子」，忽略新媳妇从「不愿借」到「主动盖」的心理转变。</a:t>
-            </a:r>
-          </a:p>
-        </p:txBody>
-      </p:sp>
-      <p:sp>
-        <p:nvSpPr>
-          <p:cNvPr id="20" name="TextBox 19"/>
+              <a:t>从"不愿借"到"主动盖"，是新媳妇心理的转折。→ 读懂这条被子承载的崇敬与痛惜。</a:t>
+            </a:r>
+          </a:p>
+        </p:txBody>
+      </p:sp>
+      <p:sp>
+        <p:nvSpPr>
+          <p:cNvPr id="21" name="TextBox 20"/>
           <p:cNvSpPr txBox="1"/>
           <p:nvPr/>
         </p:nvSpPr>
@@ -7394,13 +8286,13 @@
             <a:r>
               <a:rPr sz="1300" b="1">
                 <a:solidFill>
-                  <a:srgbClr val="C8A86B"/>
+                  <a:srgbClr val="B23A2A"/>
                 </a:solidFill>
                 <a:latin typeface="微软雅黑"/>
                 <a:ea typeface="微软雅黑"/>
                 <a:cs typeface="微软雅黑"/>
               </a:rPr>
-              <a:t>要点板书</a:t>
+              <a:t>要点图谱 · 拿来复习</a:t>
             </a:r>
           </a:p>
         </p:txBody>
@@ -7420,7 +8312,7 @@
             <a:avLst/>
           </a:prstGeom>
           <a:solidFill>
-            <a:srgbClr val="C8A86B"/>
+            <a:srgbClr val="B23A2A"/>
           </a:solidFill>
           <a:ln>
             <a:noFill/>
@@ -7457,20 +8349,15 @@
         </p:nvSpPr>
         <p:spPr>
           <a:xfrm>
-            <a:off x="640080" y="1417320"/>
-            <a:ext cx="10911535" cy="5394960"/>
+            <a:off x="640080" y="1737360"/>
+            <a:ext cx="10911535" cy="502920"/>
           </a:xfrm>
           <a:prstGeom prst="roundRect">
             <a:avLst/>
           </a:prstGeom>
           <a:solidFill>
-            <a:srgbClr val="FFFFFF"/>
+            <a:srgbClr val="1C2A33"/>
           </a:solidFill>
-          <a:ln w="25400">
-            <a:solidFill>
-              <a:srgbClr val="C8A86B"/>
-            </a:solidFill>
-          </a:ln>
           <a:effectLst/>
         </p:spPr>
         <p:style>
@@ -7503,8 +8390,8 @@
         </p:nvSpPr>
         <p:spPr>
           <a:xfrm>
-            <a:off x="914400" y="1554480"/>
-            <a:ext cx="10362895" cy="5120640"/>
+            <a:off x="914400" y="1810512"/>
+            <a:ext cx="3108960" cy="365760"/>
           </a:xfrm>
           <a:prstGeom prst="rect">
             <a:avLst/>
@@ -7517,48 +8404,17 @@
           </a:bodyPr>
           <a:lstStyle/>
           <a:p>
-            <a:pPr algn="l">
-              <a:lnSpc>
-                <a:spcPct val="110000"/>
-              </a:lnSpc>
-              <a:spcAft>
-                <a:spcPts val="100"/>
-              </a:spcAft>
-            </a:pPr>
-            <a:r>
-              <a:rPr sz="1300" b="0">
-                <a:solidFill>
-                  <a:srgbClr val="1C2A33"/>
+            <a:pPr algn="l"/>
+            <a:r>
+              <a:rPr sz="1500" b="1">
+                <a:solidFill>
+                  <a:srgbClr val="FFFFFF"/>
                 </a:solidFill>
                 <a:latin typeface="微软雅黑"/>
                 <a:ea typeface="微软雅黑"/>
                 <a:cs typeface="微软雅黑"/>
               </a:rPr>
-              <a:t>┌── 百合花 茹志鹃 ──┐
-│ 百合花＝纯洁＋牺牲 │
-│ │
-│ 【四幕脉络】 │
-│ 借→帮→牺→盖 │
-│ │
-│ 【被子意象演变】 │
-│ 借:不愿(私有) │
-│ 铺:共用(公共) │
-│ 盖:献出(牺牲) │
-│ →人的情感在变 │
-│ │
-│ 【三个反复细节】 │
-│ 枪筒树枝|3次|纯真 │
-│ 衣服破洞|3次|腼腆→伤痕│
-│ 两馒头 |2次|以物写人│
-│ │
-│ 【限知视角】 │
-│ 只知「我」所见 │
-│ →真实+悬念 │
-│ │
-│ 【小说细读四步】 │
-│ 追意象→读细节→ │
-│ 析人物→推主题 │
-└──────────────────────┘</a:t>
+              <a:t>板块</a:t>
             </a:r>
           </a:p>
         </p:txBody>
@@ -7566,6 +8422,763 @@
       <p:sp>
         <p:nvSpPr>
           <p:cNvPr id="7" name="TextBox 6"/>
+          <p:cNvSpPr txBox="1"/>
+          <p:nvPr/>
+        </p:nvSpPr>
+        <p:spPr>
+          <a:xfrm>
+            <a:off x="4297680" y="1810512"/>
+            <a:ext cx="7680960" cy="365760"/>
+          </a:xfrm>
+          <a:prstGeom prst="rect">
+            <a:avLst/>
+          </a:prstGeom>
+          <a:noFill/>
+        </p:spPr>
+        <p:txBody>
+          <a:bodyPr wrap="square" anchor="t" lIns="0" rIns="0" tIns="0" bIns="0">
+            <a:spAutoFit/>
+          </a:bodyPr>
+          <a:lstStyle/>
+          <a:p>
+            <a:pPr algn="l"/>
+            <a:r>
+              <a:rPr sz="1500" b="1">
+                <a:solidFill>
+                  <a:srgbClr val="C8A86B"/>
+                </a:solidFill>
+                <a:latin typeface="微软雅黑"/>
+                <a:ea typeface="微软雅黑"/>
+                <a:cs typeface="微软雅黑"/>
+              </a:rPr>
+              <a:t>内容</a:t>
+            </a:r>
+          </a:p>
+        </p:txBody>
+      </p:sp>
+      <p:sp>
+        <p:nvSpPr>
+          <p:cNvPr id="8" name="Rounded Rectangle 7"/>
+          <p:cNvSpPr/>
+          <p:nvPr/>
+        </p:nvSpPr>
+        <p:spPr>
+          <a:xfrm>
+            <a:off x="640080" y="2331720"/>
+            <a:ext cx="10911535" cy="530352"/>
+          </a:xfrm>
+          <a:prstGeom prst="roundRect">
+            <a:avLst/>
+          </a:prstGeom>
+          <a:solidFill>
+            <a:srgbClr val="FFFFFF"/>
+          </a:solidFill>
+          <a:ln w="10160">
+            <a:solidFill>
+              <a:srgbClr val="6B6258"/>
+            </a:solidFill>
+          </a:ln>
+          <a:effectLst/>
+        </p:spPr>
+        <p:style>
+          <a:lnRef idx="1">
+            <a:schemeClr val="accent1"/>
+          </a:lnRef>
+          <a:fillRef idx="3">
+            <a:schemeClr val="accent1"/>
+          </a:fillRef>
+          <a:effectRef idx="2">
+            <a:schemeClr val="accent1"/>
+          </a:effectRef>
+          <a:fontRef idx="minor">
+            <a:schemeClr val="lt1"/>
+          </a:fontRef>
+        </p:style>
+        <p:txBody>
+          <a:bodyPr rtlCol="0" anchor="ctr"/>
+          <a:lstStyle/>
+          <a:p>
+            <a:pPr algn="ctr"/>
+          </a:p>
+        </p:txBody>
+      </p:sp>
+      <p:sp>
+        <p:nvSpPr>
+          <p:cNvPr id="9" name="TextBox 8"/>
+          <p:cNvSpPr txBox="1"/>
+          <p:nvPr/>
+        </p:nvSpPr>
+        <p:spPr>
+          <a:xfrm>
+            <a:off x="914400" y="2423160"/>
+            <a:ext cx="3108960" cy="365760"/>
+          </a:xfrm>
+          <a:prstGeom prst="rect">
+            <a:avLst/>
+          </a:prstGeom>
+          <a:noFill/>
+        </p:spPr>
+        <p:txBody>
+          <a:bodyPr wrap="square" anchor="t" lIns="0" rIns="0" tIns="0" bIns="0">
+            <a:spAutoFit/>
+          </a:bodyPr>
+          <a:lstStyle/>
+          <a:p>
+            <a:pPr algn="l"/>
+            <a:r>
+              <a:rPr sz="1400" b="1">
+                <a:solidFill>
+                  <a:srgbClr val="B23A2A"/>
+                </a:solidFill>
+                <a:latin typeface="微软雅黑"/>
+                <a:ea typeface="微软雅黑"/>
+                <a:cs typeface="微软雅黑"/>
+              </a:rPr>
+              <a:t>意象内核</a:t>
+            </a:r>
+          </a:p>
+        </p:txBody>
+      </p:sp>
+      <p:sp>
+        <p:nvSpPr>
+          <p:cNvPr id="10" name="TextBox 9"/>
+          <p:cNvSpPr txBox="1"/>
+          <p:nvPr/>
+        </p:nvSpPr>
+        <p:spPr>
+          <a:xfrm>
+            <a:off x="4297680" y="2423160"/>
+            <a:ext cx="7680960" cy="365760"/>
+          </a:xfrm>
+          <a:prstGeom prst="rect">
+            <a:avLst/>
+          </a:prstGeom>
+          <a:noFill/>
+        </p:spPr>
+        <p:txBody>
+          <a:bodyPr wrap="square" anchor="t" lIns="0" rIns="0" tIns="0" bIns="0">
+            <a:spAutoFit/>
+          </a:bodyPr>
+          <a:lstStyle/>
+          <a:p>
+            <a:pPr algn="l"/>
+            <a:r>
+              <a:rPr sz="1300" b="0">
+                <a:solidFill>
+                  <a:srgbClr val="1C2A33"/>
+                </a:solidFill>
+                <a:latin typeface="楷体"/>
+                <a:ea typeface="楷体"/>
+                <a:cs typeface="楷体"/>
+              </a:rPr>
+              <a:t>百合花 ＝ 纯洁 ＋ 牺牲（枣红底上洒满白色百合花）</a:t>
+            </a:r>
+          </a:p>
+        </p:txBody>
+      </p:sp>
+      <p:sp>
+        <p:nvSpPr>
+          <p:cNvPr id="11" name="Rounded Rectangle 10"/>
+          <p:cNvSpPr/>
+          <p:nvPr/>
+        </p:nvSpPr>
+        <p:spPr>
+          <a:xfrm>
+            <a:off x="640080" y="2916936"/>
+            <a:ext cx="10911535" cy="530352"/>
+          </a:xfrm>
+          <a:prstGeom prst="roundRect">
+            <a:avLst/>
+          </a:prstGeom>
+          <a:solidFill>
+            <a:srgbClr val="E7DFD2"/>
+          </a:solidFill>
+          <a:ln w="10160">
+            <a:solidFill>
+              <a:srgbClr val="6B6258"/>
+            </a:solidFill>
+          </a:ln>
+          <a:effectLst/>
+        </p:spPr>
+        <p:style>
+          <a:lnRef idx="1">
+            <a:schemeClr val="accent1"/>
+          </a:lnRef>
+          <a:fillRef idx="3">
+            <a:schemeClr val="accent1"/>
+          </a:fillRef>
+          <a:effectRef idx="2">
+            <a:schemeClr val="accent1"/>
+          </a:effectRef>
+          <a:fontRef idx="minor">
+            <a:schemeClr val="lt1"/>
+          </a:fontRef>
+        </p:style>
+        <p:txBody>
+          <a:bodyPr rtlCol="0" anchor="ctr"/>
+          <a:lstStyle/>
+          <a:p>
+            <a:pPr algn="ctr"/>
+          </a:p>
+        </p:txBody>
+      </p:sp>
+      <p:sp>
+        <p:nvSpPr>
+          <p:cNvPr id="12" name="TextBox 11"/>
+          <p:cNvSpPr txBox="1"/>
+          <p:nvPr/>
+        </p:nvSpPr>
+        <p:spPr>
+          <a:xfrm>
+            <a:off x="914400" y="3008376"/>
+            <a:ext cx="3108960" cy="365760"/>
+          </a:xfrm>
+          <a:prstGeom prst="rect">
+            <a:avLst/>
+          </a:prstGeom>
+          <a:noFill/>
+        </p:spPr>
+        <p:txBody>
+          <a:bodyPr wrap="square" anchor="t" lIns="0" rIns="0" tIns="0" bIns="0">
+            <a:spAutoFit/>
+          </a:bodyPr>
+          <a:lstStyle/>
+          <a:p>
+            <a:pPr algn="l"/>
+            <a:r>
+              <a:rPr sz="1400" b="1">
+                <a:solidFill>
+                  <a:srgbClr val="2E7D6B"/>
+                </a:solidFill>
+                <a:latin typeface="微软雅黑"/>
+                <a:ea typeface="微软雅黑"/>
+                <a:cs typeface="微软雅黑"/>
+              </a:rPr>
+              <a:t>四幕脉络</a:t>
+            </a:r>
+          </a:p>
+        </p:txBody>
+      </p:sp>
+      <p:sp>
+        <p:nvSpPr>
+          <p:cNvPr id="13" name="TextBox 12"/>
+          <p:cNvSpPr txBox="1"/>
+          <p:nvPr/>
+        </p:nvSpPr>
+        <p:spPr>
+          <a:xfrm>
+            <a:off x="4297680" y="3008376"/>
+            <a:ext cx="7680960" cy="365760"/>
+          </a:xfrm>
+          <a:prstGeom prst="rect">
+            <a:avLst/>
+          </a:prstGeom>
+          <a:noFill/>
+        </p:spPr>
+        <p:txBody>
+          <a:bodyPr wrap="square" anchor="t" lIns="0" rIns="0" tIns="0" bIns="0">
+            <a:spAutoFit/>
+          </a:bodyPr>
+          <a:lstStyle/>
+          <a:p>
+            <a:pPr algn="l"/>
+            <a:r>
+              <a:rPr sz="1300" b="0">
+                <a:solidFill>
+                  <a:srgbClr val="1C2A33"/>
+                </a:solidFill>
+                <a:latin typeface="楷体"/>
+                <a:ea typeface="楷体"/>
+                <a:cs typeface="楷体"/>
+              </a:rPr>
+              <a:t>借被子 → 帮包扎 → 通讯员牺牲 → 新媳妇盖被子</a:t>
+            </a:r>
+          </a:p>
+        </p:txBody>
+      </p:sp>
+      <p:sp>
+        <p:nvSpPr>
+          <p:cNvPr id="14" name="Rounded Rectangle 13"/>
+          <p:cNvSpPr/>
+          <p:nvPr/>
+        </p:nvSpPr>
+        <p:spPr>
+          <a:xfrm>
+            <a:off x="640080" y="3502152"/>
+            <a:ext cx="10911535" cy="530352"/>
+          </a:xfrm>
+          <a:prstGeom prst="roundRect">
+            <a:avLst/>
+          </a:prstGeom>
+          <a:solidFill>
+            <a:srgbClr val="FFFFFF"/>
+          </a:solidFill>
+          <a:ln w="10160">
+            <a:solidFill>
+              <a:srgbClr val="6B6258"/>
+            </a:solidFill>
+          </a:ln>
+          <a:effectLst/>
+        </p:spPr>
+        <p:style>
+          <a:lnRef idx="1">
+            <a:schemeClr val="accent1"/>
+          </a:lnRef>
+          <a:fillRef idx="3">
+            <a:schemeClr val="accent1"/>
+          </a:fillRef>
+          <a:effectRef idx="2">
+            <a:schemeClr val="accent1"/>
+          </a:effectRef>
+          <a:fontRef idx="minor">
+            <a:schemeClr val="lt1"/>
+          </a:fontRef>
+        </p:style>
+        <p:txBody>
+          <a:bodyPr rtlCol="0" anchor="ctr"/>
+          <a:lstStyle/>
+          <a:p>
+            <a:pPr algn="ctr"/>
+          </a:p>
+        </p:txBody>
+      </p:sp>
+      <p:sp>
+        <p:nvSpPr>
+          <p:cNvPr id="15" name="TextBox 14"/>
+          <p:cNvSpPr txBox="1"/>
+          <p:nvPr/>
+        </p:nvSpPr>
+        <p:spPr>
+          <a:xfrm>
+            <a:off x="914400" y="3593592"/>
+            <a:ext cx="3108960" cy="365760"/>
+          </a:xfrm>
+          <a:prstGeom prst="rect">
+            <a:avLst/>
+          </a:prstGeom>
+          <a:noFill/>
+        </p:spPr>
+        <p:txBody>
+          <a:bodyPr wrap="square" anchor="t" lIns="0" rIns="0" tIns="0" bIns="0">
+            <a:spAutoFit/>
+          </a:bodyPr>
+          <a:lstStyle/>
+          <a:p>
+            <a:pPr algn="l"/>
+            <a:r>
+              <a:rPr sz="1400" b="1">
+                <a:solidFill>
+                  <a:srgbClr val="C8A86B"/>
+                </a:solidFill>
+                <a:latin typeface="微软雅黑"/>
+                <a:ea typeface="微软雅黑"/>
+                <a:cs typeface="微软雅黑"/>
+              </a:rPr>
+              <a:t>被子演变</a:t>
+            </a:r>
+          </a:p>
+        </p:txBody>
+      </p:sp>
+      <p:sp>
+        <p:nvSpPr>
+          <p:cNvPr id="16" name="TextBox 15"/>
+          <p:cNvSpPr txBox="1"/>
+          <p:nvPr/>
+        </p:nvSpPr>
+        <p:spPr>
+          <a:xfrm>
+            <a:off x="4297680" y="3593592"/>
+            <a:ext cx="7680960" cy="365760"/>
+          </a:xfrm>
+          <a:prstGeom prst="rect">
+            <a:avLst/>
+          </a:prstGeom>
+          <a:noFill/>
+        </p:spPr>
+        <p:txBody>
+          <a:bodyPr wrap="square" anchor="t" lIns="0" rIns="0" tIns="0" bIns="0">
+            <a:spAutoFit/>
+          </a:bodyPr>
+          <a:lstStyle/>
+          <a:p>
+            <a:pPr algn="l"/>
+            <a:r>
+              <a:rPr sz="1300" b="0">
+                <a:solidFill>
+                  <a:srgbClr val="1C2A33"/>
+                </a:solidFill>
+                <a:latin typeface="楷体"/>
+                <a:ea typeface="楷体"/>
+                <a:cs typeface="楷体"/>
+              </a:rPr>
+              <a:t>不愿借（私有）→ 铺在包扎所（共用）→ 献出盖遗体（牺牲）</a:t>
+            </a:r>
+          </a:p>
+        </p:txBody>
+      </p:sp>
+      <p:sp>
+        <p:nvSpPr>
+          <p:cNvPr id="17" name="Rounded Rectangle 16"/>
+          <p:cNvSpPr/>
+          <p:nvPr/>
+        </p:nvSpPr>
+        <p:spPr>
+          <a:xfrm>
+            <a:off x="640080" y="4087368"/>
+            <a:ext cx="10911535" cy="530352"/>
+          </a:xfrm>
+          <a:prstGeom prst="roundRect">
+            <a:avLst/>
+          </a:prstGeom>
+          <a:solidFill>
+            <a:srgbClr val="E7DFD2"/>
+          </a:solidFill>
+          <a:ln w="10160">
+            <a:solidFill>
+              <a:srgbClr val="6B6258"/>
+            </a:solidFill>
+          </a:ln>
+          <a:effectLst/>
+        </p:spPr>
+        <p:style>
+          <a:lnRef idx="1">
+            <a:schemeClr val="accent1"/>
+          </a:lnRef>
+          <a:fillRef idx="3">
+            <a:schemeClr val="accent1"/>
+          </a:fillRef>
+          <a:effectRef idx="2">
+            <a:schemeClr val="accent1"/>
+          </a:effectRef>
+          <a:fontRef idx="minor">
+            <a:schemeClr val="lt1"/>
+          </a:fontRef>
+        </p:style>
+        <p:txBody>
+          <a:bodyPr rtlCol="0" anchor="ctr"/>
+          <a:lstStyle/>
+          <a:p>
+            <a:pPr algn="ctr"/>
+          </a:p>
+        </p:txBody>
+      </p:sp>
+      <p:sp>
+        <p:nvSpPr>
+          <p:cNvPr id="18" name="TextBox 17"/>
+          <p:cNvSpPr txBox="1"/>
+          <p:nvPr/>
+        </p:nvSpPr>
+        <p:spPr>
+          <a:xfrm>
+            <a:off x="914400" y="4178808"/>
+            <a:ext cx="3108960" cy="365760"/>
+          </a:xfrm>
+          <a:prstGeom prst="rect">
+            <a:avLst/>
+          </a:prstGeom>
+          <a:noFill/>
+        </p:spPr>
+        <p:txBody>
+          <a:bodyPr wrap="square" anchor="t" lIns="0" rIns="0" tIns="0" bIns="0">
+            <a:spAutoFit/>
+          </a:bodyPr>
+          <a:lstStyle/>
+          <a:p>
+            <a:pPr algn="l"/>
+            <a:r>
+              <a:rPr sz="1400" b="1">
+                <a:solidFill>
+                  <a:srgbClr val="B23A2A"/>
+                </a:solidFill>
+                <a:latin typeface="微软雅黑"/>
+                <a:ea typeface="微软雅黑"/>
+                <a:cs typeface="微软雅黑"/>
+              </a:rPr>
+              <a:t>三个反复</a:t>
+            </a:r>
+          </a:p>
+        </p:txBody>
+      </p:sp>
+      <p:sp>
+        <p:nvSpPr>
+          <p:cNvPr id="19" name="TextBox 18"/>
+          <p:cNvSpPr txBox="1"/>
+          <p:nvPr/>
+        </p:nvSpPr>
+        <p:spPr>
+          <a:xfrm>
+            <a:off x="4297680" y="4178808"/>
+            <a:ext cx="7680960" cy="365760"/>
+          </a:xfrm>
+          <a:prstGeom prst="rect">
+            <a:avLst/>
+          </a:prstGeom>
+          <a:noFill/>
+        </p:spPr>
+        <p:txBody>
+          <a:bodyPr wrap="square" anchor="t" lIns="0" rIns="0" tIns="0" bIns="0">
+            <a:spAutoFit/>
+          </a:bodyPr>
+          <a:lstStyle/>
+          <a:p>
+            <a:pPr algn="l"/>
+            <a:r>
+              <a:rPr sz="1300" b="0">
+                <a:solidFill>
+                  <a:srgbClr val="1C2A33"/>
+                </a:solidFill>
+                <a:latin typeface="楷体"/>
+                <a:ea typeface="楷体"/>
+                <a:cs typeface="楷体"/>
+              </a:rPr>
+              <a:t>枪筒树枝 · 衣服破洞 · 两个馒头——以小见大塑人物</a:t>
+            </a:r>
+          </a:p>
+        </p:txBody>
+      </p:sp>
+      <p:sp>
+        <p:nvSpPr>
+          <p:cNvPr id="20" name="Rounded Rectangle 19"/>
+          <p:cNvSpPr/>
+          <p:nvPr/>
+        </p:nvSpPr>
+        <p:spPr>
+          <a:xfrm>
+            <a:off x="640080" y="4672584"/>
+            <a:ext cx="10911535" cy="530352"/>
+          </a:xfrm>
+          <a:prstGeom prst="roundRect">
+            <a:avLst/>
+          </a:prstGeom>
+          <a:solidFill>
+            <a:srgbClr val="FFFFFF"/>
+          </a:solidFill>
+          <a:ln w="10160">
+            <a:solidFill>
+              <a:srgbClr val="6B6258"/>
+            </a:solidFill>
+          </a:ln>
+          <a:effectLst/>
+        </p:spPr>
+        <p:style>
+          <a:lnRef idx="1">
+            <a:schemeClr val="accent1"/>
+          </a:lnRef>
+          <a:fillRef idx="3">
+            <a:schemeClr val="accent1"/>
+          </a:fillRef>
+          <a:effectRef idx="2">
+            <a:schemeClr val="accent1"/>
+          </a:effectRef>
+          <a:fontRef idx="minor">
+            <a:schemeClr val="lt1"/>
+          </a:fontRef>
+        </p:style>
+        <p:txBody>
+          <a:bodyPr rtlCol="0" anchor="ctr"/>
+          <a:lstStyle/>
+          <a:p>
+            <a:pPr algn="ctr"/>
+          </a:p>
+        </p:txBody>
+      </p:sp>
+      <p:sp>
+        <p:nvSpPr>
+          <p:cNvPr id="21" name="TextBox 20"/>
+          <p:cNvSpPr txBox="1"/>
+          <p:nvPr/>
+        </p:nvSpPr>
+        <p:spPr>
+          <a:xfrm>
+            <a:off x="914400" y="4764024"/>
+            <a:ext cx="3108960" cy="365760"/>
+          </a:xfrm>
+          <a:prstGeom prst="rect">
+            <a:avLst/>
+          </a:prstGeom>
+          <a:noFill/>
+        </p:spPr>
+        <p:txBody>
+          <a:bodyPr wrap="square" anchor="t" lIns="0" rIns="0" tIns="0" bIns="0">
+            <a:spAutoFit/>
+          </a:bodyPr>
+          <a:lstStyle/>
+          <a:p>
+            <a:pPr algn="l"/>
+            <a:r>
+              <a:rPr sz="1400" b="1">
+                <a:solidFill>
+                  <a:srgbClr val="2E7D6B"/>
+                </a:solidFill>
+                <a:latin typeface="微软雅黑"/>
+                <a:ea typeface="微软雅黑"/>
+                <a:cs typeface="微软雅黑"/>
+              </a:rPr>
+              <a:t>叙事视角</a:t>
+            </a:r>
+          </a:p>
+        </p:txBody>
+      </p:sp>
+      <p:sp>
+        <p:nvSpPr>
+          <p:cNvPr id="22" name="TextBox 21"/>
+          <p:cNvSpPr txBox="1"/>
+          <p:nvPr/>
+        </p:nvSpPr>
+        <p:spPr>
+          <a:xfrm>
+            <a:off x="4297680" y="4764024"/>
+            <a:ext cx="7680960" cy="365760"/>
+          </a:xfrm>
+          <a:prstGeom prst="rect">
+            <a:avLst/>
+          </a:prstGeom>
+          <a:noFill/>
+        </p:spPr>
+        <p:txBody>
+          <a:bodyPr wrap="square" anchor="t" lIns="0" rIns="0" tIns="0" bIns="0">
+            <a:spAutoFit/>
+          </a:bodyPr>
+          <a:lstStyle/>
+          <a:p>
+            <a:pPr algn="l"/>
+            <a:r>
+              <a:rPr sz="1300" b="0">
+                <a:solidFill>
+                  <a:srgbClr val="1C2A33"/>
+                </a:solidFill>
+                <a:latin typeface="楷体"/>
+                <a:ea typeface="楷体"/>
+                <a:cs typeface="楷体"/>
+              </a:rPr>
+              <a:t>限知视角：只知"我"所见 → 真实 ＋ 悬念</a:t>
+            </a:r>
+          </a:p>
+        </p:txBody>
+      </p:sp>
+      <p:sp>
+        <p:nvSpPr>
+          <p:cNvPr id="23" name="Rounded Rectangle 22"/>
+          <p:cNvSpPr/>
+          <p:nvPr/>
+        </p:nvSpPr>
+        <p:spPr>
+          <a:xfrm>
+            <a:off x="640080" y="5257800"/>
+            <a:ext cx="10911535" cy="530352"/>
+          </a:xfrm>
+          <a:prstGeom prst="roundRect">
+            <a:avLst/>
+          </a:prstGeom>
+          <a:solidFill>
+            <a:srgbClr val="E7DFD2"/>
+          </a:solidFill>
+          <a:ln w="10160">
+            <a:solidFill>
+              <a:srgbClr val="6B6258"/>
+            </a:solidFill>
+          </a:ln>
+          <a:effectLst/>
+        </p:spPr>
+        <p:style>
+          <a:lnRef idx="1">
+            <a:schemeClr val="accent1"/>
+          </a:lnRef>
+          <a:fillRef idx="3">
+            <a:schemeClr val="accent1"/>
+          </a:fillRef>
+          <a:effectRef idx="2">
+            <a:schemeClr val="accent1"/>
+          </a:effectRef>
+          <a:fontRef idx="minor">
+            <a:schemeClr val="lt1"/>
+          </a:fontRef>
+        </p:style>
+        <p:txBody>
+          <a:bodyPr rtlCol="0" anchor="ctr"/>
+          <a:lstStyle/>
+          <a:p>
+            <a:pPr algn="ctr"/>
+          </a:p>
+        </p:txBody>
+      </p:sp>
+      <p:sp>
+        <p:nvSpPr>
+          <p:cNvPr id="24" name="TextBox 23"/>
+          <p:cNvSpPr txBox="1"/>
+          <p:nvPr/>
+        </p:nvSpPr>
+        <p:spPr>
+          <a:xfrm>
+            <a:off x="914400" y="5349240"/>
+            <a:ext cx="3108960" cy="365760"/>
+          </a:xfrm>
+          <a:prstGeom prst="rect">
+            <a:avLst/>
+          </a:prstGeom>
+          <a:noFill/>
+        </p:spPr>
+        <p:txBody>
+          <a:bodyPr wrap="square" anchor="t" lIns="0" rIns="0" tIns="0" bIns="0">
+            <a:spAutoFit/>
+          </a:bodyPr>
+          <a:lstStyle/>
+          <a:p>
+            <a:pPr algn="l"/>
+            <a:r>
+              <a:rPr sz="1400" b="1">
+                <a:solidFill>
+                  <a:srgbClr val="C8A86B"/>
+                </a:solidFill>
+                <a:latin typeface="微软雅黑"/>
+                <a:ea typeface="微软雅黑"/>
+                <a:cs typeface="微软雅黑"/>
+              </a:rPr>
+              <a:t>细读四步</a:t>
+            </a:r>
+          </a:p>
+        </p:txBody>
+      </p:sp>
+      <p:sp>
+        <p:nvSpPr>
+          <p:cNvPr id="25" name="TextBox 24"/>
+          <p:cNvSpPr txBox="1"/>
+          <p:nvPr/>
+        </p:nvSpPr>
+        <p:spPr>
+          <a:xfrm>
+            <a:off x="4297680" y="5349240"/>
+            <a:ext cx="7680960" cy="365760"/>
+          </a:xfrm>
+          <a:prstGeom prst="rect">
+            <a:avLst/>
+          </a:prstGeom>
+          <a:noFill/>
+        </p:spPr>
+        <p:txBody>
+          <a:bodyPr wrap="square" anchor="t" lIns="0" rIns="0" tIns="0" bIns="0">
+            <a:spAutoFit/>
+          </a:bodyPr>
+          <a:lstStyle/>
+          <a:p>
+            <a:pPr algn="l"/>
+            <a:r>
+              <a:rPr sz="1300" b="0">
+                <a:solidFill>
+                  <a:srgbClr val="1C2A33"/>
+                </a:solidFill>
+                <a:latin typeface="楷体"/>
+                <a:ea typeface="楷体"/>
+                <a:cs typeface="楷体"/>
+              </a:rPr>
+              <a:t>追意象 → 读细节 → 析人物 → 推主题（可迁移）</a:t>
+            </a:r>
+          </a:p>
+        </p:txBody>
+      </p:sp>
+      <p:sp>
+        <p:nvSpPr>
+          <p:cNvPr id="26" name="TextBox 25"/>
           <p:cNvSpPr txBox="1"/>
           <p:nvPr/>
         </p:nvSpPr>
@@ -7692,13 +9305,13 @@
             <a:r>
               <a:rPr sz="1300" b="1">
                 <a:solidFill>
-                  <a:srgbClr val="2E7D6B"/>
+                  <a:srgbClr val="B23A2A"/>
                 </a:solidFill>
                 <a:latin typeface="微软雅黑"/>
                 <a:ea typeface="微软雅黑"/>
                 <a:cs typeface="微软雅黑"/>
               </a:rPr>
-              <a:t>分层作业</a:t>
+              <a:t>作业 · 分层</a:t>
             </a:r>
           </a:p>
         </p:txBody>
@@ -7713,6 +9326,302 @@
           <a:xfrm>
             <a:off x="640080" y="1097280"/>
             <a:ext cx="822960" cy="30480"/>
+          </a:xfrm>
+          <a:prstGeom prst="rect">
+            <a:avLst/>
+          </a:prstGeom>
+          <a:solidFill>
+            <a:srgbClr val="B23A2A"/>
+          </a:solidFill>
+          <a:ln>
+            <a:noFill/>
+          </a:ln>
+          <a:effectLst/>
+        </p:spPr>
+        <p:style>
+          <a:lnRef idx="1">
+            <a:schemeClr val="accent1"/>
+          </a:lnRef>
+          <a:fillRef idx="3">
+            <a:schemeClr val="accent1"/>
+          </a:fillRef>
+          <a:effectRef idx="2">
+            <a:schemeClr val="accent1"/>
+          </a:effectRef>
+          <a:fontRef idx="minor">
+            <a:schemeClr val="lt1"/>
+          </a:fontRef>
+        </p:style>
+        <p:txBody>
+          <a:bodyPr rtlCol="0" anchor="ctr"/>
+          <a:lstStyle/>
+          <a:p>
+            <a:pPr algn="ctr"/>
+          </a:p>
+        </p:txBody>
+      </p:sp>
+      <p:sp>
+        <p:nvSpPr>
+          <p:cNvPr id="5" name="TextBox 4"/>
+          <p:cNvSpPr txBox="1"/>
+          <p:nvPr/>
+        </p:nvSpPr>
+        <p:spPr>
+          <a:xfrm>
+            <a:off x="640080" y="1325880"/>
+            <a:ext cx="10058400" cy="548640"/>
+          </a:xfrm>
+          <a:prstGeom prst="rect">
+            <a:avLst/>
+          </a:prstGeom>
+          <a:noFill/>
+        </p:spPr>
+        <p:txBody>
+          <a:bodyPr wrap="square" anchor="t" lIns="0" rIns="0" tIns="0" bIns="0">
+            <a:spAutoFit/>
+          </a:bodyPr>
+          <a:lstStyle/>
+          <a:p>
+            <a:pPr algn="l"/>
+            <a:r>
+              <a:rPr sz="2600" b="1">
+                <a:solidFill>
+                  <a:srgbClr val="1C2A33"/>
+                </a:solidFill>
+                <a:latin typeface="楷体"/>
+                <a:ea typeface="楷体"/>
+                <a:cs typeface="楷体"/>
+              </a:rPr>
+              <a:t>基础 · 提升 · 拓展</a:t>
+            </a:r>
+          </a:p>
+        </p:txBody>
+      </p:sp>
+      <p:sp>
+        <p:nvSpPr>
+          <p:cNvPr id="6" name="Rounded Rectangle 5"/>
+          <p:cNvSpPr/>
+          <p:nvPr/>
+        </p:nvSpPr>
+        <p:spPr>
+          <a:xfrm>
+            <a:off x="640080" y="2194560"/>
+            <a:ext cx="3393338" cy="3383280"/>
+          </a:xfrm>
+          <a:prstGeom prst="roundRect">
+            <a:avLst/>
+          </a:prstGeom>
+          <a:solidFill>
+            <a:srgbClr val="FFFFFF"/>
+          </a:solidFill>
+          <a:ln w="20320">
+            <a:solidFill>
+              <a:srgbClr val="B23A2A"/>
+            </a:solidFill>
+          </a:ln>
+          <a:effectLst/>
+        </p:spPr>
+        <p:style>
+          <a:lnRef idx="1">
+            <a:schemeClr val="accent1"/>
+          </a:lnRef>
+          <a:fillRef idx="3">
+            <a:schemeClr val="accent1"/>
+          </a:fillRef>
+          <a:effectRef idx="2">
+            <a:schemeClr val="accent1"/>
+          </a:effectRef>
+          <a:fontRef idx="minor">
+            <a:schemeClr val="lt1"/>
+          </a:fontRef>
+        </p:style>
+        <p:txBody>
+          <a:bodyPr rtlCol="0" anchor="ctr"/>
+          <a:lstStyle/>
+          <a:p>
+            <a:pPr algn="ctr"/>
+          </a:p>
+        </p:txBody>
+      </p:sp>
+      <p:sp>
+        <p:nvSpPr>
+          <p:cNvPr id="7" name="Rectangle 6"/>
+          <p:cNvSpPr/>
+          <p:nvPr/>
+        </p:nvSpPr>
+        <p:spPr>
+          <a:xfrm>
+            <a:off x="640080" y="2194560"/>
+            <a:ext cx="3393338" cy="548640"/>
+          </a:xfrm>
+          <a:prstGeom prst="rect">
+            <a:avLst/>
+          </a:prstGeom>
+          <a:solidFill>
+            <a:srgbClr val="B23A2A"/>
+          </a:solidFill>
+          <a:ln>
+            <a:noFill/>
+          </a:ln>
+          <a:effectLst/>
+        </p:spPr>
+        <p:style>
+          <a:lnRef idx="1">
+            <a:schemeClr val="accent1"/>
+          </a:lnRef>
+          <a:fillRef idx="3">
+            <a:schemeClr val="accent1"/>
+          </a:fillRef>
+          <a:effectRef idx="2">
+            <a:schemeClr val="accent1"/>
+          </a:effectRef>
+          <a:fontRef idx="minor">
+            <a:schemeClr val="lt1"/>
+          </a:fontRef>
+        </p:style>
+        <p:txBody>
+          <a:bodyPr rtlCol="0" anchor="ctr"/>
+          <a:lstStyle/>
+          <a:p>
+            <a:pPr algn="ctr"/>
+          </a:p>
+        </p:txBody>
+      </p:sp>
+      <p:sp>
+        <p:nvSpPr>
+          <p:cNvPr id="8" name="TextBox 7"/>
+          <p:cNvSpPr txBox="1"/>
+          <p:nvPr/>
+        </p:nvSpPr>
+        <p:spPr>
+          <a:xfrm>
+            <a:off x="640080" y="2304288"/>
+            <a:ext cx="3393338" cy="365760"/>
+          </a:xfrm>
+          <a:prstGeom prst="rect">
+            <a:avLst/>
+          </a:prstGeom>
+          <a:noFill/>
+        </p:spPr>
+        <p:txBody>
+          <a:bodyPr wrap="square" anchor="t" lIns="0" rIns="0" tIns="0" bIns="0">
+            <a:spAutoFit/>
+          </a:bodyPr>
+          <a:lstStyle/>
+          <a:p>
+            <a:pPr algn="ctr"/>
+            <a:r>
+              <a:rPr sz="1600" b="1">
+                <a:solidFill>
+                  <a:srgbClr val="FFFFFF"/>
+                </a:solidFill>
+                <a:latin typeface="微软雅黑"/>
+                <a:ea typeface="微软雅黑"/>
+                <a:cs typeface="微软雅黑"/>
+              </a:rPr>
+              <a:t>基础 · 必做</a:t>
+            </a:r>
+          </a:p>
+        </p:txBody>
+      </p:sp>
+      <p:sp>
+        <p:nvSpPr>
+          <p:cNvPr id="9" name="TextBox 8"/>
+          <p:cNvSpPr txBox="1"/>
+          <p:nvPr/>
+        </p:nvSpPr>
+        <p:spPr>
+          <a:xfrm>
+            <a:off x="914400" y="2971800"/>
+            <a:ext cx="2844698" cy="2468880"/>
+          </a:xfrm>
+          <a:prstGeom prst="rect">
+            <a:avLst/>
+          </a:prstGeom>
+          <a:noFill/>
+        </p:spPr>
+        <p:txBody>
+          <a:bodyPr wrap="square" anchor="t" lIns="0" rIns="0" tIns="0" bIns="0">
+            <a:spAutoFit/>
+          </a:bodyPr>
+          <a:lstStyle/>
+          <a:p>
+            <a:pPr algn="l">
+              <a:lnSpc>
+                <a:spcPct val="155000"/>
+              </a:lnSpc>
+            </a:pPr>
+            <a:r>
+              <a:rPr sz="1350" b="0">
+                <a:solidFill>
+                  <a:srgbClr val="1C2A33"/>
+                </a:solidFill>
+                <a:latin typeface="楷体"/>
+                <a:ea typeface="楷体"/>
+                <a:cs typeface="楷体"/>
+              </a:rPr>
+              <a:t>1. 梳理「百合花被子」在小说中的四次出现，各用一句话概括其状态与含义。
+2. 找出描写小通讯员腼腆的 3 处细节，各用一句话概括。</a:t>
+            </a:r>
+          </a:p>
+        </p:txBody>
+      </p:sp>
+      <p:sp>
+        <p:nvSpPr>
+          <p:cNvPr id="10" name="Rounded Rectangle 9"/>
+          <p:cNvSpPr/>
+          <p:nvPr/>
+        </p:nvSpPr>
+        <p:spPr>
+          <a:xfrm>
+            <a:off x="4399178" y="2194560"/>
+            <a:ext cx="3393338" cy="3383280"/>
+          </a:xfrm>
+          <a:prstGeom prst="roundRect">
+            <a:avLst/>
+          </a:prstGeom>
+          <a:solidFill>
+            <a:srgbClr val="FFFFFF"/>
+          </a:solidFill>
+          <a:ln w="20320">
+            <a:solidFill>
+              <a:srgbClr val="2E7D6B"/>
+            </a:solidFill>
+          </a:ln>
+          <a:effectLst/>
+        </p:spPr>
+        <p:style>
+          <a:lnRef idx="1">
+            <a:schemeClr val="accent1"/>
+          </a:lnRef>
+          <a:fillRef idx="3">
+            <a:schemeClr val="accent1"/>
+          </a:fillRef>
+          <a:effectRef idx="2">
+            <a:schemeClr val="accent1"/>
+          </a:effectRef>
+          <a:fontRef idx="minor">
+            <a:schemeClr val="lt1"/>
+          </a:fontRef>
+        </p:style>
+        <p:txBody>
+          <a:bodyPr rtlCol="0" anchor="ctr"/>
+          <a:lstStyle/>
+          <a:p>
+            <a:pPr algn="ctr"/>
+          </a:p>
+        </p:txBody>
+      </p:sp>
+      <p:sp>
+        <p:nvSpPr>
+          <p:cNvPr id="11" name="Rectangle 10"/>
+          <p:cNvSpPr/>
+          <p:nvPr/>
+        </p:nvSpPr>
+        <p:spPr>
+          <a:xfrm>
+            <a:off x="4399178" y="2194560"/>
+            <a:ext cx="3393338" cy="548640"/>
           </a:xfrm>
           <a:prstGeom prst="rect">
             <a:avLst/>
@@ -7749,14 +9658,92 @@
       </p:sp>
       <p:sp>
         <p:nvSpPr>
-          <p:cNvPr id="5" name="Rounded Rectangle 4"/>
+          <p:cNvPr id="12" name="TextBox 11"/>
+          <p:cNvSpPr txBox="1"/>
+          <p:nvPr/>
+        </p:nvSpPr>
+        <p:spPr>
+          <a:xfrm>
+            <a:off x="4399178" y="2304288"/>
+            <a:ext cx="3393338" cy="365760"/>
+          </a:xfrm>
+          <a:prstGeom prst="rect">
+            <a:avLst/>
+          </a:prstGeom>
+          <a:noFill/>
+        </p:spPr>
+        <p:txBody>
+          <a:bodyPr wrap="square" anchor="t" lIns="0" rIns="0" tIns="0" bIns="0">
+            <a:spAutoFit/>
+          </a:bodyPr>
+          <a:lstStyle/>
+          <a:p>
+            <a:pPr algn="ctr"/>
+            <a:r>
+              <a:rPr sz="1600" b="1">
+                <a:solidFill>
+                  <a:srgbClr val="FFFFFF"/>
+                </a:solidFill>
+                <a:latin typeface="微软雅黑"/>
+                <a:ea typeface="微软雅黑"/>
+                <a:cs typeface="微软雅黑"/>
+              </a:rPr>
+              <a:t>提升 · 选做</a:t>
+            </a:r>
+          </a:p>
+        </p:txBody>
+      </p:sp>
+      <p:sp>
+        <p:nvSpPr>
+          <p:cNvPr id="13" name="TextBox 12"/>
+          <p:cNvSpPr txBox="1"/>
+          <p:nvPr/>
+        </p:nvSpPr>
+        <p:spPr>
+          <a:xfrm>
+            <a:off x="4673498" y="2971800"/>
+            <a:ext cx="2844698" cy="2468880"/>
+          </a:xfrm>
+          <a:prstGeom prst="rect">
+            <a:avLst/>
+          </a:prstGeom>
+          <a:noFill/>
+        </p:spPr>
+        <p:txBody>
+          <a:bodyPr wrap="square" anchor="t" lIns="0" rIns="0" tIns="0" bIns="0">
+            <a:spAutoFit/>
+          </a:bodyPr>
+          <a:lstStyle/>
+          <a:p>
+            <a:pPr algn="l">
+              <a:lnSpc>
+                <a:spcPct val="155000"/>
+              </a:lnSpc>
+            </a:pPr>
+            <a:r>
+              <a:rPr sz="1350" b="0">
+                <a:solidFill>
+                  <a:srgbClr val="1C2A33"/>
+                </a:solidFill>
+                <a:latin typeface="楷体"/>
+                <a:ea typeface="楷体"/>
+                <a:cs typeface="楷体"/>
+              </a:rPr>
+              <a:t>写一段 200 字赏析，分析「衣服破洞」三次出现的递进意义：①引用原文；②分析每次的不同功能；③点明递进关系。</a:t>
+            </a:r>
+          </a:p>
+        </p:txBody>
+      </p:sp>
+      <p:sp>
+        <p:nvSpPr>
+          <p:cNvPr id="14" name="Rounded Rectangle 13"/>
           <p:cNvSpPr/>
           <p:nvPr/>
         </p:nvSpPr>
         <p:spPr>
           <a:xfrm>
-            <a:off x="640080" y="1417320"/>
-            <a:ext cx="10911535" cy="1417320"/>
+            <a:off x="8158276" y="2194560"/>
+            <a:ext cx="3393338" cy="3383280"/>
           </a:xfrm>
           <a:prstGeom prst="roundRect">
             <a:avLst/>
@@ -7764,9 +9751,9 @@
           <a:solidFill>
             <a:srgbClr val="FFFFFF"/>
           </a:solidFill>
-          <a:ln w="22860">
+          <a:ln w="20320">
             <a:solidFill>
-              <a:srgbClr val="2E7D6B"/>
+              <a:srgbClr val="C8A86B"/>
             </a:solidFill>
           </a:ln>
           <a:effectLst/>
@@ -7795,107 +9782,23 @@
       </p:sp>
       <p:sp>
         <p:nvSpPr>
-          <p:cNvPr id="6" name="TextBox 5"/>
-          <p:cNvSpPr txBox="1"/>
-          <p:nvPr/>
-        </p:nvSpPr>
-        <p:spPr>
-          <a:xfrm>
-            <a:off x="1371600" y="1527048"/>
-            <a:ext cx="9997135" cy="457200"/>
-          </a:xfrm>
-          <a:prstGeom prst="rect">
-            <a:avLst/>
-          </a:prstGeom>
-          <a:noFill/>
-        </p:spPr>
-        <p:txBody>
-          <a:bodyPr wrap="square" anchor="t" lIns="0" rIns="0" tIns="0" bIns="0">
-            <a:spAutoFit/>
-          </a:bodyPr>
-          <a:lstStyle/>
-          <a:p>
-            <a:pPr algn="l">
-              <a:lnSpc>
-                <a:spcPct val="110000"/>
-              </a:lnSpc>
-            </a:pPr>
-            <a:r>
-              <a:rPr sz="1600" b="1">
-                <a:solidFill>
-                  <a:srgbClr val="1C2A33"/>
-                </a:solidFill>
-                <a:latin typeface="微软雅黑"/>
-                <a:ea typeface="微软雅黑"/>
-                <a:cs typeface="微软雅黑"/>
-              </a:rPr>
-              <a:t/>
-            </a:r>
-          </a:p>
-        </p:txBody>
-      </p:sp>
-      <p:sp>
-        <p:nvSpPr>
-          <p:cNvPr id="7" name="TextBox 6"/>
-          <p:cNvSpPr txBox="1"/>
-          <p:nvPr/>
-        </p:nvSpPr>
-        <p:spPr>
-          <a:xfrm>
-            <a:off x="1371600" y="1965960"/>
-            <a:ext cx="9997135" cy="777240"/>
-          </a:xfrm>
-          <a:prstGeom prst="rect">
-            <a:avLst/>
-          </a:prstGeom>
-          <a:noFill/>
-        </p:spPr>
-        <p:txBody>
-          <a:bodyPr wrap="square" anchor="t" lIns="0" rIns="0" tIns="0" bIns="0">
-            <a:spAutoFit/>
-          </a:bodyPr>
-          <a:lstStyle/>
-          <a:p>
-            <a:pPr algn="l">
-              <a:lnSpc>
-                <a:spcPct val="128000"/>
-              </a:lnSpc>
-            </a:pPr>
-            <a:r>
-              <a:rPr sz="1100" b="0">
-                <a:solidFill>
-                  <a:srgbClr val="1C2A33"/>
-                </a:solidFill>
-                <a:latin typeface="楷体"/>
-                <a:ea typeface="楷体"/>
-                <a:cs typeface="楷体"/>
-              </a:rPr>
-              <a:t>【基础作业】1. 梳理「百合花被子」在小说中的四次出现，各用一句话概括其状态和含义。2. 找出描写小通讯员腼腆的3处细节，各用一句话概括。</a:t>
-            </a:r>
-          </a:p>
-        </p:txBody>
-      </p:sp>
-      <p:sp>
-        <p:nvSpPr>
-          <p:cNvPr id="8" name="Rounded Rectangle 7"/>
+          <p:cNvPr id="15" name="Rectangle 14"/>
           <p:cNvSpPr/>
           <p:nvPr/>
         </p:nvSpPr>
         <p:spPr>
           <a:xfrm>
-            <a:off x="640080" y="2971800"/>
-            <a:ext cx="10911535" cy="1417320"/>
-          </a:xfrm>
-          <a:prstGeom prst="roundRect">
+            <a:off x="8158276" y="2194560"/>
+            <a:ext cx="3393338" cy="548640"/>
+          </a:xfrm>
+          <a:prstGeom prst="rect">
             <a:avLst/>
           </a:prstGeom>
           <a:solidFill>
-            <a:srgbClr val="FFFFFF"/>
+            <a:srgbClr val="C8A86B"/>
           </a:solidFill>
-          <a:ln w="22860">
-            <a:solidFill>
-              <a:srgbClr val="2E7D6B"/>
-            </a:solidFill>
+          <a:ln>
+            <a:noFill/>
           </a:ln>
           <a:effectLst/>
         </p:spPr>
@@ -7923,14 +9826,14 @@
       </p:sp>
       <p:sp>
         <p:nvSpPr>
-          <p:cNvPr id="9" name="TextBox 8"/>
+          <p:cNvPr id="16" name="TextBox 15"/>
           <p:cNvSpPr txBox="1"/>
           <p:nvPr/>
         </p:nvSpPr>
         <p:spPr>
           <a:xfrm>
-            <a:off x="1371600" y="3081528"/>
-            <a:ext cx="9997135" cy="457200"/>
+            <a:off x="8158276" y="2304288"/>
+            <a:ext cx="3393338" cy="365760"/>
           </a:xfrm>
           <a:prstGeom prst="rect">
             <a:avLst/>
@@ -7943,35 +9846,31 @@
           </a:bodyPr>
           <a:lstStyle/>
           <a:p>
-            <a:pPr algn="l">
-              <a:lnSpc>
-                <a:spcPct val="110000"/>
-              </a:lnSpc>
-            </a:pPr>
+            <a:pPr algn="ctr"/>
             <a:r>
               <a:rPr sz="1600" b="1">
                 <a:solidFill>
-                  <a:srgbClr val="1C2A33"/>
+                  <a:srgbClr val="FFFFFF"/>
                 </a:solidFill>
                 <a:latin typeface="微软雅黑"/>
                 <a:ea typeface="微软雅黑"/>
                 <a:cs typeface="微软雅黑"/>
               </a:rPr>
-              <a:t/>
-            </a:r>
-          </a:p>
-        </p:txBody>
-      </p:sp>
-      <p:sp>
-        <p:nvSpPr>
-          <p:cNvPr id="10" name="TextBox 9"/>
+              <a:t>拓展 · 衔接</a:t>
+            </a:r>
+          </a:p>
+        </p:txBody>
+      </p:sp>
+      <p:sp>
+        <p:nvSpPr>
+          <p:cNvPr id="17" name="TextBox 16"/>
           <p:cNvSpPr txBox="1"/>
           <p:nvPr/>
         </p:nvSpPr>
         <p:spPr>
           <a:xfrm>
-            <a:off x="1371600" y="3520440"/>
-            <a:ext cx="9997135" cy="777240"/>
+            <a:off x="8432596" y="2971800"/>
+            <a:ext cx="2844698" cy="2468880"/>
           </a:xfrm>
           <a:prstGeom prst="rect">
             <a:avLst/>
@@ -7986,11 +9885,11 @@
           <a:p>
             <a:pPr algn="l">
               <a:lnSpc>
-                <a:spcPct val="128000"/>
+                <a:spcPct val="155000"/>
               </a:lnSpc>
             </a:pPr>
             <a:r>
-              <a:rPr sz="1100" b="0">
+              <a:rPr sz="1350" b="0">
                 <a:solidFill>
                   <a:srgbClr val="1C2A33"/>
                 </a:solidFill>
@@ -7998,14 +9897,158 @@
                 <a:ea typeface="楷体"/>
                 <a:cs typeface="楷体"/>
               </a:rPr>
-              <a:t>【提高作业】写一段200字赏析，分析「衣服破洞」这一细节三次出现的递进意义。要求：①引用原文；②分析每次出现的不同功能；③点明递进关系。</a:t>
-            </a:r>
-          </a:p>
-        </p:txBody>
-      </p:sp>
-      <p:sp>
-        <p:nvSpPr>
-          <p:cNvPr id="11" name="TextBox 10"/>
+              <a:t>预习《哦，香雪》：同样第一人称限知视角，意象从「百合花」变为「铅笔盒」。试试用本课的追踪法，先猜它会怎么变。</a:t>
+            </a:r>
+          </a:p>
+        </p:txBody>
+      </p:sp>
+      <p:sp>
+        <p:nvSpPr>
+          <p:cNvPr id="18" name="Rounded Rectangle 17"/>
+          <p:cNvSpPr/>
+          <p:nvPr/>
+        </p:nvSpPr>
+        <p:spPr>
+          <a:xfrm>
+            <a:off x="640080" y="5166360"/>
+            <a:ext cx="10911535" cy="1325880"/>
+          </a:xfrm>
+          <a:prstGeom prst="roundRect">
+            <a:avLst/>
+          </a:prstGeom>
+          <a:solidFill>
+            <a:srgbClr val="1C2A33"/>
+          </a:solidFill>
+          <a:effectLst/>
+        </p:spPr>
+        <p:style>
+          <a:lnRef idx="1">
+            <a:schemeClr val="accent1"/>
+          </a:lnRef>
+          <a:fillRef idx="3">
+            <a:schemeClr val="accent1"/>
+          </a:fillRef>
+          <a:effectRef idx="2">
+            <a:schemeClr val="accent1"/>
+          </a:effectRef>
+          <a:fontRef idx="minor">
+            <a:schemeClr val="lt1"/>
+          </a:fontRef>
+        </p:style>
+        <p:txBody>
+          <a:bodyPr rtlCol="0" anchor="ctr"/>
+          <a:lstStyle/>
+          <a:p>
+            <a:pPr algn="ctr"/>
+          </a:p>
+        </p:txBody>
+      </p:sp>
+      <p:sp>
+        <p:nvSpPr>
+          <p:cNvPr id="19" name="Rectangle 18"/>
+          <p:cNvSpPr/>
+          <p:nvPr/>
+        </p:nvSpPr>
+        <p:spPr>
+          <a:xfrm>
+            <a:off x="914400" y="5394960"/>
+            <a:ext cx="54864" cy="279400"/>
+          </a:xfrm>
+          <a:prstGeom prst="rect">
+            <a:avLst/>
+          </a:prstGeom>
+          <a:solidFill>
+            <a:srgbClr val="C8A86B"/>
+          </a:solidFill>
+          <a:ln>
+            <a:noFill/>
+          </a:ln>
+          <a:effectLst/>
+        </p:spPr>
+        <p:style>
+          <a:lnRef idx="1">
+            <a:schemeClr val="accent1"/>
+          </a:lnRef>
+          <a:fillRef idx="3">
+            <a:schemeClr val="accent1"/>
+          </a:fillRef>
+          <a:effectRef idx="2">
+            <a:schemeClr val="accent1"/>
+          </a:effectRef>
+          <a:fontRef idx="minor">
+            <a:schemeClr val="lt1"/>
+          </a:fontRef>
+        </p:style>
+        <p:txBody>
+          <a:bodyPr rtlCol="0" anchor="ctr"/>
+          <a:lstStyle/>
+          <a:p>
+            <a:pPr algn="ctr"/>
+          </a:p>
+        </p:txBody>
+      </p:sp>
+      <p:sp>
+        <p:nvSpPr>
+          <p:cNvPr id="20" name="TextBox 19"/>
+          <p:cNvSpPr txBox="1"/>
+          <p:nvPr/>
+        </p:nvSpPr>
+        <p:spPr>
+          <a:xfrm>
+            <a:off x="1143000" y="5303520"/>
+            <a:ext cx="10180015" cy="1097280"/>
+          </a:xfrm>
+          <a:prstGeom prst="rect">
+            <a:avLst/>
+          </a:prstGeom>
+          <a:noFill/>
+        </p:spPr>
+        <p:txBody>
+          <a:bodyPr wrap="square" anchor="t" lIns="0" rIns="0" tIns="0" bIns="0">
+            <a:spAutoFit/>
+          </a:bodyPr>
+          <a:lstStyle/>
+          <a:p>
+            <a:pPr algn="l">
+              <a:spcAft>
+                <a:spcPts val="400"/>
+              </a:spcAft>
+            </a:pPr>
+            <a:r>
+              <a:rPr sz="1600" b="1">
+                <a:solidFill>
+                  <a:srgbClr val="C8A86B"/>
+                </a:solidFill>
+                <a:latin typeface="楷体"/>
+                <a:ea typeface="楷体"/>
+                <a:cs typeface="楷体"/>
+              </a:rPr>
+              <a:t>细读口诀</a:t>
+            </a:r>
+          </a:p>
+          <a:p>
+            <a:pPr algn="l">
+              <a:lnSpc>
+                <a:spcPct val="145000"/>
+              </a:lnSpc>
+            </a:pPr>
+            <a:r>
+              <a:rPr sz="1350" b="0">
+                <a:solidFill>
+                  <a:srgbClr val="FFFFFF"/>
+                </a:solidFill>
+                <a:latin typeface="楷体"/>
+                <a:ea typeface="楷体"/>
+                <a:cs typeface="楷体"/>
+              </a:rPr>
+              <a:t>追意象 → 读细节 → 析人物 → 推主题。下一站——《哦，香雪》，看意象怎么换张脸。</a:t>
+            </a:r>
+          </a:p>
+        </p:txBody>
+      </p:sp>
+      <p:sp>
+        <p:nvSpPr>
+          <p:cNvPr id="21" name="TextBox 20"/>
           <p:cNvSpPr txBox="1"/>
           <p:nvPr/>
         </p:nvSpPr>
@@ -8132,13 +10175,13 @@
             <a:r>
               <a:rPr sz="1300" b="1">
                 <a:solidFill>
-                  <a:srgbClr val="C8A86B"/>
+                  <a:srgbClr val="B23A2A"/>
                 </a:solidFill>
                 <a:latin typeface="微软雅黑"/>
                 <a:ea typeface="微软雅黑"/>
                 <a:cs typeface="微软雅黑"/>
               </a:rPr>
-              <a:t>本课小结</a:t>
+              <a:t>单元小结 · 青春的价值</a:t>
             </a:r>
           </a:p>
         </p:txBody>
@@ -8158,7 +10201,7 @@
             <a:avLst/>
           </a:prstGeom>
           <a:solidFill>
-            <a:srgbClr val="C8A86B"/>
+            <a:srgbClr val="B23A2A"/>
           </a:solidFill>
           <a:ln>
             <a:noFill/>
@@ -8189,23 +10232,62 @@
       </p:sp>
       <p:sp>
         <p:nvSpPr>
-          <p:cNvPr id="5" name="Rectangle 4"/>
+          <p:cNvPr id="5" name="TextBox 4"/>
+          <p:cNvSpPr txBox="1"/>
+          <p:nvPr/>
+        </p:nvSpPr>
+        <p:spPr>
+          <a:xfrm>
+            <a:off x="640080" y="1325880"/>
+            <a:ext cx="10515600" cy="548640"/>
+          </a:xfrm>
+          <a:prstGeom prst="rect">
+            <a:avLst/>
+          </a:prstGeom>
+          <a:noFill/>
+        </p:spPr>
+        <p:txBody>
+          <a:bodyPr wrap="square" anchor="t" lIns="0" rIns="0" tIns="0" bIns="0">
+            <a:spAutoFit/>
+          </a:bodyPr>
+          <a:lstStyle/>
+          <a:p>
+            <a:pPr algn="l"/>
+            <a:r>
+              <a:rPr sz="2600" b="1">
+                <a:solidFill>
+                  <a:srgbClr val="1C2A33"/>
+                </a:solidFill>
+                <a:latin typeface="楷体"/>
+                <a:ea typeface="楷体"/>
+                <a:cs typeface="楷体"/>
+              </a:rPr>
+              <a:t>从诗歌，走到小说</a:t>
+            </a:r>
+          </a:p>
+        </p:txBody>
+      </p:sp>
+      <p:sp>
+        <p:nvSpPr>
+          <p:cNvPr id="6" name="Rounded Rectangle 5"/>
           <p:cNvSpPr/>
           <p:nvPr/>
         </p:nvSpPr>
         <p:spPr>
           <a:xfrm>
-            <a:off x="640080" y="1737360"/>
-            <a:ext cx="54864" cy="431800"/>
-          </a:xfrm>
-          <a:prstGeom prst="rect">
+            <a:off x="640080" y="2148840"/>
+            <a:ext cx="5227167" cy="3931920"/>
+          </a:xfrm>
+          <a:prstGeom prst="roundRect">
             <a:avLst/>
           </a:prstGeom>
           <a:solidFill>
-            <a:srgbClr val="C8A86B"/>
+            <a:srgbClr val="FFFFFF"/>
           </a:solidFill>
-          <a:ln>
-            <a:noFill/>
+          <a:ln w="22860">
+            <a:solidFill>
+              <a:srgbClr val="B23A2A"/>
+            </a:solidFill>
           </a:ln>
           <a:effectLst/>
         </p:spPr>
@@ -8233,14 +10315,14 @@
       </p:sp>
       <p:sp>
         <p:nvSpPr>
-          <p:cNvPr id="6" name="TextBox 5"/>
+          <p:cNvPr id="7" name="TextBox 6"/>
           <p:cNvSpPr txBox="1"/>
           <p:nvPr/>
         </p:nvSpPr>
         <p:spPr>
           <a:xfrm>
-            <a:off x="868680" y="1645920"/>
-            <a:ext cx="10682935" cy="2194560"/>
+            <a:off x="914400" y="2331720"/>
+            <a:ext cx="4678527" cy="457200"/>
           </a:xfrm>
           <a:prstGeom prst="rect">
             <a:avLst/>
@@ -8252,6 +10334,267 @@
             <a:spAutoFit/>
           </a:bodyPr>
           <a:lstStyle/>
+          <a:p>
+            <a:pPr algn="l"/>
+            <a:r>
+              <a:rPr sz="1700" b="1">
+                <a:solidFill>
+                  <a:srgbClr val="B23A2A"/>
+                </a:solidFill>
+                <a:latin typeface="楷体"/>
+                <a:ea typeface="楷体"/>
+                <a:cs typeface="楷体"/>
+              </a:rPr>
+              <a:t>本篇一句话</a:t>
+            </a:r>
+          </a:p>
+        </p:txBody>
+      </p:sp>
+      <p:sp>
+        <p:nvSpPr>
+          <p:cNvPr id="8" name="TextBox 7"/>
+          <p:cNvSpPr txBox="1"/>
+          <p:nvPr/>
+        </p:nvSpPr>
+        <p:spPr>
+          <a:xfrm>
+            <a:off x="914400" y="2834640"/>
+            <a:ext cx="4678527" cy="3108960"/>
+          </a:xfrm>
+          <a:prstGeom prst="rect">
+            <a:avLst/>
+          </a:prstGeom>
+          <a:noFill/>
+        </p:spPr>
+        <p:txBody>
+          <a:bodyPr wrap="square" anchor="t" lIns="0" rIns="0" tIns="0" bIns="0">
+            <a:spAutoFit/>
+          </a:bodyPr>
+          <a:lstStyle/>
+          <a:p>
+            <a:pPr algn="l">
+              <a:lnSpc>
+                <a:spcPct val="155000"/>
+              </a:lnSpc>
+              <a:spcAft>
+                <a:spcPts val="800"/>
+              </a:spcAft>
+            </a:pPr>
+            <a:r>
+              <a:rPr sz="1450" b="0">
+                <a:solidFill>
+                  <a:srgbClr val="1C2A33"/>
+                </a:solidFill>
+                <a:latin typeface="楷体"/>
+                <a:ea typeface="楷体"/>
+                <a:cs typeface="楷体"/>
+              </a:rPr>
+              <a:t>一条被子、一个腼腆的通讯员、一个新媳妇，</a:t>
+            </a:r>
+          </a:p>
+          <a:p>
+            <a:pPr algn="l">
+              <a:lnSpc>
+                <a:spcPct val="155000"/>
+              </a:lnSpc>
+              <a:spcAft>
+                <a:spcPts val="800"/>
+              </a:spcAft>
+            </a:pPr>
+            <a:r>
+              <a:rPr sz="1450" b="0">
+                <a:solidFill>
+                  <a:srgbClr val="1C2A33"/>
+                </a:solidFill>
+                <a:latin typeface="楷体"/>
+                <a:ea typeface="楷体"/>
+                <a:cs typeface="楷体"/>
+              </a:rPr>
+              <a:t>写出了战争里的人性之美与青春的纯真——</a:t>
+            </a:r>
+          </a:p>
+          <a:p>
+            <a:pPr algn="l">
+              <a:lnSpc>
+                <a:spcPct val="155000"/>
+              </a:lnSpc>
+            </a:pPr>
+            <a:r>
+              <a:rPr sz="1450" b="1">
+                <a:solidFill>
+                  <a:srgbClr val="B23A2A"/>
+                </a:solidFill>
+                <a:latin typeface="楷体"/>
+                <a:ea typeface="楷体"/>
+                <a:cs typeface="楷体"/>
+              </a:rPr>
+              <a:t>纯洁与牺牲，被同一朵百合花连在一起。</a:t>
+            </a:r>
+          </a:p>
+        </p:txBody>
+      </p:sp>
+      <p:sp>
+        <p:nvSpPr>
+          <p:cNvPr id="9" name="Rounded Rectangle 8"/>
+          <p:cNvSpPr/>
+          <p:nvPr/>
+        </p:nvSpPr>
+        <p:spPr>
+          <a:xfrm>
+            <a:off x="6324447" y="2148840"/>
+            <a:ext cx="5227167" cy="3931920"/>
+          </a:xfrm>
+          <a:prstGeom prst="roundRect">
+            <a:avLst/>
+          </a:prstGeom>
+          <a:solidFill>
+            <a:srgbClr val="1C2A33"/>
+          </a:solidFill>
+          <a:effectLst/>
+        </p:spPr>
+        <p:style>
+          <a:lnRef idx="1">
+            <a:schemeClr val="accent1"/>
+          </a:lnRef>
+          <a:fillRef idx="3">
+            <a:schemeClr val="accent1"/>
+          </a:fillRef>
+          <a:effectRef idx="2">
+            <a:schemeClr val="accent1"/>
+          </a:effectRef>
+          <a:fontRef idx="minor">
+            <a:schemeClr val="lt1"/>
+          </a:fontRef>
+        </p:style>
+        <p:txBody>
+          <a:bodyPr rtlCol="0" anchor="ctr"/>
+          <a:lstStyle/>
+          <a:p>
+            <a:pPr algn="ctr"/>
+          </a:p>
+        </p:txBody>
+      </p:sp>
+      <p:sp>
+        <p:nvSpPr>
+          <p:cNvPr id="10" name="TextBox 9"/>
+          <p:cNvSpPr txBox="1"/>
+          <p:nvPr/>
+        </p:nvSpPr>
+        <p:spPr>
+          <a:xfrm>
+            <a:off x="6598767" y="2331720"/>
+            <a:ext cx="4678527" cy="457200"/>
+          </a:xfrm>
+          <a:prstGeom prst="rect">
+            <a:avLst/>
+          </a:prstGeom>
+          <a:noFill/>
+        </p:spPr>
+        <p:txBody>
+          <a:bodyPr wrap="square" anchor="t" lIns="0" rIns="0" tIns="0" bIns="0">
+            <a:spAutoFit/>
+          </a:bodyPr>
+          <a:lstStyle/>
+          <a:p>
+            <a:pPr algn="l"/>
+            <a:r>
+              <a:rPr sz="1700" b="1">
+                <a:solidFill>
+                  <a:srgbClr val="C8A86B"/>
+                </a:solidFill>
+                <a:latin typeface="楷体"/>
+                <a:ea typeface="楷体"/>
+                <a:cs typeface="楷体"/>
+              </a:rPr>
+              <a:t>一条能力线</a:t>
+            </a:r>
+          </a:p>
+        </p:txBody>
+      </p:sp>
+      <p:sp>
+        <p:nvSpPr>
+          <p:cNvPr id="11" name="TextBox 10"/>
+          <p:cNvSpPr txBox="1"/>
+          <p:nvPr/>
+        </p:nvSpPr>
+        <p:spPr>
+          <a:xfrm>
+            <a:off x="6598767" y="2834640"/>
+            <a:ext cx="4678527" cy="3108960"/>
+          </a:xfrm>
+          <a:prstGeom prst="rect">
+            <a:avLst/>
+          </a:prstGeom>
+          <a:noFill/>
+        </p:spPr>
+        <p:txBody>
+          <a:bodyPr wrap="square" anchor="t" lIns="0" rIns="0" tIns="0" bIns="0">
+            <a:spAutoFit/>
+          </a:bodyPr>
+          <a:lstStyle/>
+          <a:p>
+            <a:pPr algn="l">
+              <a:lnSpc>
+                <a:spcPct val="150000"/>
+              </a:lnSpc>
+              <a:spcAft>
+                <a:spcPts val="600"/>
+              </a:spcAft>
+            </a:pPr>
+            <a:r>
+              <a:rPr sz="1400" b="0">
+                <a:solidFill>
+                  <a:srgbClr val="FFFFFF"/>
+                </a:solidFill>
+                <a:latin typeface="楷体"/>
+                <a:ea typeface="楷体"/>
+                <a:cs typeface="楷体"/>
+              </a:rPr>
+              <a:t>· 读意象：找反复出现的物与画面</a:t>
+            </a:r>
+          </a:p>
+          <a:p>
+            <a:pPr algn="l">
+              <a:lnSpc>
+                <a:spcPct val="150000"/>
+              </a:lnSpc>
+              <a:spcAft>
+                <a:spcPts val="600"/>
+              </a:spcAft>
+            </a:pPr>
+            <a:r>
+              <a:rPr sz="1400" b="0">
+                <a:solidFill>
+                  <a:srgbClr val="FFFFFF"/>
+                </a:solidFill>
+                <a:latin typeface="楷体"/>
+                <a:ea typeface="楷体"/>
+                <a:cs typeface="楷体"/>
+              </a:rPr>
+              <a:t>· 追细节：看它出现几次、如何变化</a:t>
+            </a:r>
+          </a:p>
+          <a:p>
+            <a:pPr algn="l">
+              <a:lnSpc>
+                <a:spcPct val="150000"/>
+              </a:lnSpc>
+              <a:spcAft>
+                <a:spcPts val="600"/>
+              </a:spcAft>
+            </a:pPr>
+            <a:r>
+              <a:rPr sz="1400" b="0">
+                <a:solidFill>
+                  <a:srgbClr val="FFFFFF"/>
+                </a:solidFill>
+                <a:latin typeface="楷体"/>
+                <a:ea typeface="楷体"/>
+                <a:cs typeface="楷体"/>
+              </a:rPr>
+              <a:t>· 析人物：从言行推导性格</a:t>
+            </a:r>
+          </a:p>
           <a:p>
             <a:pPr algn="l">
               <a:lnSpc>
@@ -8262,36 +10605,40 @@
               </a:spcAft>
             </a:pPr>
             <a:r>
-              <a:rPr sz="2200" b="0">
-                <a:solidFill>
-                  <a:srgbClr val="1C2A33"/>
+              <a:rPr sz="1400" b="0">
+                <a:solidFill>
+                  <a:srgbClr val="FFFFFF"/>
                 </a:solidFill>
                 <a:latin typeface="楷体"/>
                 <a:ea typeface="楷体"/>
                 <a:cs typeface="楷体"/>
               </a:rPr>
-              <a:t>本单元主题：青春的价值。把今天学到的方法带进下一篇——自己读、自己想、自己写。</a:t>
-            </a:r>
-          </a:p>
-          <a:p>
-            <a:pPr algn="l"/>
-            <a:r>
-              <a:rPr sz="1600" b="1">
-                <a:solidFill>
-                  <a:srgbClr val="B23A2A"/>
-                </a:solidFill>
-                <a:latin typeface="微软雅黑"/>
-                <a:ea typeface="微软雅黑"/>
-                <a:cs typeface="微软雅黑"/>
-              </a:rPr>
-              <a:t>方法迁移：圈关键信息 → 理事件脉络 → 析人物精神</a:t>
-            </a:r>
-          </a:p>
-        </p:txBody>
-      </p:sp>
-      <p:sp>
-        <p:nvSpPr>
-          <p:cNvPr id="7" name="TextBox 6"/>
+              <a:t>· 推主题：细节 → 人物 → 主题</a:t>
+            </a:r>
+          </a:p>
+          <a:p>
+            <a:pPr algn="l">
+              <a:lnSpc>
+                <a:spcPct val="150000"/>
+              </a:lnSpc>
+            </a:pPr>
+            <a:r>
+              <a:rPr sz="1350" b="1">
+                <a:solidFill>
+                  <a:srgbClr val="C8A86B"/>
+                </a:solidFill>
+                <a:latin typeface="楷体"/>
+                <a:ea typeface="楷体"/>
+                <a:cs typeface="楷体"/>
+              </a:rPr>
+              <a:t>单元主题：青春的价值，在于主动追求（担当·激情·纯真·觉醒）。</a:t>
+            </a:r>
+          </a:p>
+        </p:txBody>
+      </p:sp>
+      <p:sp>
+        <p:nvSpPr>
+          <p:cNvPr id="12" name="TextBox 11"/>
           <p:cNvSpPr txBox="1"/>
           <p:nvPr/>
         </p:nvSpPr>
